--- a/content/05-teaching-resources/slides/specialism/04-legal-and-ethical-development.pptx
+++ b/content/05-teaching-resources/slides/specialism/04-legal-and-ethical-development.pptx
@@ -13,6 +13,10 @@
     <p:sldId id="261" r:id="rId13"/>
     <p:sldId id="262" r:id="rId14"/>
     <p:sldId id="263" r:id="rId15"/>
+    <p:sldId id="264" r:id="rId16"/>
+    <p:sldId id="265" r:id="rId17"/>
+    <p:sldId id="266" r:id="rId18"/>
+    <p:sldId id="267" r:id="rId19"/>
   </p:sldIdLst>
   <p:sldSz cx="12191695" cy="6858000" type="screen4x3"/>
   <p:notesSz cx="6858000" cy="9144000"/>
@@ -509,7 +513,22 @@
           <a:lstStyle/>
           <a:p>
             <a:r>
-              <a:t>Give students a few minutes to answer on mini whiteboards or paper, then reveal the answers on the next slide.</a:t>
+              <a:t>Answers:</a:t>
+            </a:r>
+          </a:p>
+          <a:p>
+            <a:r>
+              <a:t>1. Gambling legislation and consumer protection.</a:t>
+            </a:r>
+          </a:p>
+          <a:p>
+            <a:r>
+              <a:t>2. Laws differ between countries.</a:t>
+            </a:r>
+          </a:p>
+          <a:p>
+            <a:r>
+              <a:t>3. E.g. data protection, privacy, security.</a:t>
             </a:r>
           </a:p>
         </p:txBody>
@@ -579,7 +598,22 @@
           <a:lstStyle/>
           <a:p>
             <a:r>
-              <a:t>Talk through any answers the class found difficult.</a:t>
+              <a:t>Answers:</a:t>
+            </a:r>
+          </a:p>
+          <a:p>
+            <a:r>
+              <a:t>1. The web.</a:t>
+            </a:r>
+          </a:p>
+          <a:p>
+            <a:r>
+              <a:t>2. E.g. tricking users into subscriptions.</a:t>
+            </a:r>
+          </a:p>
+          <a:p>
+            <a:r>
+              <a:t>3. They set legal terms for using others' code.</a:t>
             </a:r>
           </a:p>
         </p:txBody>
@@ -605,6 +639,146 @@
 </file>
 
 <file path=ppt/notesSlides/notesSlide3.xml><?xml version="1.0" encoding="utf-8"?>
+<p:notes xmlns:a="http://schemas.openxmlformats.org/drawingml/2006/main" xmlns:p="http://schemas.openxmlformats.org/presentationml/2006/main" xmlns:r="http://schemas.openxmlformats.org/officeDocument/2006/relationships">
+  <p:cSld>
+    <p:spTree>
+      <p:nvGrpSpPr>
+        <p:cNvPr id="1" name=""/>
+        <p:cNvGrpSpPr/>
+        <p:nvPr/>
+      </p:nvGrpSpPr>
+      <p:grpSpPr>
+        <a:xfrm>
+          <a:off x="0" y="0"/>
+          <a:ext cx="0" cy="0"/>
+          <a:chOff x="0" y="0"/>
+          <a:chExt cx="0" cy="0"/>
+        </a:xfrm>
+      </p:grpSpPr>
+      <p:sp>
+        <p:nvSpPr>
+          <p:cNvPr id="2" name="Slide Image Placeholder 1"/>
+          <p:cNvSpPr>
+            <a:spLocks noGrp="1"/>
+          </p:cNvSpPr>
+          <p:nvPr>
+            <p:ph type="sldImg" idx="2"/>
+          </p:nvPr>
+        </p:nvSpPr>
+        <p:spPr/>
+      </p:sp>
+      <p:sp>
+        <p:nvSpPr>
+          <p:cNvPr id="3" name="Notes Placeholder 2"/>
+          <p:cNvSpPr>
+            <a:spLocks noGrp="1"/>
+          </p:cNvSpPr>
+          <p:nvPr>
+            <p:ph type="body" idx="3" sz="quarter"/>
+          </p:nvPr>
+        </p:nvSpPr>
+        <p:spPr/>
+        <p:txBody>
+          <a:bodyPr/>
+          <a:lstStyle/>
+          <a:p>
+            <a:r>
+              <a:t>Give students a few minutes to answer on mini whiteboards or paper, then reveal the answers on the next slide.</a:t>
+            </a:r>
+          </a:p>
+        </p:txBody>
+      </p:sp>
+      <p:sp>
+        <p:nvSpPr>
+          <p:cNvPr id="4" name="Slide Number Placeholder 3"/>
+          <p:cNvSpPr>
+            <a:spLocks noGrp="1"/>
+          </p:cNvSpPr>
+          <p:nvPr>
+            <p:ph type="sldNum" idx="5" sz="quarter"/>
+          </p:nvPr>
+        </p:nvSpPr>
+        <p:spPr/>
+      </p:sp>
+    </p:spTree>
+  </p:cSld>
+  <p:clrMapOvr>
+    <a:masterClrMapping/>
+  </p:clrMapOvr>
+</p:notes>
+</file>
+
+<file path=ppt/notesSlides/notesSlide4.xml><?xml version="1.0" encoding="utf-8"?>
+<p:notes xmlns:a="http://schemas.openxmlformats.org/drawingml/2006/main" xmlns:p="http://schemas.openxmlformats.org/presentationml/2006/main" xmlns:r="http://schemas.openxmlformats.org/officeDocument/2006/relationships">
+  <p:cSld>
+    <p:spTree>
+      <p:nvGrpSpPr>
+        <p:cNvPr id="1" name=""/>
+        <p:cNvGrpSpPr/>
+        <p:nvPr/>
+      </p:nvGrpSpPr>
+      <p:grpSpPr>
+        <a:xfrm>
+          <a:off x="0" y="0"/>
+          <a:ext cx="0" cy="0"/>
+          <a:chOff x="0" y="0"/>
+          <a:chExt cx="0" cy="0"/>
+        </a:xfrm>
+      </p:grpSpPr>
+      <p:sp>
+        <p:nvSpPr>
+          <p:cNvPr id="2" name="Slide Image Placeholder 1"/>
+          <p:cNvSpPr>
+            <a:spLocks noGrp="1"/>
+          </p:cNvSpPr>
+          <p:nvPr>
+            <p:ph type="sldImg" idx="2"/>
+          </p:nvPr>
+        </p:nvSpPr>
+        <p:spPr/>
+      </p:sp>
+      <p:sp>
+        <p:nvSpPr>
+          <p:cNvPr id="3" name="Notes Placeholder 2"/>
+          <p:cNvSpPr>
+            <a:spLocks noGrp="1"/>
+          </p:cNvSpPr>
+          <p:nvPr>
+            <p:ph type="body" idx="3" sz="quarter"/>
+          </p:nvPr>
+        </p:nvSpPr>
+        <p:spPr/>
+        <p:txBody>
+          <a:bodyPr/>
+          <a:lstStyle/>
+          <a:p>
+            <a:r>
+              <a:t>Talk through any answers the class found difficult.</a:t>
+            </a:r>
+          </a:p>
+        </p:txBody>
+      </p:sp>
+      <p:sp>
+        <p:nvSpPr>
+          <p:cNvPr id="4" name="Slide Number Placeholder 3"/>
+          <p:cNvSpPr>
+            <a:spLocks noGrp="1"/>
+          </p:cNvSpPr>
+          <p:nvPr>
+            <p:ph type="sldNum" idx="5" sz="quarter"/>
+          </p:nvPr>
+        </p:nvSpPr>
+        <p:spPr/>
+      </p:sp>
+    </p:spTree>
+  </p:cSld>
+  <p:clrMapOvr>
+    <a:masterClrMapping/>
+  </p:clrMapOvr>
+</p:notes>
+</file>
+
+<file path=ppt/notesSlides/notesSlide5.xml><?xml version="1.0" encoding="utf-8"?>
 <p:notes xmlns:a="http://schemas.openxmlformats.org/drawingml/2006/main" xmlns:p="http://schemas.openxmlformats.org/presentationml/2006/main" xmlns:r="http://schemas.openxmlformats.org/officeDocument/2006/relationships">
   <p:cSld>
     <p:spTree>
@@ -3974,6 +4148,1756 @@
 </p:sld>
 </file>
 
+<file path=ppt/slides/slide10.xml><?xml version="1.0" encoding="utf-8"?>
+<p:sld xmlns:a="http://schemas.openxmlformats.org/drawingml/2006/main" xmlns:p="http://schemas.openxmlformats.org/presentationml/2006/main" xmlns:r="http://schemas.openxmlformats.org/officeDocument/2006/relationships">
+  <p:cSld>
+    <p:bg>
+      <p:bgPr>
+        <a:solidFill>
+          <a:srgbClr val="FFFFFF"/>
+        </a:solidFill>
+        <a:effectLst/>
+      </p:bgPr>
+    </p:bg>
+    <p:spTree>
+      <p:nvGrpSpPr>
+        <p:cNvPr id="1" name=""/>
+        <p:cNvGrpSpPr/>
+        <p:nvPr/>
+      </p:nvGrpSpPr>
+      <p:grpSpPr/>
+      <p:sp>
+        <p:nvSpPr>
+          <p:cNvPr id="2" name="TextBox 1"/>
+          <p:cNvSpPr txBox="1"/>
+          <p:nvPr/>
+        </p:nvSpPr>
+        <p:spPr>
+          <a:xfrm>
+            <a:off x="548640" y="320040"/>
+            <a:ext cx="11094415" cy="274320"/>
+          </a:xfrm>
+          <a:prstGeom prst="rect">
+            <a:avLst/>
+          </a:prstGeom>
+          <a:noFill/>
+        </p:spPr>
+        <p:txBody>
+          <a:bodyPr wrap="square" anchor="t" lIns="0" rIns="0" tIns="0" bIns="0"/>
+          <a:lstStyle/>
+          <a:p>
+            <a:pPr algn="l"/>
+            <a:r>
+              <a:rPr sz="1100" b="1" i="0">
+                <a:solidFill>
+                  <a:srgbClr val="54595D"/>
+                </a:solidFill>
+                <a:latin typeface="Calibri"/>
+              </a:rPr>
+              <a:t>OCCUPATIONAL SPECIALISM  ·  Specialism Content Area 2</a:t>
+            </a:r>
+          </a:p>
+        </p:txBody>
+      </p:sp>
+      <p:sp>
+        <p:nvSpPr>
+          <p:cNvPr id="3" name="TextBox 2"/>
+          <p:cNvSpPr txBox="1"/>
+          <p:nvPr/>
+        </p:nvSpPr>
+        <p:spPr>
+          <a:xfrm>
+            <a:off x="548640" y="566928"/>
+            <a:ext cx="11094415" cy="822960"/>
+          </a:xfrm>
+          <a:prstGeom prst="rect">
+            <a:avLst/>
+          </a:prstGeom>
+          <a:noFill/>
+        </p:spPr>
+        <p:txBody>
+          <a:bodyPr wrap="square" anchor="ctr" lIns="0" rIns="0" tIns="0" bIns="0"/>
+          <a:lstStyle/>
+          <a:p>
+            <a:pPr algn="l"/>
+            <a:r>
+              <a:rPr sz="3200" b="1" i="0">
+                <a:solidFill>
+                  <a:srgbClr val="03306E"/>
+                </a:solidFill>
+                <a:latin typeface="Cambria"/>
+              </a:rPr>
+              <a:t>Answers</a:t>
+            </a:r>
+          </a:p>
+        </p:txBody>
+      </p:sp>
+      <p:sp>
+        <p:nvSpPr>
+          <p:cNvPr id="4" name="TextBox 3"/>
+          <p:cNvSpPr txBox="1"/>
+          <p:nvPr/>
+        </p:nvSpPr>
+        <p:spPr>
+          <a:xfrm>
+            <a:off x="548640" y="6446520"/>
+            <a:ext cx="8229600" cy="274320"/>
+          </a:xfrm>
+          <a:prstGeom prst="rect">
+            <a:avLst/>
+          </a:prstGeom>
+          <a:noFill/>
+        </p:spPr>
+        <p:txBody>
+          <a:bodyPr wrap="square" anchor="t" lIns="0" rIns="0" tIns="0" bIns="0"/>
+          <a:lstStyle/>
+          <a:p>
+            <a:pPr algn="l"/>
+            <a:r>
+              <a:rPr sz="1000" b="0" i="0">
+                <a:solidFill>
+                  <a:srgbClr val="54595D"/>
+                </a:solidFill>
+                <a:latin typeface="Calibri"/>
+              </a:rPr>
+              <a:t>Digital Software Development T Level  ·  Legal and Ethical Software Development</a:t>
+            </a:r>
+          </a:p>
+        </p:txBody>
+      </p:sp>
+      <p:sp>
+        <p:nvSpPr>
+          <p:cNvPr id="5" name="TextBox 4"/>
+          <p:cNvSpPr txBox="1"/>
+          <p:nvPr/>
+        </p:nvSpPr>
+        <p:spPr>
+          <a:xfrm>
+            <a:off x="10728655" y="6446520"/>
+            <a:ext cx="914400" cy="274320"/>
+          </a:xfrm>
+          <a:prstGeom prst="rect">
+            <a:avLst/>
+          </a:prstGeom>
+          <a:noFill/>
+        </p:spPr>
+        <p:txBody>
+          <a:bodyPr wrap="square" anchor="t" lIns="0" rIns="0" tIns="0" bIns="0"/>
+          <a:lstStyle/>
+          <a:p>
+            <a:pPr algn="r"/>
+            <a:r>
+              <a:rPr sz="1000" b="0" i="0">
+                <a:solidFill>
+                  <a:srgbClr val="54595D"/>
+                </a:solidFill>
+                <a:latin typeface="Calibri"/>
+              </a:rPr>
+              <a:t>10</a:t>
+            </a:r>
+          </a:p>
+        </p:txBody>
+      </p:sp>
+      <p:sp>
+        <p:nvSpPr>
+          <p:cNvPr id="6" name="Oval 5"/>
+          <p:cNvSpPr/>
+          <p:nvPr/>
+        </p:nvSpPr>
+        <p:spPr>
+          <a:xfrm>
+            <a:off x="548640" y="1618488"/>
+            <a:ext cx="411480" cy="411480"/>
+          </a:xfrm>
+          <a:prstGeom prst="ellipse">
+            <a:avLst/>
+          </a:prstGeom>
+          <a:solidFill>
+            <a:srgbClr val="33C17A"/>
+          </a:solidFill>
+          <a:ln>
+            <a:noFill/>
+          </a:ln>
+          <a:effectLst/>
+        </p:spPr>
+        <p:style>
+          <a:lnRef idx="1">
+            <a:schemeClr val="accent1"/>
+          </a:lnRef>
+          <a:fillRef idx="3">
+            <a:schemeClr val="accent1"/>
+          </a:fillRef>
+          <a:effectRef idx="2">
+            <a:schemeClr val="accent1"/>
+          </a:effectRef>
+          <a:fontRef idx="minor">
+            <a:schemeClr val="lt1"/>
+          </a:fontRef>
+        </p:style>
+        <p:txBody>
+          <a:bodyPr rtlCol="0" anchor="ctr" lIns="0" rIns="0" tIns="0" bIns="0"/>
+          <a:lstStyle/>
+          <a:p>
+            <a:pPr algn="ctr"/>
+            <a:r>
+              <a:rPr sz="1400" b="1">
+                <a:solidFill>
+                  <a:srgbClr val="202122"/>
+                </a:solidFill>
+                <a:latin typeface="Calibri"/>
+              </a:rPr>
+              <a:t>1</a:t>
+            </a:r>
+          </a:p>
+        </p:txBody>
+      </p:sp>
+      <p:sp>
+        <p:nvSpPr>
+          <p:cNvPr id="7" name="TextBox 6"/>
+          <p:cNvSpPr txBox="1"/>
+          <p:nvPr/>
+        </p:nvSpPr>
+        <p:spPr>
+          <a:xfrm>
+            <a:off x="1234440" y="1600200"/>
+            <a:ext cx="10408615" cy="1429512"/>
+          </a:xfrm>
+          <a:prstGeom prst="rect">
+            <a:avLst/>
+          </a:prstGeom>
+          <a:noFill/>
+        </p:spPr>
+        <p:txBody>
+          <a:bodyPr wrap="square" anchor="t" lIns="0" rIns="0" tIns="0" bIns="0"/>
+          <a:lstStyle/>
+          <a:p>
+            <a:pPr algn="l"/>
+            <a:r>
+              <a:rPr sz="1800" b="0" i="0">
+                <a:solidFill>
+                  <a:srgbClr val="54595D"/>
+                </a:solidFill>
+                <a:latin typeface="Calibri"/>
+              </a:rPr>
+              <a:t>Which laws might apply to loot boxes in games?</a:t>
+            </a:r>
+          </a:p>
+          <a:p>
+            <a:r>
+              <a:rPr sz="1800" b="1">
+                <a:solidFill>
+                  <a:srgbClr val="03306E"/>
+                </a:solidFill>
+                <a:latin typeface="Calibri"/>
+              </a:rPr>
+              <a:t>Gambling legislation and consumer protection.</a:t>
+            </a:r>
+          </a:p>
+        </p:txBody>
+      </p:sp>
+      <p:sp>
+        <p:nvSpPr>
+          <p:cNvPr id="8" name="Oval 7"/>
+          <p:cNvSpPr/>
+          <p:nvPr/>
+        </p:nvSpPr>
+        <p:spPr>
+          <a:xfrm>
+            <a:off x="548640" y="3212592"/>
+            <a:ext cx="411480" cy="411480"/>
+          </a:xfrm>
+          <a:prstGeom prst="ellipse">
+            <a:avLst/>
+          </a:prstGeom>
+          <a:solidFill>
+            <a:srgbClr val="33C17A"/>
+          </a:solidFill>
+          <a:ln>
+            <a:noFill/>
+          </a:ln>
+          <a:effectLst/>
+        </p:spPr>
+        <p:style>
+          <a:lnRef idx="1">
+            <a:schemeClr val="accent1"/>
+          </a:lnRef>
+          <a:fillRef idx="3">
+            <a:schemeClr val="accent1"/>
+          </a:fillRef>
+          <a:effectRef idx="2">
+            <a:schemeClr val="accent1"/>
+          </a:effectRef>
+          <a:fontRef idx="minor">
+            <a:schemeClr val="lt1"/>
+          </a:fontRef>
+        </p:style>
+        <p:txBody>
+          <a:bodyPr rtlCol="0" anchor="ctr" lIns="0" rIns="0" tIns="0" bIns="0"/>
+          <a:lstStyle/>
+          <a:p>
+            <a:pPr algn="ctr"/>
+            <a:r>
+              <a:rPr sz="1400" b="1">
+                <a:solidFill>
+                  <a:srgbClr val="202122"/>
+                </a:solidFill>
+                <a:latin typeface="Calibri"/>
+              </a:rPr>
+              <a:t>2</a:t>
+            </a:r>
+          </a:p>
+        </p:txBody>
+      </p:sp>
+      <p:sp>
+        <p:nvSpPr>
+          <p:cNvPr id="9" name="TextBox 8"/>
+          <p:cNvSpPr txBox="1"/>
+          <p:nvPr/>
+        </p:nvSpPr>
+        <p:spPr>
+          <a:xfrm>
+            <a:off x="1234440" y="3194304"/>
+            <a:ext cx="10408615" cy="1429512"/>
+          </a:xfrm>
+          <a:prstGeom prst="rect">
+            <a:avLst/>
+          </a:prstGeom>
+          <a:noFill/>
+        </p:spPr>
+        <p:txBody>
+          <a:bodyPr wrap="square" anchor="t" lIns="0" rIns="0" tIns="0" bIns="0"/>
+          <a:lstStyle/>
+          <a:p>
+            <a:pPr algn="l"/>
+            <a:r>
+              <a:rPr sz="1800" b="0" i="0">
+                <a:solidFill>
+                  <a:srgbClr val="54595D"/>
+                </a:solidFill>
+                <a:latin typeface="Calibri"/>
+              </a:rPr>
+              <a:t>What does W3C set standards for?</a:t>
+            </a:r>
+          </a:p>
+          <a:p>
+            <a:r>
+              <a:rPr sz="1800" b="1">
+                <a:solidFill>
+                  <a:srgbClr val="03306E"/>
+                </a:solidFill>
+                <a:latin typeface="Calibri"/>
+              </a:rPr>
+              <a:t>The web.</a:t>
+            </a:r>
+          </a:p>
+        </p:txBody>
+      </p:sp>
+      <p:sp>
+        <p:nvSpPr>
+          <p:cNvPr id="10" name="Oval 9"/>
+          <p:cNvSpPr/>
+          <p:nvPr/>
+        </p:nvSpPr>
+        <p:spPr>
+          <a:xfrm>
+            <a:off x="548640" y="4806695"/>
+            <a:ext cx="411480" cy="411480"/>
+          </a:xfrm>
+          <a:prstGeom prst="ellipse">
+            <a:avLst/>
+          </a:prstGeom>
+          <a:solidFill>
+            <a:srgbClr val="33C17A"/>
+          </a:solidFill>
+          <a:ln>
+            <a:noFill/>
+          </a:ln>
+          <a:effectLst/>
+        </p:spPr>
+        <p:style>
+          <a:lnRef idx="1">
+            <a:schemeClr val="accent1"/>
+          </a:lnRef>
+          <a:fillRef idx="3">
+            <a:schemeClr val="accent1"/>
+          </a:fillRef>
+          <a:effectRef idx="2">
+            <a:schemeClr val="accent1"/>
+          </a:effectRef>
+          <a:fontRef idx="minor">
+            <a:schemeClr val="lt1"/>
+          </a:fontRef>
+        </p:style>
+        <p:txBody>
+          <a:bodyPr rtlCol="0" anchor="ctr" lIns="0" rIns="0" tIns="0" bIns="0"/>
+          <a:lstStyle/>
+          <a:p>
+            <a:pPr algn="ctr"/>
+            <a:r>
+              <a:rPr sz="1400" b="1">
+                <a:solidFill>
+                  <a:srgbClr val="202122"/>
+                </a:solidFill>
+                <a:latin typeface="Calibri"/>
+              </a:rPr>
+              <a:t>3</a:t>
+            </a:r>
+          </a:p>
+        </p:txBody>
+      </p:sp>
+      <p:sp>
+        <p:nvSpPr>
+          <p:cNvPr id="11" name="TextBox 10"/>
+          <p:cNvSpPr txBox="1"/>
+          <p:nvPr/>
+        </p:nvSpPr>
+        <p:spPr>
+          <a:xfrm>
+            <a:off x="1234440" y="4788408"/>
+            <a:ext cx="10408615" cy="1429512"/>
+          </a:xfrm>
+          <a:prstGeom prst="rect">
+            <a:avLst/>
+          </a:prstGeom>
+          <a:noFill/>
+        </p:spPr>
+        <p:txBody>
+          <a:bodyPr wrap="square" anchor="t" lIns="0" rIns="0" tIns="0" bIns="0"/>
+          <a:lstStyle/>
+          <a:p>
+            <a:pPr algn="l"/>
+            <a:r>
+              <a:rPr sz="1800" b="0" i="0">
+                <a:solidFill>
+                  <a:srgbClr val="54595D"/>
+                </a:solidFill>
+                <a:latin typeface="Calibri"/>
+              </a:rPr>
+              <a:t>Why do software licences matter?</a:t>
+            </a:r>
+          </a:p>
+          <a:p>
+            <a:r>
+              <a:rPr sz="1800" b="1">
+                <a:solidFill>
+                  <a:srgbClr val="03306E"/>
+                </a:solidFill>
+                <a:latin typeface="Calibri"/>
+              </a:rPr>
+              <a:t>They set what you may legally do with code you use or distribute.</a:t>
+            </a:r>
+          </a:p>
+        </p:txBody>
+      </p:sp>
+    </p:spTree>
+  </p:cSld>
+  <p:clrMapOvr>
+    <a:masterClrMapping/>
+  </p:clrMapOvr>
+</p:sld>
+</file>
+
+<file path=ppt/slides/slide11.xml><?xml version="1.0" encoding="utf-8"?>
+<p:sld xmlns:a="http://schemas.openxmlformats.org/drawingml/2006/main" xmlns:p="http://schemas.openxmlformats.org/presentationml/2006/main" xmlns:r="http://schemas.openxmlformats.org/officeDocument/2006/relationships">
+  <p:cSld>
+    <p:bg>
+      <p:bgPr>
+        <a:solidFill>
+          <a:srgbClr val="FFFFFF"/>
+        </a:solidFill>
+        <a:effectLst/>
+      </p:bgPr>
+    </p:bg>
+    <p:spTree>
+      <p:nvGrpSpPr>
+        <p:cNvPr id="1" name=""/>
+        <p:cNvGrpSpPr/>
+        <p:nvPr/>
+      </p:nvGrpSpPr>
+      <p:grpSpPr/>
+      <p:sp>
+        <p:nvSpPr>
+          <p:cNvPr id="2" name="TextBox 1"/>
+          <p:cNvSpPr txBox="1"/>
+          <p:nvPr/>
+        </p:nvSpPr>
+        <p:spPr>
+          <a:xfrm>
+            <a:off x="548640" y="320040"/>
+            <a:ext cx="11094415" cy="274320"/>
+          </a:xfrm>
+          <a:prstGeom prst="rect">
+            <a:avLst/>
+          </a:prstGeom>
+          <a:noFill/>
+        </p:spPr>
+        <p:txBody>
+          <a:bodyPr wrap="square" anchor="t" lIns="0" rIns="0" tIns="0" bIns="0"/>
+          <a:lstStyle/>
+          <a:p>
+            <a:pPr algn="l"/>
+            <a:r>
+              <a:rPr sz="1100" b="1" i="0">
+                <a:solidFill>
+                  <a:srgbClr val="54595D"/>
+                </a:solidFill>
+                <a:latin typeface="Calibri"/>
+              </a:rPr>
+              <a:t>OCCUPATIONAL SPECIALISM  ·  Specialism Content Area 2</a:t>
+            </a:r>
+          </a:p>
+        </p:txBody>
+      </p:sp>
+      <p:sp>
+        <p:nvSpPr>
+          <p:cNvPr id="3" name="TextBox 2"/>
+          <p:cNvSpPr txBox="1"/>
+          <p:nvPr/>
+        </p:nvSpPr>
+        <p:spPr>
+          <a:xfrm>
+            <a:off x="548640" y="566928"/>
+            <a:ext cx="11094415" cy="822960"/>
+          </a:xfrm>
+          <a:prstGeom prst="rect">
+            <a:avLst/>
+          </a:prstGeom>
+          <a:noFill/>
+        </p:spPr>
+        <p:txBody>
+          <a:bodyPr wrap="square" anchor="ctr" lIns="0" rIns="0" tIns="0" bIns="0"/>
+          <a:lstStyle/>
+          <a:p>
+            <a:pPr algn="l"/>
+            <a:r>
+              <a:rPr sz="3200" b="1" i="0">
+                <a:solidFill>
+                  <a:srgbClr val="03306E"/>
+                </a:solidFill>
+                <a:latin typeface="Cambria"/>
+              </a:rPr>
+              <a:t>Activity: Legal review</a:t>
+            </a:r>
+          </a:p>
+        </p:txBody>
+      </p:sp>
+      <p:sp>
+        <p:nvSpPr>
+          <p:cNvPr id="4" name="TextBox 3"/>
+          <p:cNvSpPr txBox="1"/>
+          <p:nvPr/>
+        </p:nvSpPr>
+        <p:spPr>
+          <a:xfrm>
+            <a:off x="548640" y="6446520"/>
+            <a:ext cx="8229600" cy="274320"/>
+          </a:xfrm>
+          <a:prstGeom prst="rect">
+            <a:avLst/>
+          </a:prstGeom>
+          <a:noFill/>
+        </p:spPr>
+        <p:txBody>
+          <a:bodyPr wrap="square" anchor="t" lIns="0" rIns="0" tIns="0" bIns="0"/>
+          <a:lstStyle/>
+          <a:p>
+            <a:pPr algn="l"/>
+            <a:r>
+              <a:rPr sz="1000" b="0" i="0">
+                <a:solidFill>
+                  <a:srgbClr val="54595D"/>
+                </a:solidFill>
+                <a:latin typeface="Calibri"/>
+              </a:rPr>
+              <a:t>Digital Software Development T Level  ·  Legal and Ethical Software Development</a:t>
+            </a:r>
+          </a:p>
+        </p:txBody>
+      </p:sp>
+      <p:sp>
+        <p:nvSpPr>
+          <p:cNvPr id="5" name="TextBox 4"/>
+          <p:cNvSpPr txBox="1"/>
+          <p:nvPr/>
+        </p:nvSpPr>
+        <p:spPr>
+          <a:xfrm>
+            <a:off x="10728655" y="6446520"/>
+            <a:ext cx="914400" cy="274320"/>
+          </a:xfrm>
+          <a:prstGeom prst="rect">
+            <a:avLst/>
+          </a:prstGeom>
+          <a:noFill/>
+        </p:spPr>
+        <p:txBody>
+          <a:bodyPr wrap="square" anchor="t" lIns="0" rIns="0" tIns="0" bIns="0"/>
+          <a:lstStyle/>
+          <a:p>
+            <a:pPr algn="r"/>
+            <a:r>
+              <a:rPr sz="1000" b="0" i="0">
+                <a:solidFill>
+                  <a:srgbClr val="54595D"/>
+                </a:solidFill>
+                <a:latin typeface="Calibri"/>
+              </a:rPr>
+              <a:t>11</a:t>
+            </a:r>
+          </a:p>
+        </p:txBody>
+      </p:sp>
+      <p:sp>
+        <p:nvSpPr>
+          <p:cNvPr id="6" name="Rounded Rectangle 5"/>
+          <p:cNvSpPr/>
+          <p:nvPr/>
+        </p:nvSpPr>
+        <p:spPr>
+          <a:xfrm>
+            <a:off x="548640" y="1508760"/>
+            <a:ext cx="2011680" cy="457200"/>
+          </a:xfrm>
+          <a:prstGeom prst="roundRect">
+            <a:avLst>
+              <a:gd name="adj" fmla="val 50000"/>
+            </a:avLst>
+          </a:prstGeom>
+          <a:solidFill>
+            <a:srgbClr val="33C17A"/>
+          </a:solidFill>
+          <a:ln>
+            <a:noFill/>
+          </a:ln>
+          <a:effectLst/>
+        </p:spPr>
+        <p:style>
+          <a:lnRef idx="1">
+            <a:schemeClr val="accent1"/>
+          </a:lnRef>
+          <a:fillRef idx="3">
+            <a:schemeClr val="accent1"/>
+          </a:fillRef>
+          <a:effectRef idx="2">
+            <a:schemeClr val="accent1"/>
+          </a:effectRef>
+          <a:fontRef idx="minor">
+            <a:schemeClr val="lt1"/>
+          </a:fontRef>
+        </p:style>
+        <p:txBody>
+          <a:bodyPr rtlCol="0" anchor="ctr"/>
+          <a:lstStyle/>
+          <a:p/>
+        </p:txBody>
+      </p:sp>
+      <p:sp>
+        <p:nvSpPr>
+          <p:cNvPr id="7" name="TextBox 6"/>
+          <p:cNvSpPr txBox="1"/>
+          <p:nvPr/>
+        </p:nvSpPr>
+        <p:spPr>
+          <a:xfrm>
+            <a:off x="548640" y="1508760"/>
+            <a:ext cx="2011680" cy="457200"/>
+          </a:xfrm>
+          <a:prstGeom prst="rect">
+            <a:avLst/>
+          </a:prstGeom>
+          <a:noFill/>
+        </p:spPr>
+        <p:txBody>
+          <a:bodyPr wrap="square" anchor="ctr" lIns="0" rIns="0" tIns="0" bIns="0"/>
+          <a:lstStyle/>
+          <a:p>
+            <a:pPr algn="ctr"/>
+            <a:r>
+              <a:rPr sz="1400" b="1" i="0">
+                <a:solidFill>
+                  <a:srgbClr val="202122"/>
+                </a:solidFill>
+                <a:latin typeface="Calibri"/>
+              </a:rPr>
+              <a:t>25 minutes</a:t>
+            </a:r>
+          </a:p>
+        </p:txBody>
+      </p:sp>
+      <p:sp>
+        <p:nvSpPr>
+          <p:cNvPr id="8" name="TextBox 7"/>
+          <p:cNvSpPr txBox="1"/>
+          <p:nvPr/>
+        </p:nvSpPr>
+        <p:spPr>
+          <a:xfrm>
+            <a:off x="2743200" y="1508760"/>
+            <a:ext cx="4754880" cy="457200"/>
+          </a:xfrm>
+          <a:prstGeom prst="rect">
+            <a:avLst/>
+          </a:prstGeom>
+          <a:noFill/>
+        </p:spPr>
+        <p:txBody>
+          <a:bodyPr wrap="square" anchor="ctr" lIns="0" rIns="0" tIns="0" bIns="0"/>
+          <a:lstStyle/>
+          <a:p>
+            <a:pPr algn="l"/>
+            <a:r>
+              <a:rPr sz="1400" b="0" i="1">
+                <a:solidFill>
+                  <a:srgbClr val="54595D"/>
+                </a:solidFill>
+                <a:latin typeface="Calibri"/>
+              </a:rPr>
+              <a:t>Small groups</a:t>
+            </a:r>
+          </a:p>
+        </p:txBody>
+      </p:sp>
+      <p:sp>
+        <p:nvSpPr>
+          <p:cNvPr id="9" name="Oval 8"/>
+          <p:cNvSpPr/>
+          <p:nvPr/>
+        </p:nvSpPr>
+        <p:spPr>
+          <a:xfrm>
+            <a:off x="548640" y="2482596"/>
+            <a:ext cx="384048" cy="384048"/>
+          </a:xfrm>
+          <a:prstGeom prst="ellipse">
+            <a:avLst/>
+          </a:prstGeom>
+          <a:solidFill>
+            <a:srgbClr val="0645AD"/>
+          </a:solidFill>
+          <a:ln>
+            <a:noFill/>
+          </a:ln>
+          <a:effectLst/>
+        </p:spPr>
+        <p:style>
+          <a:lnRef idx="1">
+            <a:schemeClr val="accent1"/>
+          </a:lnRef>
+          <a:fillRef idx="3">
+            <a:schemeClr val="accent1"/>
+          </a:fillRef>
+          <a:effectRef idx="2">
+            <a:schemeClr val="accent1"/>
+          </a:effectRef>
+          <a:fontRef idx="minor">
+            <a:schemeClr val="lt1"/>
+          </a:fontRef>
+        </p:style>
+        <p:txBody>
+          <a:bodyPr rtlCol="0" anchor="ctr" lIns="0" rIns="0" tIns="0" bIns="0"/>
+          <a:lstStyle/>
+          <a:p>
+            <a:pPr algn="ctr"/>
+            <a:r>
+              <a:rPr sz="1300" b="1">
+                <a:solidFill>
+                  <a:srgbClr val="FFFFFF"/>
+                </a:solidFill>
+                <a:latin typeface="Calibri"/>
+              </a:rPr>
+              <a:t>1</a:t>
+            </a:r>
+          </a:p>
+        </p:txBody>
+      </p:sp>
+      <p:sp>
+        <p:nvSpPr>
+          <p:cNvPr id="10" name="TextBox 9"/>
+          <p:cNvSpPr txBox="1"/>
+          <p:nvPr/>
+        </p:nvSpPr>
+        <p:spPr>
+          <a:xfrm>
+            <a:off x="1143000" y="2240280"/>
+            <a:ext cx="5943600" cy="868680"/>
+          </a:xfrm>
+          <a:prstGeom prst="rect">
+            <a:avLst/>
+          </a:prstGeom>
+          <a:noFill/>
+        </p:spPr>
+        <p:txBody>
+          <a:bodyPr wrap="square" anchor="ctr" lIns="0" rIns="0" tIns="0" bIns="0"/>
+          <a:lstStyle/>
+          <a:p>
+            <a:pPr algn="l"/>
+            <a:r>
+              <a:rPr sz="1700" b="0" i="0">
+                <a:solidFill>
+                  <a:srgbClr val="202122"/>
+                </a:solidFill>
+                <a:latin typeface="Calibri"/>
+              </a:rPr>
+              <a:t>Take the starter's children's game.</a:t>
+            </a:r>
+          </a:p>
+        </p:txBody>
+      </p:sp>
+      <p:sp>
+        <p:nvSpPr>
+          <p:cNvPr id="11" name="Oval 10"/>
+          <p:cNvSpPr/>
+          <p:nvPr/>
+        </p:nvSpPr>
+        <p:spPr>
+          <a:xfrm>
+            <a:off x="548640" y="3461004"/>
+            <a:ext cx="384048" cy="384048"/>
+          </a:xfrm>
+          <a:prstGeom prst="ellipse">
+            <a:avLst/>
+          </a:prstGeom>
+          <a:solidFill>
+            <a:srgbClr val="0645AD"/>
+          </a:solidFill>
+          <a:ln>
+            <a:noFill/>
+          </a:ln>
+          <a:effectLst/>
+        </p:spPr>
+        <p:style>
+          <a:lnRef idx="1">
+            <a:schemeClr val="accent1"/>
+          </a:lnRef>
+          <a:fillRef idx="3">
+            <a:schemeClr val="accent1"/>
+          </a:fillRef>
+          <a:effectRef idx="2">
+            <a:schemeClr val="accent1"/>
+          </a:effectRef>
+          <a:fontRef idx="minor">
+            <a:schemeClr val="lt1"/>
+          </a:fontRef>
+        </p:style>
+        <p:txBody>
+          <a:bodyPr rtlCol="0" anchor="ctr" lIns="0" rIns="0" tIns="0" bIns="0"/>
+          <a:lstStyle/>
+          <a:p>
+            <a:pPr algn="ctr"/>
+            <a:r>
+              <a:rPr sz="1300" b="1">
+                <a:solidFill>
+                  <a:srgbClr val="FFFFFF"/>
+                </a:solidFill>
+                <a:latin typeface="Calibri"/>
+              </a:rPr>
+              <a:t>2</a:t>
+            </a:r>
+          </a:p>
+        </p:txBody>
+      </p:sp>
+      <p:sp>
+        <p:nvSpPr>
+          <p:cNvPr id="12" name="TextBox 11"/>
+          <p:cNvSpPr txBox="1"/>
+          <p:nvPr/>
+        </p:nvSpPr>
+        <p:spPr>
+          <a:xfrm>
+            <a:off x="1143000" y="3218688"/>
+            <a:ext cx="5943600" cy="868680"/>
+          </a:xfrm>
+          <a:prstGeom prst="rect">
+            <a:avLst/>
+          </a:prstGeom>
+          <a:noFill/>
+        </p:spPr>
+        <p:txBody>
+          <a:bodyPr wrap="square" anchor="ctr" lIns="0" rIns="0" tIns="0" bIns="0"/>
+          <a:lstStyle/>
+          <a:p>
+            <a:pPr algn="l"/>
+            <a:r>
+              <a:rPr sz="1700" b="0" i="0">
+                <a:solidFill>
+                  <a:srgbClr val="202122"/>
+                </a:solidFill>
+                <a:latin typeface="Calibri"/>
+              </a:rPr>
+              <a:t>List every legal area that applies and why.</a:t>
+            </a:r>
+          </a:p>
+        </p:txBody>
+      </p:sp>
+      <p:sp>
+        <p:nvSpPr>
+          <p:cNvPr id="13" name="Oval 12"/>
+          <p:cNvSpPr/>
+          <p:nvPr/>
+        </p:nvSpPr>
+        <p:spPr>
+          <a:xfrm>
+            <a:off x="548640" y="4439412"/>
+            <a:ext cx="384048" cy="384048"/>
+          </a:xfrm>
+          <a:prstGeom prst="ellipse">
+            <a:avLst/>
+          </a:prstGeom>
+          <a:solidFill>
+            <a:srgbClr val="0645AD"/>
+          </a:solidFill>
+          <a:ln>
+            <a:noFill/>
+          </a:ln>
+          <a:effectLst/>
+        </p:spPr>
+        <p:style>
+          <a:lnRef idx="1">
+            <a:schemeClr val="accent1"/>
+          </a:lnRef>
+          <a:fillRef idx="3">
+            <a:schemeClr val="accent1"/>
+          </a:fillRef>
+          <a:effectRef idx="2">
+            <a:schemeClr val="accent1"/>
+          </a:effectRef>
+          <a:fontRef idx="minor">
+            <a:schemeClr val="lt1"/>
+          </a:fontRef>
+        </p:style>
+        <p:txBody>
+          <a:bodyPr rtlCol="0" anchor="ctr" lIns="0" rIns="0" tIns="0" bIns="0"/>
+          <a:lstStyle/>
+          <a:p>
+            <a:pPr algn="ctr"/>
+            <a:r>
+              <a:rPr sz="1300" b="1">
+                <a:solidFill>
+                  <a:srgbClr val="FFFFFF"/>
+                </a:solidFill>
+                <a:latin typeface="Calibri"/>
+              </a:rPr>
+              <a:t>3</a:t>
+            </a:r>
+          </a:p>
+        </p:txBody>
+      </p:sp>
+      <p:sp>
+        <p:nvSpPr>
+          <p:cNvPr id="14" name="TextBox 13"/>
+          <p:cNvSpPr txBox="1"/>
+          <p:nvPr/>
+        </p:nvSpPr>
+        <p:spPr>
+          <a:xfrm>
+            <a:off x="1143000" y="4197096"/>
+            <a:ext cx="5943600" cy="868680"/>
+          </a:xfrm>
+          <a:prstGeom prst="rect">
+            <a:avLst/>
+          </a:prstGeom>
+          <a:noFill/>
+        </p:spPr>
+        <p:txBody>
+          <a:bodyPr wrap="square" anchor="ctr" lIns="0" rIns="0" tIns="0" bIns="0"/>
+          <a:lstStyle/>
+          <a:p>
+            <a:pPr algn="l"/>
+            <a:r>
+              <a:rPr sz="1700" b="0" i="0">
+                <a:solidFill>
+                  <a:srgbClr val="202122"/>
+                </a:solidFill>
+                <a:latin typeface="Calibri"/>
+              </a:rPr>
+              <a:t>Identify two ethical concerns.</a:t>
+            </a:r>
+          </a:p>
+        </p:txBody>
+      </p:sp>
+      <p:sp>
+        <p:nvSpPr>
+          <p:cNvPr id="15" name="Oval 14"/>
+          <p:cNvSpPr/>
+          <p:nvPr/>
+        </p:nvSpPr>
+        <p:spPr>
+          <a:xfrm>
+            <a:off x="548640" y="5417820"/>
+            <a:ext cx="384048" cy="384048"/>
+          </a:xfrm>
+          <a:prstGeom prst="ellipse">
+            <a:avLst/>
+          </a:prstGeom>
+          <a:solidFill>
+            <a:srgbClr val="0645AD"/>
+          </a:solidFill>
+          <a:ln>
+            <a:noFill/>
+          </a:ln>
+          <a:effectLst/>
+        </p:spPr>
+        <p:style>
+          <a:lnRef idx="1">
+            <a:schemeClr val="accent1"/>
+          </a:lnRef>
+          <a:fillRef idx="3">
+            <a:schemeClr val="accent1"/>
+          </a:fillRef>
+          <a:effectRef idx="2">
+            <a:schemeClr val="accent1"/>
+          </a:effectRef>
+          <a:fontRef idx="minor">
+            <a:schemeClr val="lt1"/>
+          </a:fontRef>
+        </p:style>
+        <p:txBody>
+          <a:bodyPr rtlCol="0" anchor="ctr" lIns="0" rIns="0" tIns="0" bIns="0"/>
+          <a:lstStyle/>
+          <a:p>
+            <a:pPr algn="ctr"/>
+            <a:r>
+              <a:rPr sz="1300" b="1">
+                <a:solidFill>
+                  <a:srgbClr val="FFFFFF"/>
+                </a:solidFill>
+                <a:latin typeface="Calibri"/>
+              </a:rPr>
+              <a:t>4</a:t>
+            </a:r>
+          </a:p>
+        </p:txBody>
+      </p:sp>
+      <p:sp>
+        <p:nvSpPr>
+          <p:cNvPr id="16" name="TextBox 15"/>
+          <p:cNvSpPr txBox="1"/>
+          <p:nvPr/>
+        </p:nvSpPr>
+        <p:spPr>
+          <a:xfrm>
+            <a:off x="1143000" y="5175504"/>
+            <a:ext cx="5943600" cy="868680"/>
+          </a:xfrm>
+          <a:prstGeom prst="rect">
+            <a:avLst/>
+          </a:prstGeom>
+          <a:noFill/>
+        </p:spPr>
+        <p:txBody>
+          <a:bodyPr wrap="square" anchor="ctr" lIns="0" rIns="0" tIns="0" bIns="0"/>
+          <a:lstStyle/>
+          <a:p>
+            <a:pPr algn="l"/>
+            <a:r>
+              <a:rPr sz="1700" b="0" i="0">
+                <a:solidFill>
+                  <a:srgbClr val="202122"/>
+                </a:solidFill>
+                <a:latin typeface="Calibri"/>
+              </a:rPr>
+              <a:t>Recommend design changes to comply.</a:t>
+            </a:r>
+          </a:p>
+        </p:txBody>
+      </p:sp>
+      <p:sp>
+        <p:nvSpPr>
+          <p:cNvPr id="17" name="Rounded Rectangle 16"/>
+          <p:cNvSpPr/>
+          <p:nvPr/>
+        </p:nvSpPr>
+        <p:spPr>
+          <a:xfrm>
+            <a:off x="7772400" y="1508760"/>
+            <a:ext cx="3867912" cy="4572000"/>
+          </a:xfrm>
+          <a:prstGeom prst="roundRect">
+            <a:avLst>
+              <a:gd name="adj" fmla="val 8000"/>
+            </a:avLst>
+          </a:prstGeom>
+          <a:solidFill>
+            <a:srgbClr val="EAF3FF"/>
+          </a:solidFill>
+          <a:ln>
+            <a:noFill/>
+          </a:ln>
+          <a:effectLst/>
+        </p:spPr>
+        <p:style>
+          <a:lnRef idx="1">
+            <a:schemeClr val="accent1"/>
+          </a:lnRef>
+          <a:fillRef idx="3">
+            <a:schemeClr val="accent1"/>
+          </a:fillRef>
+          <a:effectRef idx="2">
+            <a:schemeClr val="accent1"/>
+          </a:effectRef>
+          <a:fontRef idx="minor">
+            <a:schemeClr val="lt1"/>
+          </a:fontRef>
+        </p:style>
+        <p:txBody>
+          <a:bodyPr rtlCol="0" anchor="ctr"/>
+          <a:lstStyle/>
+          <a:p/>
+        </p:txBody>
+      </p:sp>
+      <p:sp>
+        <p:nvSpPr>
+          <p:cNvPr id="18" name="TextBox 17"/>
+          <p:cNvSpPr txBox="1"/>
+          <p:nvPr/>
+        </p:nvSpPr>
+        <p:spPr>
+          <a:xfrm>
+            <a:off x="8046720" y="1737360"/>
+            <a:ext cx="3291840" cy="365760"/>
+          </a:xfrm>
+          <a:prstGeom prst="rect">
+            <a:avLst/>
+          </a:prstGeom>
+          <a:noFill/>
+        </p:spPr>
+        <p:txBody>
+          <a:bodyPr wrap="square" anchor="t" lIns="0" rIns="0" tIns="0" bIns="0"/>
+          <a:lstStyle/>
+          <a:p>
+            <a:pPr algn="l"/>
+            <a:r>
+              <a:rPr sz="1300" b="1" i="0">
+                <a:solidFill>
+                  <a:srgbClr val="0645AD"/>
+                </a:solidFill>
+                <a:latin typeface="Calibri"/>
+              </a:rPr>
+              <a:t>SUCCESS CRITERIA</a:t>
+            </a:r>
+          </a:p>
+        </p:txBody>
+      </p:sp>
+      <p:sp>
+        <p:nvSpPr>
+          <p:cNvPr id="19" name="TextBox 18"/>
+          <p:cNvSpPr txBox="1"/>
+          <p:nvPr/>
+        </p:nvSpPr>
+        <p:spPr>
+          <a:xfrm>
+            <a:off x="8046720" y="2240280"/>
+            <a:ext cx="3337560" cy="3657600"/>
+          </a:xfrm>
+          <a:prstGeom prst="rect">
+            <a:avLst/>
+          </a:prstGeom>
+          <a:noFill/>
+        </p:spPr>
+        <p:txBody>
+          <a:bodyPr wrap="square" lIns="0" rIns="0" tIns="0" bIns="0">
+            <a:spAutoFit/>
+          </a:bodyPr>
+          <a:lstStyle/>
+          <a:p>
+            <a:pPr marL="274320" indent="-274320">
+              <a:spcAft>
+                <a:spcPts val="810"/>
+              </a:spcAft>
+              <a:buClr>
+                <a:srgbClr val="0645AD"/>
+              </a:buClr>
+              <a:buFont typeface="Arial"/>
+              <a:buChar char="•"/>
+            </a:pPr>
+            <a:r>
+              <a:rPr sz="1800" b="0">
+                <a:solidFill>
+                  <a:srgbClr val="202122"/>
+                </a:solidFill>
+                <a:latin typeface="Calibri"/>
+              </a:rPr>
+              <a:t>Age, data and gambling rules considered</a:t>
+            </a:r>
+          </a:p>
+          <a:p>
+            <a:pPr marL="274320" indent="-274320">
+              <a:spcAft>
+                <a:spcPts val="810"/>
+              </a:spcAft>
+              <a:buClr>
+                <a:srgbClr val="0645AD"/>
+              </a:buClr>
+              <a:buFont typeface="Arial"/>
+              <a:buChar char="•"/>
+            </a:pPr>
+            <a:r>
+              <a:rPr sz="1800" b="0">
+                <a:solidFill>
+                  <a:srgbClr val="202122"/>
+                </a:solidFill>
+                <a:latin typeface="Calibri"/>
+              </a:rPr>
+              <a:t>Ethics goes beyond the law</a:t>
+            </a:r>
+          </a:p>
+          <a:p>
+            <a:pPr marL="274320" indent="-274320">
+              <a:spcAft>
+                <a:spcPts val="810"/>
+              </a:spcAft>
+              <a:buClr>
+                <a:srgbClr val="0645AD"/>
+              </a:buClr>
+              <a:buFont typeface="Arial"/>
+              <a:buChar char="•"/>
+            </a:pPr>
+            <a:r>
+              <a:rPr sz="1800" b="0">
+                <a:solidFill>
+                  <a:srgbClr val="202122"/>
+                </a:solidFill>
+                <a:latin typeface="Calibri"/>
+              </a:rPr>
+              <a:t>Changes are practical</a:t>
+            </a:r>
+          </a:p>
+        </p:txBody>
+      </p:sp>
+    </p:spTree>
+  </p:cSld>
+  <p:clrMapOvr>
+    <a:masterClrMapping/>
+  </p:clrMapOvr>
+</p:sld>
+</file>
+
+<file path=ppt/slides/slide12.xml><?xml version="1.0" encoding="utf-8"?>
+<p:sld xmlns:a="http://schemas.openxmlformats.org/drawingml/2006/main" xmlns:p="http://schemas.openxmlformats.org/presentationml/2006/main" xmlns:r="http://schemas.openxmlformats.org/officeDocument/2006/relationships">
+  <p:cSld>
+    <p:bg>
+      <p:bgPr>
+        <a:solidFill>
+          <a:srgbClr val="03306E"/>
+        </a:solidFill>
+        <a:effectLst/>
+      </p:bgPr>
+    </p:bg>
+    <p:spTree>
+      <p:nvGrpSpPr>
+        <p:cNvPr id="1" name=""/>
+        <p:cNvGrpSpPr/>
+        <p:nvPr/>
+      </p:nvGrpSpPr>
+      <p:grpSpPr/>
+      <p:sp>
+        <p:nvSpPr>
+          <p:cNvPr id="2" name="TextBox 1"/>
+          <p:cNvSpPr txBox="1"/>
+          <p:nvPr/>
+        </p:nvSpPr>
+        <p:spPr>
+          <a:xfrm>
+            <a:off x="548640" y="320040"/>
+            <a:ext cx="11094415" cy="274320"/>
+          </a:xfrm>
+          <a:prstGeom prst="rect">
+            <a:avLst/>
+          </a:prstGeom>
+          <a:noFill/>
+        </p:spPr>
+        <p:txBody>
+          <a:bodyPr wrap="square" anchor="t" lIns="0" rIns="0" tIns="0" bIns="0"/>
+          <a:lstStyle/>
+          <a:p>
+            <a:pPr algn="l"/>
+            <a:r>
+              <a:rPr sz="1100" b="1" i="0">
+                <a:solidFill>
+                  <a:srgbClr val="A9C8F0"/>
+                </a:solidFill>
+                <a:latin typeface="Calibri"/>
+              </a:rPr>
+              <a:t>OCCUPATIONAL SPECIALISM  ·  Specialism Content Area 2</a:t>
+            </a:r>
+          </a:p>
+        </p:txBody>
+      </p:sp>
+      <p:sp>
+        <p:nvSpPr>
+          <p:cNvPr id="3" name="TextBox 2"/>
+          <p:cNvSpPr txBox="1"/>
+          <p:nvPr/>
+        </p:nvSpPr>
+        <p:spPr>
+          <a:xfrm>
+            <a:off x="548640" y="566928"/>
+            <a:ext cx="11094415" cy="822960"/>
+          </a:xfrm>
+          <a:prstGeom prst="rect">
+            <a:avLst/>
+          </a:prstGeom>
+          <a:noFill/>
+        </p:spPr>
+        <p:txBody>
+          <a:bodyPr wrap="square" anchor="ctr" lIns="0" rIns="0" tIns="0" bIns="0"/>
+          <a:lstStyle/>
+          <a:p>
+            <a:pPr algn="l"/>
+            <a:r>
+              <a:rPr sz="3200" b="1" i="0">
+                <a:solidFill>
+                  <a:srgbClr val="FFFFFF"/>
+                </a:solidFill>
+                <a:latin typeface="Cambria"/>
+              </a:rPr>
+              <a:t>Exit ticket</a:t>
+            </a:r>
+          </a:p>
+        </p:txBody>
+      </p:sp>
+      <p:sp>
+        <p:nvSpPr>
+          <p:cNvPr id="4" name="Oval 3"/>
+          <p:cNvSpPr/>
+          <p:nvPr/>
+        </p:nvSpPr>
+        <p:spPr>
+          <a:xfrm>
+            <a:off x="548640" y="1737360"/>
+            <a:ext cx="502920" cy="502920"/>
+          </a:xfrm>
+          <a:prstGeom prst="ellipse">
+            <a:avLst/>
+          </a:prstGeom>
+          <a:solidFill>
+            <a:srgbClr val="33C17A"/>
+          </a:solidFill>
+          <a:ln>
+            <a:noFill/>
+          </a:ln>
+          <a:effectLst/>
+        </p:spPr>
+        <p:style>
+          <a:lnRef idx="1">
+            <a:schemeClr val="accent1"/>
+          </a:lnRef>
+          <a:fillRef idx="3">
+            <a:schemeClr val="accent1"/>
+          </a:fillRef>
+          <a:effectRef idx="2">
+            <a:schemeClr val="accent1"/>
+          </a:effectRef>
+          <a:fontRef idx="minor">
+            <a:schemeClr val="lt1"/>
+          </a:fontRef>
+        </p:style>
+        <p:txBody>
+          <a:bodyPr rtlCol="0" anchor="ctr" lIns="0" rIns="0" tIns="0" bIns="0"/>
+          <a:lstStyle/>
+          <a:p>
+            <a:pPr algn="ctr"/>
+            <a:r>
+              <a:rPr sz="1700" b="1">
+                <a:solidFill>
+                  <a:srgbClr val="202122"/>
+                </a:solidFill>
+                <a:latin typeface="Calibri"/>
+              </a:rPr>
+              <a:t>1</a:t>
+            </a:r>
+          </a:p>
+        </p:txBody>
+      </p:sp>
+      <p:sp>
+        <p:nvSpPr>
+          <p:cNvPr id="5" name="TextBox 4"/>
+          <p:cNvSpPr txBox="1"/>
+          <p:nvPr/>
+        </p:nvSpPr>
+        <p:spPr>
+          <a:xfrm>
+            <a:off x="1325880" y="1645920"/>
+            <a:ext cx="6583680" cy="822960"/>
+          </a:xfrm>
+          <a:prstGeom prst="rect">
+            <a:avLst/>
+          </a:prstGeom>
+          <a:noFill/>
+        </p:spPr>
+        <p:txBody>
+          <a:bodyPr wrap="square" anchor="ctr" lIns="0" rIns="0" tIns="0" bIns="0"/>
+          <a:lstStyle/>
+          <a:p>
+            <a:pPr algn="l"/>
+            <a:r>
+              <a:rPr sz="2000" b="0" i="0">
+                <a:solidFill>
+                  <a:srgbClr val="FFFFFF"/>
+                </a:solidFill>
+                <a:latin typeface="Calibri"/>
+              </a:rPr>
+              <a:t>Why can't you use any image you find online?</a:t>
+            </a:r>
+          </a:p>
+        </p:txBody>
+      </p:sp>
+      <p:sp>
+        <p:nvSpPr>
+          <p:cNvPr id="6" name="Oval 5"/>
+          <p:cNvSpPr/>
+          <p:nvPr/>
+        </p:nvSpPr>
+        <p:spPr>
+          <a:xfrm>
+            <a:off x="548640" y="2697480"/>
+            <a:ext cx="502920" cy="502920"/>
+          </a:xfrm>
+          <a:prstGeom prst="ellipse">
+            <a:avLst/>
+          </a:prstGeom>
+          <a:solidFill>
+            <a:srgbClr val="33C17A"/>
+          </a:solidFill>
+          <a:ln>
+            <a:noFill/>
+          </a:ln>
+          <a:effectLst/>
+        </p:spPr>
+        <p:style>
+          <a:lnRef idx="1">
+            <a:schemeClr val="accent1"/>
+          </a:lnRef>
+          <a:fillRef idx="3">
+            <a:schemeClr val="accent1"/>
+          </a:fillRef>
+          <a:effectRef idx="2">
+            <a:schemeClr val="accent1"/>
+          </a:effectRef>
+          <a:fontRef idx="minor">
+            <a:schemeClr val="lt1"/>
+          </a:fontRef>
+        </p:style>
+        <p:txBody>
+          <a:bodyPr rtlCol="0" anchor="ctr" lIns="0" rIns="0" tIns="0" bIns="0"/>
+          <a:lstStyle/>
+          <a:p>
+            <a:pPr algn="ctr"/>
+            <a:r>
+              <a:rPr sz="1700" b="1">
+                <a:solidFill>
+                  <a:srgbClr val="202122"/>
+                </a:solidFill>
+                <a:latin typeface="Calibri"/>
+              </a:rPr>
+              <a:t>2</a:t>
+            </a:r>
+          </a:p>
+        </p:txBody>
+      </p:sp>
+      <p:sp>
+        <p:nvSpPr>
+          <p:cNvPr id="7" name="TextBox 6"/>
+          <p:cNvSpPr txBox="1"/>
+          <p:nvPr/>
+        </p:nvSpPr>
+        <p:spPr>
+          <a:xfrm>
+            <a:off x="1325880" y="2606040"/>
+            <a:ext cx="6583680" cy="822960"/>
+          </a:xfrm>
+          <a:prstGeom prst="rect">
+            <a:avLst/>
+          </a:prstGeom>
+          <a:noFill/>
+        </p:spPr>
+        <p:txBody>
+          <a:bodyPr wrap="square" anchor="ctr" lIns="0" rIns="0" tIns="0" bIns="0"/>
+          <a:lstStyle/>
+          <a:p>
+            <a:pPr algn="l"/>
+            <a:r>
+              <a:rPr sz="2000" b="0" i="0">
+                <a:solidFill>
+                  <a:srgbClr val="FFFFFF"/>
+                </a:solidFill>
+                <a:latin typeface="Calibri"/>
+              </a:rPr>
+              <a:t>What is one ethical issue in software?</a:t>
+            </a:r>
+          </a:p>
+        </p:txBody>
+      </p:sp>
+      <p:sp>
+        <p:nvSpPr>
+          <p:cNvPr id="8" name="Oval 7"/>
+          <p:cNvSpPr/>
+          <p:nvPr/>
+        </p:nvSpPr>
+        <p:spPr>
+          <a:xfrm>
+            <a:off x="548640" y="3657600"/>
+            <a:ext cx="502920" cy="502920"/>
+          </a:xfrm>
+          <a:prstGeom prst="ellipse">
+            <a:avLst/>
+          </a:prstGeom>
+          <a:solidFill>
+            <a:srgbClr val="33C17A"/>
+          </a:solidFill>
+          <a:ln>
+            <a:noFill/>
+          </a:ln>
+          <a:effectLst/>
+        </p:spPr>
+        <p:style>
+          <a:lnRef idx="1">
+            <a:schemeClr val="accent1"/>
+          </a:lnRef>
+          <a:fillRef idx="3">
+            <a:schemeClr val="accent1"/>
+          </a:fillRef>
+          <a:effectRef idx="2">
+            <a:schemeClr val="accent1"/>
+          </a:effectRef>
+          <a:fontRef idx="minor">
+            <a:schemeClr val="lt1"/>
+          </a:fontRef>
+        </p:style>
+        <p:txBody>
+          <a:bodyPr rtlCol="0" anchor="ctr" lIns="0" rIns="0" tIns="0" bIns="0"/>
+          <a:lstStyle/>
+          <a:p>
+            <a:pPr algn="ctr"/>
+            <a:r>
+              <a:rPr sz="1700" b="1">
+                <a:solidFill>
+                  <a:srgbClr val="202122"/>
+                </a:solidFill>
+                <a:latin typeface="Calibri"/>
+              </a:rPr>
+              <a:t>3</a:t>
+            </a:r>
+          </a:p>
+        </p:txBody>
+      </p:sp>
+      <p:sp>
+        <p:nvSpPr>
+          <p:cNvPr id="9" name="TextBox 8"/>
+          <p:cNvSpPr txBox="1"/>
+          <p:nvPr/>
+        </p:nvSpPr>
+        <p:spPr>
+          <a:xfrm>
+            <a:off x="1325880" y="3566160"/>
+            <a:ext cx="6583680" cy="822960"/>
+          </a:xfrm>
+          <a:prstGeom prst="rect">
+            <a:avLst/>
+          </a:prstGeom>
+          <a:noFill/>
+        </p:spPr>
+        <p:txBody>
+          <a:bodyPr wrap="square" anchor="ctr" lIns="0" rIns="0" tIns="0" bIns="0"/>
+          <a:lstStyle/>
+          <a:p>
+            <a:pPr algn="l"/>
+            <a:r>
+              <a:rPr sz="2000" b="0" i="0">
+                <a:solidFill>
+                  <a:srgbClr val="FFFFFF"/>
+                </a:solidFill>
+                <a:latin typeface="Calibri"/>
+              </a:rPr>
+              <a:t>Why do territorial restrictions exist?</a:t>
+            </a:r>
+          </a:p>
+        </p:txBody>
+      </p:sp>
+      <p:sp>
+        <p:nvSpPr>
+          <p:cNvPr id="10" name="Rounded Rectangle 9"/>
+          <p:cNvSpPr/>
+          <p:nvPr/>
+        </p:nvSpPr>
+        <p:spPr>
+          <a:xfrm>
+            <a:off x="8229600" y="1645920"/>
+            <a:ext cx="3410712" cy="2926080"/>
+          </a:xfrm>
+          <a:prstGeom prst="roundRect">
+            <a:avLst>
+              <a:gd name="adj" fmla="val 8000"/>
+            </a:avLst>
+          </a:prstGeom>
+          <a:solidFill>
+            <a:srgbClr val="0645AD"/>
+          </a:solidFill>
+          <a:ln>
+            <a:noFill/>
+          </a:ln>
+          <a:effectLst/>
+        </p:spPr>
+        <p:style>
+          <a:lnRef idx="1">
+            <a:schemeClr val="accent1"/>
+          </a:lnRef>
+          <a:fillRef idx="3">
+            <a:schemeClr val="accent1"/>
+          </a:fillRef>
+          <a:effectRef idx="2">
+            <a:schemeClr val="accent1"/>
+          </a:effectRef>
+          <a:fontRef idx="minor">
+            <a:schemeClr val="lt1"/>
+          </a:fontRef>
+        </p:style>
+        <p:txBody>
+          <a:bodyPr rtlCol="0" anchor="ctr"/>
+          <a:lstStyle/>
+          <a:p/>
+        </p:txBody>
+      </p:sp>
+      <p:sp>
+        <p:nvSpPr>
+          <p:cNvPr id="11" name="TextBox 10"/>
+          <p:cNvSpPr txBox="1"/>
+          <p:nvPr/>
+        </p:nvSpPr>
+        <p:spPr>
+          <a:xfrm>
+            <a:off x="8503920" y="1874519"/>
+            <a:ext cx="2926080" cy="365760"/>
+          </a:xfrm>
+          <a:prstGeom prst="rect">
+            <a:avLst/>
+          </a:prstGeom>
+          <a:noFill/>
+        </p:spPr>
+        <p:txBody>
+          <a:bodyPr wrap="square" anchor="t" lIns="0" rIns="0" tIns="0" bIns="0"/>
+          <a:lstStyle/>
+          <a:p>
+            <a:pPr algn="l"/>
+            <a:r>
+              <a:rPr sz="1300" b="1" i="0">
+                <a:solidFill>
+                  <a:srgbClr val="A9C8F0"/>
+                </a:solidFill>
+                <a:latin typeface="Calibri"/>
+              </a:rPr>
+              <a:t>REVISE THIS TOPIC</a:t>
+            </a:r>
+          </a:p>
+        </p:txBody>
+      </p:sp>
+      <p:sp>
+        <p:nvSpPr>
+          <p:cNvPr id="12" name="TextBox 11"/>
+          <p:cNvSpPr txBox="1"/>
+          <p:nvPr/>
+        </p:nvSpPr>
+        <p:spPr>
+          <a:xfrm>
+            <a:off x="8503920" y="2286000"/>
+            <a:ext cx="2926080" cy="548640"/>
+          </a:xfrm>
+          <a:prstGeom prst="rect">
+            <a:avLst/>
+          </a:prstGeom>
+          <a:noFill/>
+        </p:spPr>
+        <p:txBody>
+          <a:bodyPr wrap="square" anchor="t" lIns="0" rIns="0" tIns="0" bIns="0"/>
+          <a:lstStyle/>
+          <a:p>
+            <a:pPr algn="l"/>
+            <a:r>
+              <a:rPr sz="1400" b="0" i="0">
+                <a:solidFill>
+                  <a:srgbClr val="FFFFFF"/>
+                </a:solidFill>
+                <a:latin typeface="Calibri"/>
+              </a:rPr>
+              <a:t>Revision notes for this lesson are on the study wiki:</a:t>
+            </a:r>
+          </a:p>
+        </p:txBody>
+      </p:sp>
+      <p:sp>
+        <p:nvSpPr>
+          <p:cNvPr id="13" name="TextBox 12"/>
+          <p:cNvSpPr txBox="1"/>
+          <p:nvPr/>
+        </p:nvSpPr>
+        <p:spPr>
+          <a:xfrm>
+            <a:off x="8503920" y="2926080"/>
+            <a:ext cx="2926080" cy="1463040"/>
+          </a:xfrm>
+          <a:prstGeom prst="rect">
+            <a:avLst/>
+          </a:prstGeom>
+          <a:noFill/>
+        </p:spPr>
+        <p:txBody>
+          <a:bodyPr wrap="square" anchor="t" lIns="0" rIns="0" tIns="0" bIns="0"/>
+          <a:lstStyle/>
+          <a:p>
+            <a:pPr algn="l"/>
+            <a:r>
+              <a:rPr sz="2000" b="1" i="0">
+                <a:solidFill>
+                  <a:srgbClr val="FFFFFF"/>
+                </a:solidFill>
+                <a:latin typeface="Cambria"/>
+              </a:rPr>
+              <a:t>Ethics and Risk</a:t>
+            </a:r>
+          </a:p>
+        </p:txBody>
+      </p:sp>
+      <p:sp>
+        <p:nvSpPr>
+          <p:cNvPr id="14" name="TextBox 13"/>
+          <p:cNvSpPr txBox="1"/>
+          <p:nvPr/>
+        </p:nvSpPr>
+        <p:spPr>
+          <a:xfrm>
+            <a:off x="548640" y="5669280"/>
+            <a:ext cx="11094415" cy="548640"/>
+          </a:xfrm>
+          <a:prstGeom prst="rect">
+            <a:avLst/>
+          </a:prstGeom>
+          <a:noFill/>
+        </p:spPr>
+        <p:txBody>
+          <a:bodyPr wrap="square" anchor="t" lIns="0" rIns="0" tIns="0" bIns="0"/>
+          <a:lstStyle/>
+          <a:p>
+            <a:pPr algn="l"/>
+            <a:r>
+              <a:rPr sz="1200" b="0" i="0">
+                <a:solidFill>
+                  <a:srgbClr val="A9C8F0"/>
+                </a:solidFill>
+                <a:latin typeface="Calibri"/>
+              </a:rPr>
+              <a:t>https://lana6478.github.io/T-level-Digital-Software-Development/#/02-occupational-specialism/02-ethics-and-risk.md</a:t>
+            </a:r>
+          </a:p>
+        </p:txBody>
+      </p:sp>
+    </p:spTree>
+  </p:cSld>
+  <p:clrMapOvr>
+    <a:masterClrMapping/>
+  </p:clrMapOvr>
+</p:sld>
+</file>
+
 <file path=ppt/slides/slide2.xml><?xml version="1.0" encoding="utf-8"?>
 <p:sld xmlns:a="http://schemas.openxmlformats.org/drawingml/2006/main" xmlns:p="http://schemas.openxmlformats.org/presentationml/2006/main" xmlns:r="http://schemas.openxmlformats.org/officeDocument/2006/relationships">
   <p:cSld>
@@ -4685,22 +6609,93 @@
       </p:sp>
       <p:sp>
         <p:nvSpPr>
-          <p:cNvPr id="6" name="Rounded Rectangle 5"/>
+          <p:cNvPr id="6" name="TextBox 5"/>
+          <p:cNvSpPr txBox="1"/>
+          <p:nvPr/>
+        </p:nvSpPr>
+        <p:spPr>
+          <a:xfrm>
+            <a:off x="548640" y="1554480"/>
+            <a:ext cx="6720840" cy="4617720"/>
+          </a:xfrm>
+          <a:prstGeom prst="rect">
+            <a:avLst/>
+          </a:prstGeom>
+          <a:noFill/>
+        </p:spPr>
+        <p:txBody>
+          <a:bodyPr wrap="square" lIns="0" rIns="0" tIns="0" bIns="0">
+            <a:spAutoFit/>
+          </a:bodyPr>
+          <a:lstStyle/>
+          <a:p>
+            <a:pPr>
+              <a:spcAft>
+                <a:spcPts val="1320"/>
+              </a:spcAft>
+            </a:pPr>
+            <a:r>
+              <a:rPr sz="2200" b="0">
+                <a:solidFill>
+                  <a:srgbClr val="202122"/>
+                </a:solidFill>
+                <a:latin typeface="Calibri"/>
+              </a:rPr>
+              <a:t>Software must follow the law in the context and market it's built for.</a:t>
+            </a:r>
+          </a:p>
+          <a:p>
+            <a:pPr>
+              <a:spcAft>
+                <a:spcPts val="1320"/>
+              </a:spcAft>
+            </a:pPr>
+            <a:r>
+              <a:rPr sz="2200" b="0">
+                <a:solidFill>
+                  <a:srgbClr val="202122"/>
+                </a:solidFill>
+                <a:latin typeface="Calibri"/>
+              </a:rPr>
+              <a:t>Consider intellectual property rights and licences, copyright and patents; consumer protection and advertising law; age ratings and gambling legislation; data protection and privacy; staff and employment responsibilities; territorial restrictions on where software can be sold; system security; and equality and diversity.</a:t>
+            </a:r>
+          </a:p>
+          <a:p>
+            <a:pPr>
+              <a:spcAft>
+                <a:spcPts val="1320"/>
+              </a:spcAft>
+            </a:pPr>
+            <a:r>
+              <a:rPr sz="2200" b="0">
+                <a:solidFill>
+                  <a:srgbClr val="202122"/>
+                </a:solidFill>
+                <a:latin typeface="Calibri"/>
+              </a:rPr>
+              <a:t>Different products trigger different rules: a children's game raises age and gambling issues, a health app raises data protection issues.</a:t>
+            </a:r>
+          </a:p>
+        </p:txBody>
+      </p:sp>
+      <p:sp>
+        <p:nvSpPr>
+          <p:cNvPr id="7" name="Rounded Rectangle 6"/>
           <p:cNvSpPr/>
           <p:nvPr/>
         </p:nvSpPr>
         <p:spPr>
           <a:xfrm>
-            <a:off x="548640" y="1600200"/>
-            <a:ext cx="3515258" cy="2148840"/>
+            <a:off x="7772400" y="1554480"/>
+            <a:ext cx="3867912" cy="4526280"/>
           </a:xfrm>
           <a:prstGeom prst="roundRect">
             <a:avLst>
-              <a:gd name="adj" fmla="val 6000"/>
+              <a:gd name="adj" fmla="val 8000"/>
             </a:avLst>
           </a:prstGeom>
           <a:solidFill>
-            <a:srgbClr val="EAF3FF"/>
+            <a:srgbClr val="03306E"/>
           </a:solidFill>
           <a:ln>
             <a:noFill/>
@@ -4729,14 +6724,14 @@
       </p:sp>
       <p:sp>
         <p:nvSpPr>
-          <p:cNvPr id="7" name="Oval 6"/>
+          <p:cNvPr id="8" name="Oval 7"/>
           <p:cNvSpPr/>
           <p:nvPr/>
         </p:nvSpPr>
         <p:spPr>
           <a:xfrm>
-            <a:off x="777240" y="1828800"/>
-            <a:ext cx="457200" cy="457200"/>
+            <a:off x="8046720" y="1828800"/>
+            <a:ext cx="548640" cy="548640"/>
           </a:xfrm>
           <a:prstGeom prst="ellipse">
             <a:avLst/>
@@ -4769,46 +6764,13 @@
           <a:p>
             <a:pPr algn="ctr"/>
             <a:r>
-              <a:rPr sz="1500" b="1">
+              <a:rPr sz="1300" b="1">
                 <a:solidFill>
                   <a:srgbClr val="202122"/>
                 </a:solidFill>
                 <a:latin typeface="Calibri"/>
               </a:rPr>
-              <a:t>1</a:t>
-            </a:r>
-          </a:p>
-        </p:txBody>
-      </p:sp>
-      <p:sp>
-        <p:nvSpPr>
-          <p:cNvPr id="8" name="TextBox 7"/>
-          <p:cNvSpPr txBox="1"/>
-          <p:nvPr/>
-        </p:nvSpPr>
-        <p:spPr>
-          <a:xfrm>
-            <a:off x="1371600" y="1801368"/>
-            <a:ext cx="2509418" cy="512064"/>
-          </a:xfrm>
-          <a:prstGeom prst="rect">
-            <a:avLst/>
-          </a:prstGeom>
-          <a:noFill/>
-        </p:spPr>
-        <p:txBody>
-          <a:bodyPr wrap="square" anchor="ctr" lIns="0" rIns="0" tIns="0" bIns="0"/>
-          <a:lstStyle/>
-          <a:p>
-            <a:pPr algn="l"/>
-            <a:r>
-              <a:rPr sz="1700" b="1" i="0">
-                <a:solidFill>
-                  <a:srgbClr val="03306E"/>
-                </a:solidFill>
-                <a:latin typeface="Calibri"/>
-              </a:rPr>
-              <a:t>Intellectual property</a:t>
+              <a:t>e.g.</a:t>
             </a:r>
           </a:p>
         </p:txBody>
@@ -4821,8 +6783,8 @@
         </p:nvSpPr>
         <p:spPr>
           <a:xfrm>
-            <a:off x="777240" y="2468880"/>
-            <a:ext cx="3058058" cy="1143000"/>
+            <a:off x="8046720" y="2560320"/>
+            <a:ext cx="3291840" cy="365760"/>
           </a:xfrm>
           <a:prstGeom prst="rect">
             <a:avLst/>
@@ -4835,124 +6797,27 @@
           <a:p>
             <a:pPr algn="l"/>
             <a:r>
-              <a:rPr sz="2000" b="0" i="0">
-                <a:solidFill>
-                  <a:srgbClr val="202122"/>
-                </a:solidFill>
-                <a:latin typeface="Calibri"/>
-              </a:rPr>
-              <a:t>Rights, licences, copyright and patents.</a:t>
-            </a:r>
-          </a:p>
-        </p:txBody>
-      </p:sp>
-      <p:sp>
-        <p:nvSpPr>
-          <p:cNvPr id="10" name="Rounded Rectangle 9"/>
-          <p:cNvSpPr/>
-          <p:nvPr/>
-        </p:nvSpPr>
-        <p:spPr>
-          <a:xfrm>
-            <a:off x="4338218" y="1600200"/>
-            <a:ext cx="3515258" cy="2148840"/>
-          </a:xfrm>
-          <a:prstGeom prst="roundRect">
-            <a:avLst>
-              <a:gd name="adj" fmla="val 6000"/>
-            </a:avLst>
-          </a:prstGeom>
-          <a:solidFill>
-            <a:srgbClr val="EAF3FF"/>
-          </a:solidFill>
-          <a:ln>
-            <a:noFill/>
-          </a:ln>
-          <a:effectLst/>
-        </p:spPr>
-        <p:style>
-          <a:lnRef idx="1">
-            <a:schemeClr val="accent1"/>
-          </a:lnRef>
-          <a:fillRef idx="3">
-            <a:schemeClr val="accent1"/>
-          </a:fillRef>
-          <a:effectRef idx="2">
-            <a:schemeClr val="accent1"/>
-          </a:effectRef>
-          <a:fontRef idx="minor">
-            <a:schemeClr val="lt1"/>
-          </a:fontRef>
-        </p:style>
-        <p:txBody>
-          <a:bodyPr rtlCol="0" anchor="ctr"/>
-          <a:lstStyle/>
-          <a:p/>
-        </p:txBody>
-      </p:sp>
-      <p:sp>
-        <p:nvSpPr>
-          <p:cNvPr id="11" name="Oval 10"/>
-          <p:cNvSpPr/>
-          <p:nvPr/>
-        </p:nvSpPr>
-        <p:spPr>
-          <a:xfrm>
-            <a:off x="4566818" y="1828800"/>
-            <a:ext cx="457200" cy="457200"/>
-          </a:xfrm>
-          <a:prstGeom prst="ellipse">
-            <a:avLst/>
-          </a:prstGeom>
-          <a:solidFill>
-            <a:srgbClr val="33C17A"/>
-          </a:solidFill>
-          <a:ln>
-            <a:noFill/>
-          </a:ln>
-          <a:effectLst/>
-        </p:spPr>
-        <p:style>
-          <a:lnRef idx="1">
-            <a:schemeClr val="accent1"/>
-          </a:lnRef>
-          <a:fillRef idx="3">
-            <a:schemeClr val="accent1"/>
-          </a:fillRef>
-          <a:effectRef idx="2">
-            <a:schemeClr val="accent1"/>
-          </a:effectRef>
-          <a:fontRef idx="minor">
-            <a:schemeClr val="lt1"/>
-          </a:fontRef>
-        </p:style>
-        <p:txBody>
-          <a:bodyPr rtlCol="0" anchor="ctr" lIns="0" rIns="0" tIns="0" bIns="0"/>
-          <a:lstStyle/>
-          <a:p>
-            <a:pPr algn="ctr"/>
-            <a:r>
-              <a:rPr sz="1500" b="1">
-                <a:solidFill>
-                  <a:srgbClr val="202122"/>
-                </a:solidFill>
-                <a:latin typeface="Calibri"/>
-              </a:rPr>
-              <a:t>2</a:t>
-            </a:r>
-          </a:p>
-        </p:txBody>
-      </p:sp>
-      <p:sp>
-        <p:nvSpPr>
-          <p:cNvPr id="12" name="TextBox 11"/>
+              <a:rPr sz="1300" b="1" i="0">
+                <a:solidFill>
+                  <a:srgbClr val="A9C8F0"/>
+                </a:solidFill>
+                <a:latin typeface="Calibri"/>
+              </a:rPr>
+              <a:t>EXAMPLE</a:t>
+            </a:r>
+          </a:p>
+        </p:txBody>
+      </p:sp>
+      <p:sp>
+        <p:nvSpPr>
+          <p:cNvPr id="10" name="TextBox 9"/>
           <p:cNvSpPr txBox="1"/>
           <p:nvPr/>
         </p:nvSpPr>
         <p:spPr>
           <a:xfrm>
-            <a:off x="5161178" y="1801368"/>
-            <a:ext cx="2509418" cy="512064"/>
+            <a:off x="8046720" y="2971800"/>
+            <a:ext cx="3291840" cy="2971800"/>
           </a:xfrm>
           <a:prstGeom prst="rect">
             <a:avLst/>
@@ -4960,703 +6825,18 @@
           <a:noFill/>
         </p:spPr>
         <p:txBody>
-          <a:bodyPr wrap="square" anchor="ctr" lIns="0" rIns="0" tIns="0" bIns="0"/>
+          <a:bodyPr wrap="square" anchor="t" lIns="0" rIns="0" tIns="0" bIns="0"/>
           <a:lstStyle/>
           <a:p>
             <a:pPr algn="l"/>
             <a:r>
-              <a:rPr sz="1600" b="1" i="0">
-                <a:solidFill>
-                  <a:srgbClr val="03306E"/>
-                </a:solidFill>
-                <a:latin typeface="Calibri"/>
-              </a:rPr>
-              <a:t>Consumers and advertising</a:t>
-            </a:r>
-          </a:p>
-        </p:txBody>
-      </p:sp>
-      <p:sp>
-        <p:nvSpPr>
-          <p:cNvPr id="13" name="TextBox 12"/>
-          <p:cNvSpPr txBox="1"/>
-          <p:nvPr/>
-        </p:nvSpPr>
-        <p:spPr>
-          <a:xfrm>
-            <a:off x="4566818" y="2468880"/>
-            <a:ext cx="3058058" cy="1143000"/>
-          </a:xfrm>
-          <a:prstGeom prst="rect">
-            <a:avLst/>
-          </a:prstGeom>
-          <a:noFill/>
-        </p:spPr>
-        <p:txBody>
-          <a:bodyPr wrap="square" anchor="t" lIns="0" rIns="0" tIns="0" bIns="0"/>
-          <a:lstStyle/>
-          <a:p>
-            <a:pPr algn="l"/>
-            <a:r>
-              <a:rPr sz="2000" b="0" i="0">
-                <a:solidFill>
-                  <a:srgbClr val="202122"/>
-                </a:solidFill>
-                <a:latin typeface="Calibri"/>
-              </a:rPr>
-              <a:t>Consumer protection and advertising law.</a:t>
-            </a:r>
-          </a:p>
-        </p:txBody>
-      </p:sp>
-      <p:sp>
-        <p:nvSpPr>
-          <p:cNvPr id="14" name="Rounded Rectangle 13"/>
-          <p:cNvSpPr/>
-          <p:nvPr/>
-        </p:nvSpPr>
-        <p:spPr>
-          <a:xfrm>
-            <a:off x="8127796" y="1600200"/>
-            <a:ext cx="3515258" cy="2148840"/>
-          </a:xfrm>
-          <a:prstGeom prst="roundRect">
-            <a:avLst>
-              <a:gd name="adj" fmla="val 6000"/>
-            </a:avLst>
-          </a:prstGeom>
-          <a:solidFill>
-            <a:srgbClr val="EAF3FF"/>
-          </a:solidFill>
-          <a:ln>
-            <a:noFill/>
-          </a:ln>
-          <a:effectLst/>
-        </p:spPr>
-        <p:style>
-          <a:lnRef idx="1">
-            <a:schemeClr val="accent1"/>
-          </a:lnRef>
-          <a:fillRef idx="3">
-            <a:schemeClr val="accent1"/>
-          </a:fillRef>
-          <a:effectRef idx="2">
-            <a:schemeClr val="accent1"/>
-          </a:effectRef>
-          <a:fontRef idx="minor">
-            <a:schemeClr val="lt1"/>
-          </a:fontRef>
-        </p:style>
-        <p:txBody>
-          <a:bodyPr rtlCol="0" anchor="ctr"/>
-          <a:lstStyle/>
-          <a:p/>
-        </p:txBody>
-      </p:sp>
-      <p:sp>
-        <p:nvSpPr>
-          <p:cNvPr id="15" name="Oval 14"/>
-          <p:cNvSpPr/>
-          <p:nvPr/>
-        </p:nvSpPr>
-        <p:spPr>
-          <a:xfrm>
-            <a:off x="8356396" y="1828800"/>
-            <a:ext cx="457200" cy="457200"/>
-          </a:xfrm>
-          <a:prstGeom prst="ellipse">
-            <a:avLst/>
-          </a:prstGeom>
-          <a:solidFill>
-            <a:srgbClr val="33C17A"/>
-          </a:solidFill>
-          <a:ln>
-            <a:noFill/>
-          </a:ln>
-          <a:effectLst/>
-        </p:spPr>
-        <p:style>
-          <a:lnRef idx="1">
-            <a:schemeClr val="accent1"/>
-          </a:lnRef>
-          <a:fillRef idx="3">
-            <a:schemeClr val="accent1"/>
-          </a:fillRef>
-          <a:effectRef idx="2">
-            <a:schemeClr val="accent1"/>
-          </a:effectRef>
-          <a:fontRef idx="minor">
-            <a:schemeClr val="lt1"/>
-          </a:fontRef>
-        </p:style>
-        <p:txBody>
-          <a:bodyPr rtlCol="0" anchor="ctr" lIns="0" rIns="0" tIns="0" bIns="0"/>
-          <a:lstStyle/>
-          <a:p>
-            <a:pPr algn="ctr"/>
-            <a:r>
-              <a:rPr sz="1500" b="1">
-                <a:solidFill>
-                  <a:srgbClr val="202122"/>
-                </a:solidFill>
-                <a:latin typeface="Calibri"/>
-              </a:rPr>
-              <a:t>3</a:t>
-            </a:r>
-          </a:p>
-        </p:txBody>
-      </p:sp>
-      <p:sp>
-        <p:nvSpPr>
-          <p:cNvPr id="16" name="TextBox 15"/>
-          <p:cNvSpPr txBox="1"/>
-          <p:nvPr/>
-        </p:nvSpPr>
-        <p:spPr>
-          <a:xfrm>
-            <a:off x="8950756" y="1801368"/>
-            <a:ext cx="2509418" cy="512064"/>
-          </a:xfrm>
-          <a:prstGeom prst="rect">
-            <a:avLst/>
-          </a:prstGeom>
-          <a:noFill/>
-        </p:spPr>
-        <p:txBody>
-          <a:bodyPr wrap="square" anchor="ctr" lIns="0" rIns="0" tIns="0" bIns="0"/>
-          <a:lstStyle/>
-          <a:p>
-            <a:pPr algn="l"/>
-            <a:r>
-              <a:rPr sz="1900" b="1" i="0">
-                <a:solidFill>
-                  <a:srgbClr val="03306E"/>
-                </a:solidFill>
-                <a:latin typeface="Calibri"/>
-              </a:rPr>
-              <a:t>Age and gambling</a:t>
-            </a:r>
-          </a:p>
-        </p:txBody>
-      </p:sp>
-      <p:sp>
-        <p:nvSpPr>
-          <p:cNvPr id="17" name="TextBox 16"/>
-          <p:cNvSpPr txBox="1"/>
-          <p:nvPr/>
-        </p:nvSpPr>
-        <p:spPr>
-          <a:xfrm>
-            <a:off x="8356396" y="2468880"/>
-            <a:ext cx="3058058" cy="1143000"/>
-          </a:xfrm>
-          <a:prstGeom prst="rect">
-            <a:avLst/>
-          </a:prstGeom>
-          <a:noFill/>
-        </p:spPr>
-        <p:txBody>
-          <a:bodyPr wrap="square" anchor="t" lIns="0" rIns="0" tIns="0" bIns="0"/>
-          <a:lstStyle/>
-          <a:p>
-            <a:pPr algn="l"/>
-            <a:r>
-              <a:rPr sz="2000" b="0" i="0">
-                <a:solidFill>
-                  <a:srgbClr val="202122"/>
-                </a:solidFill>
-                <a:latin typeface="Calibri"/>
-              </a:rPr>
-              <a:t>Age ratings and gambling legislation.</a:t>
-            </a:r>
-          </a:p>
-        </p:txBody>
-      </p:sp>
-      <p:sp>
-        <p:nvSpPr>
-          <p:cNvPr id="18" name="Rounded Rectangle 17"/>
-          <p:cNvSpPr/>
-          <p:nvPr/>
-        </p:nvSpPr>
-        <p:spPr>
-          <a:xfrm>
-            <a:off x="548640" y="4023360"/>
-            <a:ext cx="3515258" cy="2148840"/>
-          </a:xfrm>
-          <a:prstGeom prst="roundRect">
-            <a:avLst>
-              <a:gd name="adj" fmla="val 6000"/>
-            </a:avLst>
-          </a:prstGeom>
-          <a:solidFill>
-            <a:srgbClr val="EAF3FF"/>
-          </a:solidFill>
-          <a:ln>
-            <a:noFill/>
-          </a:ln>
-          <a:effectLst/>
-        </p:spPr>
-        <p:style>
-          <a:lnRef idx="1">
-            <a:schemeClr val="accent1"/>
-          </a:lnRef>
-          <a:fillRef idx="3">
-            <a:schemeClr val="accent1"/>
-          </a:fillRef>
-          <a:effectRef idx="2">
-            <a:schemeClr val="accent1"/>
-          </a:effectRef>
-          <a:fontRef idx="minor">
-            <a:schemeClr val="lt1"/>
-          </a:fontRef>
-        </p:style>
-        <p:txBody>
-          <a:bodyPr rtlCol="0" anchor="ctr"/>
-          <a:lstStyle/>
-          <a:p/>
-        </p:txBody>
-      </p:sp>
-      <p:sp>
-        <p:nvSpPr>
-          <p:cNvPr id="19" name="Oval 18"/>
-          <p:cNvSpPr/>
-          <p:nvPr/>
-        </p:nvSpPr>
-        <p:spPr>
-          <a:xfrm>
-            <a:off x="777240" y="4251960"/>
-            <a:ext cx="457200" cy="457200"/>
-          </a:xfrm>
-          <a:prstGeom prst="ellipse">
-            <a:avLst/>
-          </a:prstGeom>
-          <a:solidFill>
-            <a:srgbClr val="33C17A"/>
-          </a:solidFill>
-          <a:ln>
-            <a:noFill/>
-          </a:ln>
-          <a:effectLst/>
-        </p:spPr>
-        <p:style>
-          <a:lnRef idx="1">
-            <a:schemeClr val="accent1"/>
-          </a:lnRef>
-          <a:fillRef idx="3">
-            <a:schemeClr val="accent1"/>
-          </a:fillRef>
-          <a:effectRef idx="2">
-            <a:schemeClr val="accent1"/>
-          </a:effectRef>
-          <a:fontRef idx="minor">
-            <a:schemeClr val="lt1"/>
-          </a:fontRef>
-        </p:style>
-        <p:txBody>
-          <a:bodyPr rtlCol="0" anchor="ctr" lIns="0" rIns="0" tIns="0" bIns="0"/>
-          <a:lstStyle/>
-          <a:p>
-            <a:pPr algn="ctr"/>
-            <a:r>
-              <a:rPr sz="1500" b="1">
-                <a:solidFill>
-                  <a:srgbClr val="202122"/>
-                </a:solidFill>
-                <a:latin typeface="Calibri"/>
-              </a:rPr>
-              <a:t>4</a:t>
-            </a:r>
-          </a:p>
-        </p:txBody>
-      </p:sp>
-      <p:sp>
-        <p:nvSpPr>
-          <p:cNvPr id="20" name="TextBox 19"/>
-          <p:cNvSpPr txBox="1"/>
-          <p:nvPr/>
-        </p:nvSpPr>
-        <p:spPr>
-          <a:xfrm>
-            <a:off x="1371600" y="4224528"/>
-            <a:ext cx="2509418" cy="512064"/>
-          </a:xfrm>
-          <a:prstGeom prst="rect">
-            <a:avLst/>
-          </a:prstGeom>
-          <a:noFill/>
-        </p:spPr>
-        <p:txBody>
-          <a:bodyPr wrap="square" anchor="ctr" lIns="0" rIns="0" tIns="0" bIns="0"/>
-          <a:lstStyle/>
-          <a:p>
-            <a:pPr algn="l"/>
-            <a:r>
-              <a:rPr sz="1900" b="1" i="0">
-                <a:solidFill>
-                  <a:srgbClr val="03306E"/>
-                </a:solidFill>
-                <a:latin typeface="Calibri"/>
-              </a:rPr>
-              <a:t>Data</a:t>
-            </a:r>
-          </a:p>
-        </p:txBody>
-      </p:sp>
-      <p:sp>
-        <p:nvSpPr>
-          <p:cNvPr id="21" name="TextBox 20"/>
-          <p:cNvSpPr txBox="1"/>
-          <p:nvPr/>
-        </p:nvSpPr>
-        <p:spPr>
-          <a:xfrm>
-            <a:off x="777240" y="4892040"/>
-            <a:ext cx="3058058" cy="1143000"/>
-          </a:xfrm>
-          <a:prstGeom prst="rect">
-            <a:avLst/>
-          </a:prstGeom>
-          <a:noFill/>
-        </p:spPr>
-        <p:txBody>
-          <a:bodyPr wrap="square" anchor="t" lIns="0" rIns="0" tIns="0" bIns="0"/>
-          <a:lstStyle/>
-          <a:p>
-            <a:pPr algn="l"/>
-            <a:r>
-              <a:rPr sz="2000" b="0" i="0">
-                <a:solidFill>
-                  <a:srgbClr val="202122"/>
-                </a:solidFill>
-                <a:latin typeface="Calibri"/>
-              </a:rPr>
-              <a:t>Data protection, privacy and system security.</a:t>
-            </a:r>
-          </a:p>
-        </p:txBody>
-      </p:sp>
-      <p:sp>
-        <p:nvSpPr>
-          <p:cNvPr id="22" name="Rounded Rectangle 21"/>
-          <p:cNvSpPr/>
-          <p:nvPr/>
-        </p:nvSpPr>
-        <p:spPr>
-          <a:xfrm>
-            <a:off x="4338218" y="4023360"/>
-            <a:ext cx="3515258" cy="2148840"/>
-          </a:xfrm>
-          <a:prstGeom prst="roundRect">
-            <a:avLst>
-              <a:gd name="adj" fmla="val 6000"/>
-            </a:avLst>
-          </a:prstGeom>
-          <a:solidFill>
-            <a:srgbClr val="EAF3FF"/>
-          </a:solidFill>
-          <a:ln>
-            <a:noFill/>
-          </a:ln>
-          <a:effectLst/>
-        </p:spPr>
-        <p:style>
-          <a:lnRef idx="1">
-            <a:schemeClr val="accent1"/>
-          </a:lnRef>
-          <a:fillRef idx="3">
-            <a:schemeClr val="accent1"/>
-          </a:fillRef>
-          <a:effectRef idx="2">
-            <a:schemeClr val="accent1"/>
-          </a:effectRef>
-          <a:fontRef idx="minor">
-            <a:schemeClr val="lt1"/>
-          </a:fontRef>
-        </p:style>
-        <p:txBody>
-          <a:bodyPr rtlCol="0" anchor="ctr"/>
-          <a:lstStyle/>
-          <a:p/>
-        </p:txBody>
-      </p:sp>
-      <p:sp>
-        <p:nvSpPr>
-          <p:cNvPr id="23" name="Oval 22"/>
-          <p:cNvSpPr/>
-          <p:nvPr/>
-        </p:nvSpPr>
-        <p:spPr>
-          <a:xfrm>
-            <a:off x="4566818" y="4251960"/>
-            <a:ext cx="457200" cy="457200"/>
-          </a:xfrm>
-          <a:prstGeom prst="ellipse">
-            <a:avLst/>
-          </a:prstGeom>
-          <a:solidFill>
-            <a:srgbClr val="33C17A"/>
-          </a:solidFill>
-          <a:ln>
-            <a:noFill/>
-          </a:ln>
-          <a:effectLst/>
-        </p:spPr>
-        <p:style>
-          <a:lnRef idx="1">
-            <a:schemeClr val="accent1"/>
-          </a:lnRef>
-          <a:fillRef idx="3">
-            <a:schemeClr val="accent1"/>
-          </a:fillRef>
-          <a:effectRef idx="2">
-            <a:schemeClr val="accent1"/>
-          </a:effectRef>
-          <a:fontRef idx="minor">
-            <a:schemeClr val="lt1"/>
-          </a:fontRef>
-        </p:style>
-        <p:txBody>
-          <a:bodyPr rtlCol="0" anchor="ctr" lIns="0" rIns="0" tIns="0" bIns="0"/>
-          <a:lstStyle/>
-          <a:p>
-            <a:pPr algn="ctr"/>
-            <a:r>
-              <a:rPr sz="1500" b="1">
-                <a:solidFill>
-                  <a:srgbClr val="202122"/>
-                </a:solidFill>
-                <a:latin typeface="Calibri"/>
-              </a:rPr>
-              <a:t>5</a:t>
-            </a:r>
-          </a:p>
-        </p:txBody>
-      </p:sp>
-      <p:sp>
-        <p:nvSpPr>
-          <p:cNvPr id="24" name="TextBox 23"/>
-          <p:cNvSpPr txBox="1"/>
-          <p:nvPr/>
-        </p:nvSpPr>
-        <p:spPr>
-          <a:xfrm>
-            <a:off x="5161178" y="4224528"/>
-            <a:ext cx="2509418" cy="512064"/>
-          </a:xfrm>
-          <a:prstGeom prst="rect">
-            <a:avLst/>
-          </a:prstGeom>
-          <a:noFill/>
-        </p:spPr>
-        <p:txBody>
-          <a:bodyPr wrap="square" anchor="ctr" lIns="0" rIns="0" tIns="0" bIns="0"/>
-          <a:lstStyle/>
-          <a:p>
-            <a:pPr algn="l"/>
-            <a:r>
-              <a:rPr sz="1900" b="1" i="0">
-                <a:solidFill>
-                  <a:srgbClr val="03306E"/>
-                </a:solidFill>
-                <a:latin typeface="Calibri"/>
-              </a:rPr>
-              <a:t>People</a:t>
-            </a:r>
-          </a:p>
-        </p:txBody>
-      </p:sp>
-      <p:sp>
-        <p:nvSpPr>
-          <p:cNvPr id="25" name="TextBox 24"/>
-          <p:cNvSpPr txBox="1"/>
-          <p:nvPr/>
-        </p:nvSpPr>
-        <p:spPr>
-          <a:xfrm>
-            <a:off x="4566818" y="4892040"/>
-            <a:ext cx="3058058" cy="1143000"/>
-          </a:xfrm>
-          <a:prstGeom prst="rect">
-            <a:avLst/>
-          </a:prstGeom>
-          <a:noFill/>
-        </p:spPr>
-        <p:txBody>
-          <a:bodyPr wrap="square" anchor="t" lIns="0" rIns="0" tIns="0" bIns="0"/>
-          <a:lstStyle/>
-          <a:p>
-            <a:pPr algn="l"/>
-            <a:r>
-              <a:rPr sz="2000" b="0" i="0">
-                <a:solidFill>
-                  <a:srgbClr val="202122"/>
-                </a:solidFill>
-                <a:latin typeface="Calibri"/>
-              </a:rPr>
-              <a:t>Staff responsibilities, equality and diversity.</a:t>
-            </a:r>
-          </a:p>
-        </p:txBody>
-      </p:sp>
-      <p:sp>
-        <p:nvSpPr>
-          <p:cNvPr id="26" name="Rounded Rectangle 25"/>
-          <p:cNvSpPr/>
-          <p:nvPr/>
-        </p:nvSpPr>
-        <p:spPr>
-          <a:xfrm>
-            <a:off x="8127796" y="4023360"/>
-            <a:ext cx="3515258" cy="2148840"/>
-          </a:xfrm>
-          <a:prstGeom prst="roundRect">
-            <a:avLst>
-              <a:gd name="adj" fmla="val 6000"/>
-            </a:avLst>
-          </a:prstGeom>
-          <a:solidFill>
-            <a:srgbClr val="EAF3FF"/>
-          </a:solidFill>
-          <a:ln>
-            <a:noFill/>
-          </a:ln>
-          <a:effectLst/>
-        </p:spPr>
-        <p:style>
-          <a:lnRef idx="1">
-            <a:schemeClr val="accent1"/>
-          </a:lnRef>
-          <a:fillRef idx="3">
-            <a:schemeClr val="accent1"/>
-          </a:fillRef>
-          <a:effectRef idx="2">
-            <a:schemeClr val="accent1"/>
-          </a:effectRef>
-          <a:fontRef idx="minor">
-            <a:schemeClr val="lt1"/>
-          </a:fontRef>
-        </p:style>
-        <p:txBody>
-          <a:bodyPr rtlCol="0" anchor="ctr"/>
-          <a:lstStyle/>
-          <a:p/>
-        </p:txBody>
-      </p:sp>
-      <p:sp>
-        <p:nvSpPr>
-          <p:cNvPr id="27" name="Oval 26"/>
-          <p:cNvSpPr/>
-          <p:nvPr/>
-        </p:nvSpPr>
-        <p:spPr>
-          <a:xfrm>
-            <a:off x="8356396" y="4251960"/>
-            <a:ext cx="457200" cy="457200"/>
-          </a:xfrm>
-          <a:prstGeom prst="ellipse">
-            <a:avLst/>
-          </a:prstGeom>
-          <a:solidFill>
-            <a:srgbClr val="33C17A"/>
-          </a:solidFill>
-          <a:ln>
-            <a:noFill/>
-          </a:ln>
-          <a:effectLst/>
-        </p:spPr>
-        <p:style>
-          <a:lnRef idx="1">
-            <a:schemeClr val="accent1"/>
-          </a:lnRef>
-          <a:fillRef idx="3">
-            <a:schemeClr val="accent1"/>
-          </a:fillRef>
-          <a:effectRef idx="2">
-            <a:schemeClr val="accent1"/>
-          </a:effectRef>
-          <a:fontRef idx="minor">
-            <a:schemeClr val="lt1"/>
-          </a:fontRef>
-        </p:style>
-        <p:txBody>
-          <a:bodyPr rtlCol="0" anchor="ctr" lIns="0" rIns="0" tIns="0" bIns="0"/>
-          <a:lstStyle/>
-          <a:p>
-            <a:pPr algn="ctr"/>
-            <a:r>
-              <a:rPr sz="1500" b="1">
-                <a:solidFill>
-                  <a:srgbClr val="202122"/>
-                </a:solidFill>
-                <a:latin typeface="Calibri"/>
-              </a:rPr>
-              <a:t>6</a:t>
-            </a:r>
-          </a:p>
-        </p:txBody>
-      </p:sp>
-      <p:sp>
-        <p:nvSpPr>
-          <p:cNvPr id="28" name="TextBox 27"/>
-          <p:cNvSpPr txBox="1"/>
-          <p:nvPr/>
-        </p:nvSpPr>
-        <p:spPr>
-          <a:xfrm>
-            <a:off x="8950756" y="4224528"/>
-            <a:ext cx="2509418" cy="512064"/>
-          </a:xfrm>
-          <a:prstGeom prst="rect">
-            <a:avLst/>
-          </a:prstGeom>
-          <a:noFill/>
-        </p:spPr>
-        <p:txBody>
-          <a:bodyPr wrap="square" anchor="ctr" lIns="0" rIns="0" tIns="0" bIns="0"/>
-          <a:lstStyle/>
-          <a:p>
-            <a:pPr algn="l"/>
-            <a:r>
-              <a:rPr sz="1900" b="1" i="0">
-                <a:solidFill>
-                  <a:srgbClr val="03306E"/>
-                </a:solidFill>
-                <a:latin typeface="Calibri"/>
-              </a:rPr>
-              <a:t>Territory</a:t>
-            </a:r>
-          </a:p>
-        </p:txBody>
-      </p:sp>
-      <p:sp>
-        <p:nvSpPr>
-          <p:cNvPr id="29" name="TextBox 28"/>
-          <p:cNvSpPr txBox="1"/>
-          <p:nvPr/>
-        </p:nvSpPr>
-        <p:spPr>
-          <a:xfrm>
-            <a:off x="8356396" y="4892040"/>
-            <a:ext cx="3058058" cy="1143000"/>
-          </a:xfrm>
-          <a:prstGeom prst="rect">
-            <a:avLst/>
-          </a:prstGeom>
-          <a:noFill/>
-        </p:spPr>
-        <p:txBody>
-          <a:bodyPr wrap="square" anchor="t" lIns="0" rIns="0" tIns="0" bIns="0"/>
-          <a:lstStyle/>
-          <a:p>
-            <a:pPr algn="l"/>
-            <a:r>
-              <a:rPr sz="2000" b="0" i="0">
-                <a:solidFill>
-                  <a:srgbClr val="202122"/>
-                </a:solidFill>
-                <a:latin typeface="Calibri"/>
-              </a:rPr>
-              <a:t>Territorial restrictions on where software can be sold.</a:t>
+              <a:rPr sz="1900" b="0" i="0">
+                <a:solidFill>
+                  <a:srgbClr val="FFFFFF"/>
+                </a:solidFill>
+                <a:latin typeface="Cambria"/>
+              </a:rPr>
+              <a:t>Loot boxes in a children's game may fall under gambling law and consumer protection, and collecting children's data brings strict privacy rules.</a:t>
             </a:r>
           </a:p>
         </p:txBody>
@@ -5748,7 +6928,7 @@
                 </a:solidFill>
                 <a:latin typeface="Cambria"/>
               </a:rPr>
-              <a:t>Standards and ethics</a:t>
+              <a:t>Legal and regulatory considerations</a:t>
             </a:r>
           </a:p>
         </p:txBody>
@@ -5828,88 +7008,11 @@
         <p:spPr>
           <a:xfrm>
             <a:off x="548640" y="1600200"/>
-            <a:ext cx="5364327" cy="640080"/>
+            <a:ext cx="3515258" cy="2148840"/>
           </a:xfrm>
           <a:prstGeom prst="roundRect">
             <a:avLst>
-              <a:gd name="adj" fmla="val 15000"/>
-            </a:avLst>
-          </a:prstGeom>
-          <a:solidFill>
-            <a:srgbClr val="03306E"/>
-          </a:solidFill>
-          <a:ln>
-            <a:noFill/>
-          </a:ln>
-          <a:effectLst/>
-        </p:spPr>
-        <p:style>
-          <a:lnRef idx="1">
-            <a:schemeClr val="accent1"/>
-          </a:lnRef>
-          <a:fillRef idx="3">
-            <a:schemeClr val="accent1"/>
-          </a:fillRef>
-          <a:effectRef idx="2">
-            <a:schemeClr val="accent1"/>
-          </a:effectRef>
-          <a:fontRef idx="minor">
-            <a:schemeClr val="lt1"/>
-          </a:fontRef>
-        </p:style>
-        <p:txBody>
-          <a:bodyPr rtlCol="0" anchor="ctr"/>
-          <a:lstStyle/>
-          <a:p/>
-        </p:txBody>
-      </p:sp>
-      <p:sp>
-        <p:nvSpPr>
-          <p:cNvPr id="7" name="TextBox 6"/>
-          <p:cNvSpPr txBox="1"/>
-          <p:nvPr/>
-        </p:nvSpPr>
-        <p:spPr>
-          <a:xfrm>
-            <a:off x="777240" y="1600200"/>
-            <a:ext cx="4907127" cy="640080"/>
-          </a:xfrm>
-          <a:prstGeom prst="rect">
-            <a:avLst/>
-          </a:prstGeom>
-          <a:noFill/>
-        </p:spPr>
-        <p:txBody>
-          <a:bodyPr wrap="square" anchor="ctr" lIns="0" rIns="0" tIns="0" bIns="0"/>
-          <a:lstStyle/>
-          <a:p>
-            <a:pPr algn="l"/>
-            <a:r>
-              <a:rPr sz="2000" b="1" i="0">
-                <a:solidFill>
-                  <a:srgbClr val="FFFFFF"/>
-                </a:solidFill>
-                <a:latin typeface="Calibri"/>
-              </a:rPr>
-              <a:t>Development standards</a:t>
-            </a:r>
-          </a:p>
-        </p:txBody>
-      </p:sp>
-      <p:sp>
-        <p:nvSpPr>
-          <p:cNvPr id="8" name="Rounded Rectangle 7"/>
-          <p:cNvSpPr/>
-          <p:nvPr/>
-        </p:nvSpPr>
-        <p:spPr>
-          <a:xfrm>
-            <a:off x="548640" y="2377440"/>
-            <a:ext cx="5364327" cy="3794760"/>
-          </a:xfrm>
-          <a:prstGeom prst="roundRect">
-            <a:avLst>
-              <a:gd name="adj" fmla="val 4000"/>
+              <a:gd name="adj" fmla="val 6000"/>
             </a:avLst>
           </a:prstGeom>
           <a:solidFill>
@@ -5942,105 +7045,20 @@
       </p:sp>
       <p:sp>
         <p:nvSpPr>
-          <p:cNvPr id="9" name="TextBox 8"/>
-          <p:cNvSpPr txBox="1"/>
-          <p:nvPr/>
-        </p:nvSpPr>
-        <p:spPr>
-          <a:xfrm>
-            <a:off x="822959" y="2606040"/>
-            <a:ext cx="4815687" cy="3337560"/>
-          </a:xfrm>
-          <a:prstGeom prst="rect">
-            <a:avLst/>
-          </a:prstGeom>
-          <a:noFill/>
-        </p:spPr>
-        <p:txBody>
-          <a:bodyPr wrap="square" lIns="0" rIns="0" tIns="0" bIns="0">
-            <a:spAutoFit/>
-          </a:bodyPr>
-          <a:lstStyle/>
-          <a:p>
-            <a:pPr marL="274320" indent="-274320">
-              <a:spcAft>
-                <a:spcPts val="990"/>
-              </a:spcAft>
-              <a:buClr>
-                <a:srgbClr val="0645AD"/>
-              </a:buClr>
-              <a:buFont typeface="Arial"/>
-              <a:buChar char="•"/>
-            </a:pPr>
-            <a:r>
-              <a:rPr sz="2200" b="1">
-                <a:solidFill>
-                  <a:srgbClr val="202122"/>
-                </a:solidFill>
-                <a:latin typeface="Calibri"/>
-              </a:rPr>
-              <a:t>ISO/IEC/IEEE 90003:2018:</a:t>
-            </a:r>
-            <a:r>
-              <a:rPr sz="2200" b="0">
-                <a:solidFill>
-                  <a:srgbClr val="202122"/>
-                </a:solidFill>
-                <a:latin typeface="Calibri"/>
-              </a:rPr>
-              <a:t> software engineering guidance</a:t>
-            </a:r>
-          </a:p>
-          <a:p>
-            <a:pPr marL="274320" indent="-274320">
-              <a:spcAft>
-                <a:spcPts val="990"/>
-              </a:spcAft>
-              <a:buClr>
-                <a:srgbClr val="0645AD"/>
-              </a:buClr>
-              <a:buFont typeface="Arial"/>
-              <a:buChar char="•"/>
-            </a:pPr>
-            <a:r>
-              <a:rPr sz="2200" b="1">
-                <a:solidFill>
-                  <a:srgbClr val="202122"/>
-                </a:solidFill>
-                <a:latin typeface="Calibri"/>
-              </a:rPr>
-              <a:t>W3C:</a:t>
-            </a:r>
-            <a:r>
-              <a:rPr sz="2200" b="0">
-                <a:solidFill>
-                  <a:srgbClr val="202122"/>
-                </a:solidFill>
-                <a:latin typeface="Calibri"/>
-              </a:rPr>
-              <a:t> web standards</a:t>
-            </a:r>
-          </a:p>
-        </p:txBody>
-      </p:sp>
-      <p:sp>
-        <p:nvSpPr>
-          <p:cNvPr id="10" name="Rounded Rectangle 9"/>
+          <p:cNvPr id="7" name="Oval 6"/>
           <p:cNvSpPr/>
           <p:nvPr/>
         </p:nvSpPr>
         <p:spPr>
           <a:xfrm>
-            <a:off x="6278727" y="1600200"/>
-            <a:ext cx="5364327" cy="640080"/>
-          </a:xfrm>
-          <a:prstGeom prst="roundRect">
-            <a:avLst>
-              <a:gd name="adj" fmla="val 15000"/>
-            </a:avLst>
+            <a:off x="777240" y="1828800"/>
+            <a:ext cx="457200" cy="457200"/>
+          </a:xfrm>
+          <a:prstGeom prst="ellipse">
+            <a:avLst/>
           </a:prstGeom>
           <a:solidFill>
-            <a:srgbClr val="0645AD"/>
+            <a:srgbClr val="33C17A"/>
           </a:solidFill>
           <a:ln>
             <a:noFill/>
@@ -6062,21 +7080,32 @@
           </a:fontRef>
         </p:style>
         <p:txBody>
-          <a:bodyPr rtlCol="0" anchor="ctr"/>
-          <a:lstStyle/>
-          <a:p/>
-        </p:txBody>
-      </p:sp>
-      <p:sp>
-        <p:nvSpPr>
-          <p:cNvPr id="11" name="TextBox 10"/>
+          <a:bodyPr rtlCol="0" anchor="ctr" lIns="0" rIns="0" tIns="0" bIns="0"/>
+          <a:lstStyle/>
+          <a:p>
+            <a:pPr algn="ctr"/>
+            <a:r>
+              <a:rPr sz="1500" b="1">
+                <a:solidFill>
+                  <a:srgbClr val="202122"/>
+                </a:solidFill>
+                <a:latin typeface="Calibri"/>
+              </a:rPr>
+              <a:t>1</a:t>
+            </a:r>
+          </a:p>
+        </p:txBody>
+      </p:sp>
+      <p:sp>
+        <p:nvSpPr>
+          <p:cNvPr id="8" name="TextBox 7"/>
           <p:cNvSpPr txBox="1"/>
           <p:nvPr/>
         </p:nvSpPr>
         <p:spPr>
           <a:xfrm>
-            <a:off x="6507327" y="1600200"/>
-            <a:ext cx="4907127" cy="640080"/>
+            <a:off x="1371600" y="1801368"/>
+            <a:ext cx="2509418" cy="512064"/>
           </a:xfrm>
           <a:prstGeom prst="rect">
             <a:avLst/>
@@ -6089,31 +7118,64 @@
           <a:p>
             <a:pPr algn="l"/>
             <a:r>
-              <a:rPr sz="2000" b="1" i="0">
-                <a:solidFill>
-                  <a:srgbClr val="FFFFFF"/>
-                </a:solidFill>
-                <a:latin typeface="Calibri"/>
-              </a:rPr>
-              <a:t>Ethical considerations</a:t>
-            </a:r>
-          </a:p>
-        </p:txBody>
-      </p:sp>
-      <p:sp>
-        <p:nvSpPr>
-          <p:cNvPr id="12" name="Rounded Rectangle 11"/>
+              <a:rPr sz="1700" b="1" i="0">
+                <a:solidFill>
+                  <a:srgbClr val="03306E"/>
+                </a:solidFill>
+                <a:latin typeface="Calibri"/>
+              </a:rPr>
+              <a:t>Intellectual property</a:t>
+            </a:r>
+          </a:p>
+        </p:txBody>
+      </p:sp>
+      <p:sp>
+        <p:nvSpPr>
+          <p:cNvPr id="9" name="TextBox 8"/>
+          <p:cNvSpPr txBox="1"/>
+          <p:nvPr/>
+        </p:nvSpPr>
+        <p:spPr>
+          <a:xfrm>
+            <a:off x="777240" y="2468880"/>
+            <a:ext cx="3058058" cy="1143000"/>
+          </a:xfrm>
+          <a:prstGeom prst="rect">
+            <a:avLst/>
+          </a:prstGeom>
+          <a:noFill/>
+        </p:spPr>
+        <p:txBody>
+          <a:bodyPr wrap="square" anchor="t" lIns="0" rIns="0" tIns="0" bIns="0"/>
+          <a:lstStyle/>
+          <a:p>
+            <a:pPr algn="l"/>
+            <a:r>
+              <a:rPr sz="2000" b="0" i="0">
+                <a:solidFill>
+                  <a:srgbClr val="202122"/>
+                </a:solidFill>
+                <a:latin typeface="Calibri"/>
+              </a:rPr>
+              <a:t>Rights, licences, copyright and patents.</a:t>
+            </a:r>
+          </a:p>
+        </p:txBody>
+      </p:sp>
+      <p:sp>
+        <p:nvSpPr>
+          <p:cNvPr id="10" name="Rounded Rectangle 9"/>
           <p:cNvSpPr/>
           <p:nvPr/>
         </p:nvSpPr>
         <p:spPr>
           <a:xfrm>
-            <a:off x="6278727" y="2377440"/>
-            <a:ext cx="5364327" cy="3794760"/>
+            <a:off x="4338218" y="1600200"/>
+            <a:ext cx="3515258" cy="2148840"/>
           </a:xfrm>
           <a:prstGeom prst="roundRect">
             <a:avLst>
-              <a:gd name="adj" fmla="val 4000"/>
+              <a:gd name="adj" fmla="val 6000"/>
             </a:avLst>
           </a:prstGeom>
           <a:solidFill>
@@ -6146,14 +7208,100 @@
       </p:sp>
       <p:sp>
         <p:nvSpPr>
+          <p:cNvPr id="11" name="Oval 10"/>
+          <p:cNvSpPr/>
+          <p:nvPr/>
+        </p:nvSpPr>
+        <p:spPr>
+          <a:xfrm>
+            <a:off x="4566818" y="1828800"/>
+            <a:ext cx="457200" cy="457200"/>
+          </a:xfrm>
+          <a:prstGeom prst="ellipse">
+            <a:avLst/>
+          </a:prstGeom>
+          <a:solidFill>
+            <a:srgbClr val="33C17A"/>
+          </a:solidFill>
+          <a:ln>
+            <a:noFill/>
+          </a:ln>
+          <a:effectLst/>
+        </p:spPr>
+        <p:style>
+          <a:lnRef idx="1">
+            <a:schemeClr val="accent1"/>
+          </a:lnRef>
+          <a:fillRef idx="3">
+            <a:schemeClr val="accent1"/>
+          </a:fillRef>
+          <a:effectRef idx="2">
+            <a:schemeClr val="accent1"/>
+          </a:effectRef>
+          <a:fontRef idx="minor">
+            <a:schemeClr val="lt1"/>
+          </a:fontRef>
+        </p:style>
+        <p:txBody>
+          <a:bodyPr rtlCol="0" anchor="ctr" lIns="0" rIns="0" tIns="0" bIns="0"/>
+          <a:lstStyle/>
+          <a:p>
+            <a:pPr algn="ctr"/>
+            <a:r>
+              <a:rPr sz="1500" b="1">
+                <a:solidFill>
+                  <a:srgbClr val="202122"/>
+                </a:solidFill>
+                <a:latin typeface="Calibri"/>
+              </a:rPr>
+              <a:t>2</a:t>
+            </a:r>
+          </a:p>
+        </p:txBody>
+      </p:sp>
+      <p:sp>
+        <p:nvSpPr>
+          <p:cNvPr id="12" name="TextBox 11"/>
+          <p:cNvSpPr txBox="1"/>
+          <p:nvPr/>
+        </p:nvSpPr>
+        <p:spPr>
+          <a:xfrm>
+            <a:off x="5161178" y="1801368"/>
+            <a:ext cx="2509418" cy="512064"/>
+          </a:xfrm>
+          <a:prstGeom prst="rect">
+            <a:avLst/>
+          </a:prstGeom>
+          <a:noFill/>
+        </p:spPr>
+        <p:txBody>
+          <a:bodyPr wrap="square" anchor="ctr" lIns="0" rIns="0" tIns="0" bIns="0"/>
+          <a:lstStyle/>
+          <a:p>
+            <a:pPr algn="l"/>
+            <a:r>
+              <a:rPr sz="1600" b="1" i="0">
+                <a:solidFill>
+                  <a:srgbClr val="03306E"/>
+                </a:solidFill>
+                <a:latin typeface="Calibri"/>
+              </a:rPr>
+              <a:t>Consumers and advertising</a:t>
+            </a:r>
+          </a:p>
+        </p:txBody>
+      </p:sp>
+      <p:sp>
+        <p:nvSpPr>
           <p:cNvPr id="13" name="TextBox 12"/>
           <p:cNvSpPr txBox="1"/>
           <p:nvPr/>
         </p:nvSpPr>
         <p:spPr>
           <a:xfrm>
-            <a:off x="6553047" y="2606040"/>
-            <a:ext cx="4815687" cy="3337560"/>
+            <a:off x="4566818" y="2468880"/>
+            <a:ext cx="3058058" cy="1143000"/>
           </a:xfrm>
           <a:prstGeom prst="rect">
             <a:avLst/>
@@ -6161,92 +7309,670 @@
           <a:noFill/>
         </p:spPr>
         <p:txBody>
-          <a:bodyPr wrap="square" lIns="0" rIns="0" tIns="0" bIns="0">
-            <a:spAutoFit/>
-          </a:bodyPr>
-          <a:lstStyle/>
-          <a:p>
-            <a:pPr marL="274320" indent="-274320">
-              <a:spcAft>
-                <a:spcPts val="990"/>
-              </a:spcAft>
-              <a:buClr>
-                <a:srgbClr val="0645AD"/>
-              </a:buClr>
-              <a:buFont typeface="Arial"/>
-              <a:buChar char="•"/>
-            </a:pPr>
-            <a:r>
-              <a:rPr sz="2200" b="0">
+          <a:bodyPr wrap="square" anchor="t" lIns="0" rIns="0" tIns="0" bIns="0"/>
+          <a:lstStyle/>
+          <a:p>
+            <a:pPr algn="l"/>
+            <a:r>
+              <a:rPr sz="2000" b="0" i="0">
                 <a:solidFill>
                   <a:srgbClr val="202122"/>
                 </a:solidFill>
                 <a:latin typeface="Calibri"/>
               </a:rPr>
-              <a:t>Code of conduct</a:t>
-            </a:r>
-          </a:p>
-          <a:p>
-            <a:pPr marL="274320" indent="-274320">
-              <a:spcAft>
-                <a:spcPts val="990"/>
-              </a:spcAft>
-              <a:buClr>
-                <a:srgbClr val="0645AD"/>
-              </a:buClr>
-              <a:buFont typeface="Arial"/>
-              <a:buChar char="•"/>
-            </a:pPr>
-            <a:r>
-              <a:rPr sz="2200" b="0">
+              <a:t>Consumer protection and advertising law.</a:t>
+            </a:r>
+          </a:p>
+        </p:txBody>
+      </p:sp>
+      <p:sp>
+        <p:nvSpPr>
+          <p:cNvPr id="14" name="Rounded Rectangle 13"/>
+          <p:cNvSpPr/>
+          <p:nvPr/>
+        </p:nvSpPr>
+        <p:spPr>
+          <a:xfrm>
+            <a:off x="8127796" y="1600200"/>
+            <a:ext cx="3515258" cy="2148840"/>
+          </a:xfrm>
+          <a:prstGeom prst="roundRect">
+            <a:avLst>
+              <a:gd name="adj" fmla="val 6000"/>
+            </a:avLst>
+          </a:prstGeom>
+          <a:solidFill>
+            <a:srgbClr val="EAF3FF"/>
+          </a:solidFill>
+          <a:ln>
+            <a:noFill/>
+          </a:ln>
+          <a:effectLst/>
+        </p:spPr>
+        <p:style>
+          <a:lnRef idx="1">
+            <a:schemeClr val="accent1"/>
+          </a:lnRef>
+          <a:fillRef idx="3">
+            <a:schemeClr val="accent1"/>
+          </a:fillRef>
+          <a:effectRef idx="2">
+            <a:schemeClr val="accent1"/>
+          </a:effectRef>
+          <a:fontRef idx="minor">
+            <a:schemeClr val="lt1"/>
+          </a:fontRef>
+        </p:style>
+        <p:txBody>
+          <a:bodyPr rtlCol="0" anchor="ctr"/>
+          <a:lstStyle/>
+          <a:p/>
+        </p:txBody>
+      </p:sp>
+      <p:sp>
+        <p:nvSpPr>
+          <p:cNvPr id="15" name="Oval 14"/>
+          <p:cNvSpPr/>
+          <p:nvPr/>
+        </p:nvSpPr>
+        <p:spPr>
+          <a:xfrm>
+            <a:off x="8356396" y="1828800"/>
+            <a:ext cx="457200" cy="457200"/>
+          </a:xfrm>
+          <a:prstGeom prst="ellipse">
+            <a:avLst/>
+          </a:prstGeom>
+          <a:solidFill>
+            <a:srgbClr val="33C17A"/>
+          </a:solidFill>
+          <a:ln>
+            <a:noFill/>
+          </a:ln>
+          <a:effectLst/>
+        </p:spPr>
+        <p:style>
+          <a:lnRef idx="1">
+            <a:schemeClr val="accent1"/>
+          </a:lnRef>
+          <a:fillRef idx="3">
+            <a:schemeClr val="accent1"/>
+          </a:fillRef>
+          <a:effectRef idx="2">
+            <a:schemeClr val="accent1"/>
+          </a:effectRef>
+          <a:fontRef idx="minor">
+            <a:schemeClr val="lt1"/>
+          </a:fontRef>
+        </p:style>
+        <p:txBody>
+          <a:bodyPr rtlCol="0" anchor="ctr" lIns="0" rIns="0" tIns="0" bIns="0"/>
+          <a:lstStyle/>
+          <a:p>
+            <a:pPr algn="ctr"/>
+            <a:r>
+              <a:rPr sz="1500" b="1">
                 <a:solidFill>
                   <a:srgbClr val="202122"/>
                 </a:solidFill>
                 <a:latin typeface="Calibri"/>
               </a:rPr>
-              <a:t>Professional practice</a:t>
-            </a:r>
-          </a:p>
-          <a:p>
-            <a:pPr marL="274320" indent="-274320">
-              <a:spcAft>
-                <a:spcPts val="990"/>
-              </a:spcAft>
-              <a:buClr>
-                <a:srgbClr val="0645AD"/>
-              </a:buClr>
-              <a:buFont typeface="Arial"/>
-              <a:buChar char="•"/>
-            </a:pPr>
-            <a:r>
-              <a:rPr sz="2200" b="0">
+              <a:t>3</a:t>
+            </a:r>
+          </a:p>
+        </p:txBody>
+      </p:sp>
+      <p:sp>
+        <p:nvSpPr>
+          <p:cNvPr id="16" name="TextBox 15"/>
+          <p:cNvSpPr txBox="1"/>
+          <p:nvPr/>
+        </p:nvSpPr>
+        <p:spPr>
+          <a:xfrm>
+            <a:off x="8950756" y="1801368"/>
+            <a:ext cx="2509418" cy="512064"/>
+          </a:xfrm>
+          <a:prstGeom prst="rect">
+            <a:avLst/>
+          </a:prstGeom>
+          <a:noFill/>
+        </p:spPr>
+        <p:txBody>
+          <a:bodyPr wrap="square" anchor="ctr" lIns="0" rIns="0" tIns="0" bIns="0"/>
+          <a:lstStyle/>
+          <a:p>
+            <a:pPr algn="l"/>
+            <a:r>
+              <a:rPr sz="1900" b="1" i="0">
+                <a:solidFill>
+                  <a:srgbClr val="03306E"/>
+                </a:solidFill>
+                <a:latin typeface="Calibri"/>
+              </a:rPr>
+              <a:t>Age and gambling</a:t>
+            </a:r>
+          </a:p>
+        </p:txBody>
+      </p:sp>
+      <p:sp>
+        <p:nvSpPr>
+          <p:cNvPr id="17" name="TextBox 16"/>
+          <p:cNvSpPr txBox="1"/>
+          <p:nvPr/>
+        </p:nvSpPr>
+        <p:spPr>
+          <a:xfrm>
+            <a:off x="8356396" y="2468880"/>
+            <a:ext cx="3058058" cy="1143000"/>
+          </a:xfrm>
+          <a:prstGeom prst="rect">
+            <a:avLst/>
+          </a:prstGeom>
+          <a:noFill/>
+        </p:spPr>
+        <p:txBody>
+          <a:bodyPr wrap="square" anchor="t" lIns="0" rIns="0" tIns="0" bIns="0"/>
+          <a:lstStyle/>
+          <a:p>
+            <a:pPr algn="l"/>
+            <a:r>
+              <a:rPr sz="2000" b="0" i="0">
                 <a:solidFill>
                   <a:srgbClr val="202122"/>
                 </a:solidFill>
                 <a:latin typeface="Calibri"/>
               </a:rPr>
-              <a:t>Software licensing</a:t>
-            </a:r>
-          </a:p>
-          <a:p>
-            <a:pPr marL="274320" indent="-274320">
-              <a:spcAft>
-                <a:spcPts val="990"/>
-              </a:spcAft>
-              <a:buClr>
-                <a:srgbClr val="0645AD"/>
-              </a:buClr>
-              <a:buFont typeface="Arial"/>
-              <a:buChar char="•"/>
-            </a:pPr>
-            <a:r>
-              <a:rPr sz="2200" b="0">
+              <a:t>Age ratings and gambling legislation.</a:t>
+            </a:r>
+          </a:p>
+        </p:txBody>
+      </p:sp>
+      <p:sp>
+        <p:nvSpPr>
+          <p:cNvPr id="18" name="Rounded Rectangle 17"/>
+          <p:cNvSpPr/>
+          <p:nvPr/>
+        </p:nvSpPr>
+        <p:spPr>
+          <a:xfrm>
+            <a:off x="548640" y="4023360"/>
+            <a:ext cx="3515258" cy="2148840"/>
+          </a:xfrm>
+          <a:prstGeom prst="roundRect">
+            <a:avLst>
+              <a:gd name="adj" fmla="val 6000"/>
+            </a:avLst>
+          </a:prstGeom>
+          <a:solidFill>
+            <a:srgbClr val="EAF3FF"/>
+          </a:solidFill>
+          <a:ln>
+            <a:noFill/>
+          </a:ln>
+          <a:effectLst/>
+        </p:spPr>
+        <p:style>
+          <a:lnRef idx="1">
+            <a:schemeClr val="accent1"/>
+          </a:lnRef>
+          <a:fillRef idx="3">
+            <a:schemeClr val="accent1"/>
+          </a:fillRef>
+          <a:effectRef idx="2">
+            <a:schemeClr val="accent1"/>
+          </a:effectRef>
+          <a:fontRef idx="minor">
+            <a:schemeClr val="lt1"/>
+          </a:fontRef>
+        </p:style>
+        <p:txBody>
+          <a:bodyPr rtlCol="0" anchor="ctr"/>
+          <a:lstStyle/>
+          <a:p/>
+        </p:txBody>
+      </p:sp>
+      <p:sp>
+        <p:nvSpPr>
+          <p:cNvPr id="19" name="Oval 18"/>
+          <p:cNvSpPr/>
+          <p:nvPr/>
+        </p:nvSpPr>
+        <p:spPr>
+          <a:xfrm>
+            <a:off x="777240" y="4251960"/>
+            <a:ext cx="457200" cy="457200"/>
+          </a:xfrm>
+          <a:prstGeom prst="ellipse">
+            <a:avLst/>
+          </a:prstGeom>
+          <a:solidFill>
+            <a:srgbClr val="33C17A"/>
+          </a:solidFill>
+          <a:ln>
+            <a:noFill/>
+          </a:ln>
+          <a:effectLst/>
+        </p:spPr>
+        <p:style>
+          <a:lnRef idx="1">
+            <a:schemeClr val="accent1"/>
+          </a:lnRef>
+          <a:fillRef idx="3">
+            <a:schemeClr val="accent1"/>
+          </a:fillRef>
+          <a:effectRef idx="2">
+            <a:schemeClr val="accent1"/>
+          </a:effectRef>
+          <a:fontRef idx="minor">
+            <a:schemeClr val="lt1"/>
+          </a:fontRef>
+        </p:style>
+        <p:txBody>
+          <a:bodyPr rtlCol="0" anchor="ctr" lIns="0" rIns="0" tIns="0" bIns="0"/>
+          <a:lstStyle/>
+          <a:p>
+            <a:pPr algn="ctr"/>
+            <a:r>
+              <a:rPr sz="1500" b="1">
                 <a:solidFill>
                   <a:srgbClr val="202122"/>
                 </a:solidFill>
                 <a:latin typeface="Calibri"/>
               </a:rPr>
-              <a:t>Inclusion and diversity</a:t>
+              <a:t>4</a:t>
+            </a:r>
+          </a:p>
+        </p:txBody>
+      </p:sp>
+      <p:sp>
+        <p:nvSpPr>
+          <p:cNvPr id="20" name="TextBox 19"/>
+          <p:cNvSpPr txBox="1"/>
+          <p:nvPr/>
+        </p:nvSpPr>
+        <p:spPr>
+          <a:xfrm>
+            <a:off x="1371600" y="4224528"/>
+            <a:ext cx="2509418" cy="512064"/>
+          </a:xfrm>
+          <a:prstGeom prst="rect">
+            <a:avLst/>
+          </a:prstGeom>
+          <a:noFill/>
+        </p:spPr>
+        <p:txBody>
+          <a:bodyPr wrap="square" anchor="ctr" lIns="0" rIns="0" tIns="0" bIns="0"/>
+          <a:lstStyle/>
+          <a:p>
+            <a:pPr algn="l"/>
+            <a:r>
+              <a:rPr sz="1900" b="1" i="0">
+                <a:solidFill>
+                  <a:srgbClr val="03306E"/>
+                </a:solidFill>
+                <a:latin typeface="Calibri"/>
+              </a:rPr>
+              <a:t>Data</a:t>
+            </a:r>
+          </a:p>
+        </p:txBody>
+      </p:sp>
+      <p:sp>
+        <p:nvSpPr>
+          <p:cNvPr id="21" name="TextBox 20"/>
+          <p:cNvSpPr txBox="1"/>
+          <p:nvPr/>
+        </p:nvSpPr>
+        <p:spPr>
+          <a:xfrm>
+            <a:off x="777240" y="4892040"/>
+            <a:ext cx="3058058" cy="1143000"/>
+          </a:xfrm>
+          <a:prstGeom prst="rect">
+            <a:avLst/>
+          </a:prstGeom>
+          <a:noFill/>
+        </p:spPr>
+        <p:txBody>
+          <a:bodyPr wrap="square" anchor="t" lIns="0" rIns="0" tIns="0" bIns="0"/>
+          <a:lstStyle/>
+          <a:p>
+            <a:pPr algn="l"/>
+            <a:r>
+              <a:rPr sz="2000" b="0" i="0">
+                <a:solidFill>
+                  <a:srgbClr val="202122"/>
+                </a:solidFill>
+                <a:latin typeface="Calibri"/>
+              </a:rPr>
+              <a:t>Data protection, privacy and system security.</a:t>
+            </a:r>
+          </a:p>
+        </p:txBody>
+      </p:sp>
+      <p:sp>
+        <p:nvSpPr>
+          <p:cNvPr id="22" name="Rounded Rectangle 21"/>
+          <p:cNvSpPr/>
+          <p:nvPr/>
+        </p:nvSpPr>
+        <p:spPr>
+          <a:xfrm>
+            <a:off x="4338218" y="4023360"/>
+            <a:ext cx="3515258" cy="2148840"/>
+          </a:xfrm>
+          <a:prstGeom prst="roundRect">
+            <a:avLst>
+              <a:gd name="adj" fmla="val 6000"/>
+            </a:avLst>
+          </a:prstGeom>
+          <a:solidFill>
+            <a:srgbClr val="EAF3FF"/>
+          </a:solidFill>
+          <a:ln>
+            <a:noFill/>
+          </a:ln>
+          <a:effectLst/>
+        </p:spPr>
+        <p:style>
+          <a:lnRef idx="1">
+            <a:schemeClr val="accent1"/>
+          </a:lnRef>
+          <a:fillRef idx="3">
+            <a:schemeClr val="accent1"/>
+          </a:fillRef>
+          <a:effectRef idx="2">
+            <a:schemeClr val="accent1"/>
+          </a:effectRef>
+          <a:fontRef idx="minor">
+            <a:schemeClr val="lt1"/>
+          </a:fontRef>
+        </p:style>
+        <p:txBody>
+          <a:bodyPr rtlCol="0" anchor="ctr"/>
+          <a:lstStyle/>
+          <a:p/>
+        </p:txBody>
+      </p:sp>
+      <p:sp>
+        <p:nvSpPr>
+          <p:cNvPr id="23" name="Oval 22"/>
+          <p:cNvSpPr/>
+          <p:nvPr/>
+        </p:nvSpPr>
+        <p:spPr>
+          <a:xfrm>
+            <a:off x="4566818" y="4251960"/>
+            <a:ext cx="457200" cy="457200"/>
+          </a:xfrm>
+          <a:prstGeom prst="ellipse">
+            <a:avLst/>
+          </a:prstGeom>
+          <a:solidFill>
+            <a:srgbClr val="33C17A"/>
+          </a:solidFill>
+          <a:ln>
+            <a:noFill/>
+          </a:ln>
+          <a:effectLst/>
+        </p:spPr>
+        <p:style>
+          <a:lnRef idx="1">
+            <a:schemeClr val="accent1"/>
+          </a:lnRef>
+          <a:fillRef idx="3">
+            <a:schemeClr val="accent1"/>
+          </a:fillRef>
+          <a:effectRef idx="2">
+            <a:schemeClr val="accent1"/>
+          </a:effectRef>
+          <a:fontRef idx="minor">
+            <a:schemeClr val="lt1"/>
+          </a:fontRef>
+        </p:style>
+        <p:txBody>
+          <a:bodyPr rtlCol="0" anchor="ctr" lIns="0" rIns="0" tIns="0" bIns="0"/>
+          <a:lstStyle/>
+          <a:p>
+            <a:pPr algn="ctr"/>
+            <a:r>
+              <a:rPr sz="1500" b="1">
+                <a:solidFill>
+                  <a:srgbClr val="202122"/>
+                </a:solidFill>
+                <a:latin typeface="Calibri"/>
+              </a:rPr>
+              <a:t>5</a:t>
+            </a:r>
+          </a:p>
+        </p:txBody>
+      </p:sp>
+      <p:sp>
+        <p:nvSpPr>
+          <p:cNvPr id="24" name="TextBox 23"/>
+          <p:cNvSpPr txBox="1"/>
+          <p:nvPr/>
+        </p:nvSpPr>
+        <p:spPr>
+          <a:xfrm>
+            <a:off x="5161178" y="4224528"/>
+            <a:ext cx="2509418" cy="512064"/>
+          </a:xfrm>
+          <a:prstGeom prst="rect">
+            <a:avLst/>
+          </a:prstGeom>
+          <a:noFill/>
+        </p:spPr>
+        <p:txBody>
+          <a:bodyPr wrap="square" anchor="ctr" lIns="0" rIns="0" tIns="0" bIns="0"/>
+          <a:lstStyle/>
+          <a:p>
+            <a:pPr algn="l"/>
+            <a:r>
+              <a:rPr sz="1900" b="1" i="0">
+                <a:solidFill>
+                  <a:srgbClr val="03306E"/>
+                </a:solidFill>
+                <a:latin typeface="Calibri"/>
+              </a:rPr>
+              <a:t>People</a:t>
+            </a:r>
+          </a:p>
+        </p:txBody>
+      </p:sp>
+      <p:sp>
+        <p:nvSpPr>
+          <p:cNvPr id="25" name="TextBox 24"/>
+          <p:cNvSpPr txBox="1"/>
+          <p:nvPr/>
+        </p:nvSpPr>
+        <p:spPr>
+          <a:xfrm>
+            <a:off x="4566818" y="4892040"/>
+            <a:ext cx="3058058" cy="1143000"/>
+          </a:xfrm>
+          <a:prstGeom prst="rect">
+            <a:avLst/>
+          </a:prstGeom>
+          <a:noFill/>
+        </p:spPr>
+        <p:txBody>
+          <a:bodyPr wrap="square" anchor="t" lIns="0" rIns="0" tIns="0" bIns="0"/>
+          <a:lstStyle/>
+          <a:p>
+            <a:pPr algn="l"/>
+            <a:r>
+              <a:rPr sz="2000" b="0" i="0">
+                <a:solidFill>
+                  <a:srgbClr val="202122"/>
+                </a:solidFill>
+                <a:latin typeface="Calibri"/>
+              </a:rPr>
+              <a:t>Staff responsibilities, equality and diversity.</a:t>
+            </a:r>
+          </a:p>
+        </p:txBody>
+      </p:sp>
+      <p:sp>
+        <p:nvSpPr>
+          <p:cNvPr id="26" name="Rounded Rectangle 25"/>
+          <p:cNvSpPr/>
+          <p:nvPr/>
+        </p:nvSpPr>
+        <p:spPr>
+          <a:xfrm>
+            <a:off x="8127796" y="4023360"/>
+            <a:ext cx="3515258" cy="2148840"/>
+          </a:xfrm>
+          <a:prstGeom prst="roundRect">
+            <a:avLst>
+              <a:gd name="adj" fmla="val 6000"/>
+            </a:avLst>
+          </a:prstGeom>
+          <a:solidFill>
+            <a:srgbClr val="EAF3FF"/>
+          </a:solidFill>
+          <a:ln>
+            <a:noFill/>
+          </a:ln>
+          <a:effectLst/>
+        </p:spPr>
+        <p:style>
+          <a:lnRef idx="1">
+            <a:schemeClr val="accent1"/>
+          </a:lnRef>
+          <a:fillRef idx="3">
+            <a:schemeClr val="accent1"/>
+          </a:fillRef>
+          <a:effectRef idx="2">
+            <a:schemeClr val="accent1"/>
+          </a:effectRef>
+          <a:fontRef idx="minor">
+            <a:schemeClr val="lt1"/>
+          </a:fontRef>
+        </p:style>
+        <p:txBody>
+          <a:bodyPr rtlCol="0" anchor="ctr"/>
+          <a:lstStyle/>
+          <a:p/>
+        </p:txBody>
+      </p:sp>
+      <p:sp>
+        <p:nvSpPr>
+          <p:cNvPr id="27" name="Oval 26"/>
+          <p:cNvSpPr/>
+          <p:nvPr/>
+        </p:nvSpPr>
+        <p:spPr>
+          <a:xfrm>
+            <a:off x="8356396" y="4251960"/>
+            <a:ext cx="457200" cy="457200"/>
+          </a:xfrm>
+          <a:prstGeom prst="ellipse">
+            <a:avLst/>
+          </a:prstGeom>
+          <a:solidFill>
+            <a:srgbClr val="33C17A"/>
+          </a:solidFill>
+          <a:ln>
+            <a:noFill/>
+          </a:ln>
+          <a:effectLst/>
+        </p:spPr>
+        <p:style>
+          <a:lnRef idx="1">
+            <a:schemeClr val="accent1"/>
+          </a:lnRef>
+          <a:fillRef idx="3">
+            <a:schemeClr val="accent1"/>
+          </a:fillRef>
+          <a:effectRef idx="2">
+            <a:schemeClr val="accent1"/>
+          </a:effectRef>
+          <a:fontRef idx="minor">
+            <a:schemeClr val="lt1"/>
+          </a:fontRef>
+        </p:style>
+        <p:txBody>
+          <a:bodyPr rtlCol="0" anchor="ctr" lIns="0" rIns="0" tIns="0" bIns="0"/>
+          <a:lstStyle/>
+          <a:p>
+            <a:pPr algn="ctr"/>
+            <a:r>
+              <a:rPr sz="1500" b="1">
+                <a:solidFill>
+                  <a:srgbClr val="202122"/>
+                </a:solidFill>
+                <a:latin typeface="Calibri"/>
+              </a:rPr>
+              <a:t>6</a:t>
+            </a:r>
+          </a:p>
+        </p:txBody>
+      </p:sp>
+      <p:sp>
+        <p:nvSpPr>
+          <p:cNvPr id="28" name="TextBox 27"/>
+          <p:cNvSpPr txBox="1"/>
+          <p:nvPr/>
+        </p:nvSpPr>
+        <p:spPr>
+          <a:xfrm>
+            <a:off x="8950756" y="4224528"/>
+            <a:ext cx="2509418" cy="512064"/>
+          </a:xfrm>
+          <a:prstGeom prst="rect">
+            <a:avLst/>
+          </a:prstGeom>
+          <a:noFill/>
+        </p:spPr>
+        <p:txBody>
+          <a:bodyPr wrap="square" anchor="ctr" lIns="0" rIns="0" tIns="0" bIns="0"/>
+          <a:lstStyle/>
+          <a:p>
+            <a:pPr algn="l"/>
+            <a:r>
+              <a:rPr sz="1900" b="1" i="0">
+                <a:solidFill>
+                  <a:srgbClr val="03306E"/>
+                </a:solidFill>
+                <a:latin typeface="Calibri"/>
+              </a:rPr>
+              <a:t>Territory</a:t>
+            </a:r>
+          </a:p>
+        </p:txBody>
+      </p:sp>
+      <p:sp>
+        <p:nvSpPr>
+          <p:cNvPr id="29" name="TextBox 28"/>
+          <p:cNvSpPr txBox="1"/>
+          <p:nvPr/>
+        </p:nvSpPr>
+        <p:spPr>
+          <a:xfrm>
+            <a:off x="8356396" y="4892040"/>
+            <a:ext cx="3058058" cy="1143000"/>
+          </a:xfrm>
+          <a:prstGeom prst="rect">
+            <a:avLst/>
+          </a:prstGeom>
+          <a:noFill/>
+        </p:spPr>
+        <p:txBody>
+          <a:bodyPr wrap="square" anchor="t" lIns="0" rIns="0" tIns="0" bIns="0"/>
+          <a:lstStyle/>
+          <a:p>
+            <a:pPr algn="l"/>
+            <a:r>
+              <a:rPr sz="2000" b="0" i="0">
+                <a:solidFill>
+                  <a:srgbClr val="202122"/>
+                </a:solidFill>
+                <a:latin typeface="Calibri"/>
+              </a:rPr>
+              <a:t>Territorial restrictions on where software can be sold.</a:t>
             </a:r>
           </a:p>
         </p:txBody>
@@ -6338,7 +8064,7 @@
                 </a:solidFill>
                 <a:latin typeface="Cambria"/>
               </a:rPr>
-              <a:t>Check your understanding</a:t>
+              <a:t>Quick check: Legal and regulatory considerations</a:t>
             </a:r>
           </a:p>
         </p:txBody>
@@ -6417,8 +8143,8 @@
         </p:nvSpPr>
         <p:spPr>
           <a:xfrm>
-            <a:off x="548640" y="1618488"/>
-            <a:ext cx="411480" cy="411480"/>
+            <a:off x="548640" y="1691640"/>
+            <a:ext cx="502920" cy="502920"/>
           </a:xfrm>
           <a:prstGeom prst="ellipse">
             <a:avLst/>
@@ -6451,7 +8177,7 @@
           <a:p>
             <a:pPr algn="ctr"/>
             <a:r>
-              <a:rPr sz="1400" b="1">
+              <a:rPr sz="1600" b="1">
                 <a:solidFill>
                   <a:srgbClr val="202122"/>
                 </a:solidFill>
@@ -6470,8 +8196,8 @@
         </p:nvSpPr>
         <p:spPr>
           <a:xfrm>
-            <a:off x="1234440" y="1600200"/>
-            <a:ext cx="10408615" cy="1429512"/>
+            <a:off x="1371600" y="1645920"/>
+            <a:ext cx="10271455" cy="1188720"/>
           </a:xfrm>
           <a:prstGeom prst="rect">
             <a:avLst/>
@@ -6484,13 +8210,13 @@
           <a:p>
             <a:pPr algn="l"/>
             <a:r>
-              <a:rPr sz="2200" b="0" i="0">
+              <a:rPr sz="2400" b="0" i="0">
                 <a:solidFill>
                   <a:srgbClr val="202122"/>
                 </a:solidFill>
                 <a:latin typeface="Calibri"/>
               </a:rPr>
-              <a:t>Which laws might apply to loot boxes in games?</a:t>
+              <a:t>Which laws might apply to loot boxes?</a:t>
             </a:r>
           </a:p>
         </p:txBody>
@@ -6503,8 +8229,8 @@
         </p:nvSpPr>
         <p:spPr>
           <a:xfrm>
-            <a:off x="548640" y="3212592"/>
-            <a:ext cx="411480" cy="411480"/>
+            <a:off x="548640" y="3108960"/>
+            <a:ext cx="502920" cy="502920"/>
           </a:xfrm>
           <a:prstGeom prst="ellipse">
             <a:avLst/>
@@ -6537,7 +8263,7 @@
           <a:p>
             <a:pPr algn="ctr"/>
             <a:r>
-              <a:rPr sz="1400" b="1">
+              <a:rPr sz="1600" b="1">
                 <a:solidFill>
                   <a:srgbClr val="202122"/>
                 </a:solidFill>
@@ -6556,8 +8282,8 @@
         </p:nvSpPr>
         <p:spPr>
           <a:xfrm>
-            <a:off x="1234440" y="3194304"/>
-            <a:ext cx="10408615" cy="1429512"/>
+            <a:off x="1371600" y="3063240"/>
+            <a:ext cx="10271455" cy="1188720"/>
           </a:xfrm>
           <a:prstGeom prst="rect">
             <a:avLst/>
@@ -6570,13 +8296,13 @@
           <a:p>
             <a:pPr algn="l"/>
             <a:r>
-              <a:rPr sz="2200" b="0" i="0">
+              <a:rPr sz="2400" b="0" i="0">
                 <a:solidFill>
                   <a:srgbClr val="202122"/>
                 </a:solidFill>
                 <a:latin typeface="Calibri"/>
               </a:rPr>
-              <a:t>What does W3C set standards for?</a:t>
+              <a:t>Why do territorial restrictions matter?</a:t>
             </a:r>
           </a:p>
         </p:txBody>
@@ -6589,8 +8315,8 @@
         </p:nvSpPr>
         <p:spPr>
           <a:xfrm>
-            <a:off x="548640" y="4806695"/>
-            <a:ext cx="411480" cy="411480"/>
+            <a:off x="548640" y="4526280"/>
+            <a:ext cx="502920" cy="502920"/>
           </a:xfrm>
           <a:prstGeom prst="ellipse">
             <a:avLst/>
@@ -6623,7 +8349,7 @@
           <a:p>
             <a:pPr algn="ctr"/>
             <a:r>
-              <a:rPr sz="1400" b="1">
+              <a:rPr sz="1600" b="1">
                 <a:solidFill>
                   <a:srgbClr val="202122"/>
                 </a:solidFill>
@@ -6642,8 +8368,8 @@
         </p:nvSpPr>
         <p:spPr>
           <a:xfrm>
-            <a:off x="1234440" y="4788408"/>
-            <a:ext cx="10408615" cy="1429512"/>
+            <a:off x="1371600" y="4480560"/>
+            <a:ext cx="10271455" cy="1188720"/>
           </a:xfrm>
           <a:prstGeom prst="rect">
             <a:avLst/>
@@ -6656,13 +8382,46 @@
           <a:p>
             <a:pPr algn="l"/>
             <a:r>
-              <a:rPr sz="2200" b="0" i="0">
+              <a:rPr sz="2400" b="0" i="0">
                 <a:solidFill>
                   <a:srgbClr val="202122"/>
                 </a:solidFill>
                 <a:latin typeface="Calibri"/>
               </a:rPr>
-              <a:t>Why do software licences matter?</a:t>
+              <a:t>Name two legal areas for a health app.</a:t>
+            </a:r>
+          </a:p>
+        </p:txBody>
+      </p:sp>
+      <p:sp>
+        <p:nvSpPr>
+          <p:cNvPr id="12" name="TextBox 11"/>
+          <p:cNvSpPr txBox="1"/>
+          <p:nvPr/>
+        </p:nvSpPr>
+        <p:spPr>
+          <a:xfrm>
+            <a:off x="548640" y="5852160"/>
+            <a:ext cx="11094415" cy="365760"/>
+          </a:xfrm>
+          <a:prstGeom prst="rect">
+            <a:avLst/>
+          </a:prstGeom>
+          <a:noFill/>
+        </p:spPr>
+        <p:txBody>
+          <a:bodyPr wrap="square" anchor="t" lIns="0" rIns="0" tIns="0" bIns="0"/>
+          <a:lstStyle/>
+          <a:p>
+            <a:pPr algn="l"/>
+            <a:r>
+              <a:rPr sz="1300" b="0" i="1">
+                <a:solidFill>
+                  <a:srgbClr val="54595D"/>
+                </a:solidFill>
+                <a:latin typeface="Calibri"/>
+              </a:rPr>
+              <a:t>Answer on mini whiteboards or in your book. Answers are in the speaker notes.</a:t>
             </a:r>
           </a:p>
         </p:txBody>
@@ -6754,7 +8513,7 @@
                 </a:solidFill>
                 <a:latin typeface="Cambria"/>
               </a:rPr>
-              <a:t>Answers</a:t>
+              <a:t>Standards and ethics</a:t>
             </a:r>
           </a:p>
         </p:txBody>
@@ -6827,14 +8586,138 @@
       </p:sp>
       <p:sp>
         <p:nvSpPr>
-          <p:cNvPr id="6" name="Oval 5"/>
+          <p:cNvPr id="6" name="TextBox 5"/>
+          <p:cNvSpPr txBox="1"/>
+          <p:nvPr/>
+        </p:nvSpPr>
+        <p:spPr>
+          <a:xfrm>
+            <a:off x="548640" y="1554480"/>
+            <a:ext cx="6720840" cy="4617720"/>
+          </a:xfrm>
+          <a:prstGeom prst="rect">
+            <a:avLst/>
+          </a:prstGeom>
+          <a:noFill/>
+        </p:spPr>
+        <p:txBody>
+          <a:bodyPr wrap="square" lIns="0" rIns="0" tIns="0" bIns="0">
+            <a:spAutoFit/>
+          </a:bodyPr>
+          <a:lstStyle/>
+          <a:p>
+            <a:pPr>
+              <a:spcAft>
+                <a:spcPts val="1260"/>
+              </a:spcAft>
+            </a:pPr>
+            <a:r>
+              <a:rPr sz="2100" b="0">
+                <a:solidFill>
+                  <a:srgbClr val="202122"/>
+                </a:solidFill>
+                <a:latin typeface="Calibri"/>
+              </a:rPr>
+              <a:t>Standards guide how software is built. ISO/IEC/IEEE 90003:2018 gives guidance on applying quality management to software engineering. W3C sets web standards, so sites work across browsers and devices.</a:t>
+            </a:r>
+          </a:p>
+          <a:p>
+            <a:pPr>
+              <a:spcAft>
+                <a:spcPts val="1260"/>
+              </a:spcAft>
+            </a:pPr>
+            <a:r>
+              <a:rPr sz="2100" b="1">
+                <a:solidFill>
+                  <a:srgbClr val="202122"/>
+                </a:solidFill>
+                <a:latin typeface="Calibri"/>
+              </a:rPr>
+              <a:t>Ethics goes beyond the law:</a:t>
+            </a:r>
+            <a:r>
+              <a:rPr sz="2100" b="0">
+                <a:solidFill>
+                  <a:srgbClr val="202122"/>
+                </a:solidFill>
+                <a:latin typeface="Calibri"/>
+              </a:rPr>
+              <a:t> following a professional code of conduct, working professionally, respecting software licences (for example open-source licence terms) and designing for inclusion and diversity.</a:t>
+            </a:r>
+          </a:p>
+          <a:p>
+            <a:pPr>
+              <a:spcAft>
+                <a:spcPts val="1260"/>
+              </a:spcAft>
+            </a:pPr>
+            <a:r>
+              <a:rPr sz="2100" b="0">
+                <a:solidFill>
+                  <a:srgbClr val="202122"/>
+                </a:solidFill>
+                <a:latin typeface="Calibri"/>
+              </a:rPr>
+              <a:t>Something can be legal but still unethical, such as a design that tricks users into subscriptions.</a:t>
+            </a:r>
+          </a:p>
+        </p:txBody>
+      </p:sp>
+      <p:sp>
+        <p:nvSpPr>
+          <p:cNvPr id="7" name="Rounded Rectangle 6"/>
           <p:cNvSpPr/>
           <p:nvPr/>
         </p:nvSpPr>
         <p:spPr>
           <a:xfrm>
-            <a:off x="548640" y="1618488"/>
-            <a:ext cx="411480" cy="411480"/>
+            <a:off x="7772400" y="1554480"/>
+            <a:ext cx="3867912" cy="4526280"/>
+          </a:xfrm>
+          <a:prstGeom prst="roundRect">
+            <a:avLst>
+              <a:gd name="adj" fmla="val 8000"/>
+            </a:avLst>
+          </a:prstGeom>
+          <a:solidFill>
+            <a:srgbClr val="03306E"/>
+          </a:solidFill>
+          <a:ln>
+            <a:noFill/>
+          </a:ln>
+          <a:effectLst/>
+        </p:spPr>
+        <p:style>
+          <a:lnRef idx="1">
+            <a:schemeClr val="accent1"/>
+          </a:lnRef>
+          <a:fillRef idx="3">
+            <a:schemeClr val="accent1"/>
+          </a:fillRef>
+          <a:effectRef idx="2">
+            <a:schemeClr val="accent1"/>
+          </a:effectRef>
+          <a:fontRef idx="minor">
+            <a:schemeClr val="lt1"/>
+          </a:fontRef>
+        </p:style>
+        <p:txBody>
+          <a:bodyPr rtlCol="0" anchor="ctr"/>
+          <a:lstStyle/>
+          <a:p/>
+        </p:txBody>
+      </p:sp>
+      <p:sp>
+        <p:nvSpPr>
+          <p:cNvPr id="8" name="Oval 7"/>
+          <p:cNvSpPr/>
+          <p:nvPr/>
+        </p:nvSpPr>
+        <p:spPr>
+          <a:xfrm>
+            <a:off x="8046720" y="1828800"/>
+            <a:ext cx="548640" cy="548640"/>
           </a:xfrm>
           <a:prstGeom prst="ellipse">
             <a:avLst/>
@@ -6867,110 +8750,13 @@
           <a:p>
             <a:pPr algn="ctr"/>
             <a:r>
-              <a:rPr sz="1400" b="1">
+              <a:rPr sz="1300" b="1">
                 <a:solidFill>
                   <a:srgbClr val="202122"/>
                 </a:solidFill>
                 <a:latin typeface="Calibri"/>
               </a:rPr>
-              <a:t>1</a:t>
-            </a:r>
-          </a:p>
-        </p:txBody>
-      </p:sp>
-      <p:sp>
-        <p:nvSpPr>
-          <p:cNvPr id="7" name="TextBox 6"/>
-          <p:cNvSpPr txBox="1"/>
-          <p:nvPr/>
-        </p:nvSpPr>
-        <p:spPr>
-          <a:xfrm>
-            <a:off x="1234440" y="1600200"/>
-            <a:ext cx="10408615" cy="1429512"/>
-          </a:xfrm>
-          <a:prstGeom prst="rect">
-            <a:avLst/>
-          </a:prstGeom>
-          <a:noFill/>
-        </p:spPr>
-        <p:txBody>
-          <a:bodyPr wrap="square" anchor="t" lIns="0" rIns="0" tIns="0" bIns="0"/>
-          <a:lstStyle/>
-          <a:p>
-            <a:pPr algn="l"/>
-            <a:r>
-              <a:rPr sz="1800" b="0" i="0">
-                <a:solidFill>
-                  <a:srgbClr val="54595D"/>
-                </a:solidFill>
-                <a:latin typeface="Calibri"/>
-              </a:rPr>
-              <a:t>Which laws might apply to loot boxes in games?</a:t>
-            </a:r>
-          </a:p>
-          <a:p>
-            <a:r>
-              <a:rPr sz="1800" b="1">
-                <a:solidFill>
-                  <a:srgbClr val="03306E"/>
-                </a:solidFill>
-                <a:latin typeface="Calibri"/>
-              </a:rPr>
-              <a:t>Gambling legislation and consumer protection.</a:t>
-            </a:r>
-          </a:p>
-        </p:txBody>
-      </p:sp>
-      <p:sp>
-        <p:nvSpPr>
-          <p:cNvPr id="8" name="Oval 7"/>
-          <p:cNvSpPr/>
-          <p:nvPr/>
-        </p:nvSpPr>
-        <p:spPr>
-          <a:xfrm>
-            <a:off x="548640" y="3212592"/>
-            <a:ext cx="411480" cy="411480"/>
-          </a:xfrm>
-          <a:prstGeom prst="ellipse">
-            <a:avLst/>
-          </a:prstGeom>
-          <a:solidFill>
-            <a:srgbClr val="33C17A"/>
-          </a:solidFill>
-          <a:ln>
-            <a:noFill/>
-          </a:ln>
-          <a:effectLst/>
-        </p:spPr>
-        <p:style>
-          <a:lnRef idx="1">
-            <a:schemeClr val="accent1"/>
-          </a:lnRef>
-          <a:fillRef idx="3">
-            <a:schemeClr val="accent1"/>
-          </a:fillRef>
-          <a:effectRef idx="2">
-            <a:schemeClr val="accent1"/>
-          </a:effectRef>
-          <a:fontRef idx="minor">
-            <a:schemeClr val="lt1"/>
-          </a:fontRef>
-        </p:style>
-        <p:txBody>
-          <a:bodyPr rtlCol="0" anchor="ctr" lIns="0" rIns="0" tIns="0" bIns="0"/>
-          <a:lstStyle/>
-          <a:p>
-            <a:pPr algn="ctr"/>
-            <a:r>
-              <a:rPr sz="1400" b="1">
-                <a:solidFill>
-                  <a:srgbClr val="202122"/>
-                </a:solidFill>
-                <a:latin typeface="Calibri"/>
-              </a:rPr>
-              <a:t>2</a:t>
+              <a:t>e.g.</a:t>
             </a:r>
           </a:p>
         </p:txBody>
@@ -6983,8 +8769,8 @@
         </p:nvSpPr>
         <p:spPr>
           <a:xfrm>
-            <a:off x="1234440" y="3194304"/>
-            <a:ext cx="10408615" cy="1429512"/>
+            <a:off x="8046720" y="2560320"/>
+            <a:ext cx="3291840" cy="365760"/>
           </a:xfrm>
           <a:prstGeom prst="rect">
             <a:avLst/>
@@ -6997,91 +8783,27 @@
           <a:p>
             <a:pPr algn="l"/>
             <a:r>
-              <a:rPr sz="1800" b="0" i="0">
-                <a:solidFill>
-                  <a:srgbClr val="54595D"/>
-                </a:solidFill>
-                <a:latin typeface="Calibri"/>
-              </a:rPr>
-              <a:t>What does W3C set standards for?</a:t>
-            </a:r>
-          </a:p>
-          <a:p>
-            <a:r>
-              <a:rPr sz="1800" b="1">
-                <a:solidFill>
-                  <a:srgbClr val="03306E"/>
-                </a:solidFill>
-                <a:latin typeface="Calibri"/>
-              </a:rPr>
-              <a:t>The web.</a:t>
-            </a:r>
-          </a:p>
-        </p:txBody>
-      </p:sp>
-      <p:sp>
-        <p:nvSpPr>
-          <p:cNvPr id="10" name="Oval 9"/>
-          <p:cNvSpPr/>
-          <p:nvPr/>
-        </p:nvSpPr>
-        <p:spPr>
-          <a:xfrm>
-            <a:off x="548640" y="4806695"/>
-            <a:ext cx="411480" cy="411480"/>
-          </a:xfrm>
-          <a:prstGeom prst="ellipse">
-            <a:avLst/>
-          </a:prstGeom>
-          <a:solidFill>
-            <a:srgbClr val="33C17A"/>
-          </a:solidFill>
-          <a:ln>
-            <a:noFill/>
-          </a:ln>
-          <a:effectLst/>
-        </p:spPr>
-        <p:style>
-          <a:lnRef idx="1">
-            <a:schemeClr val="accent1"/>
-          </a:lnRef>
-          <a:fillRef idx="3">
-            <a:schemeClr val="accent1"/>
-          </a:fillRef>
-          <a:effectRef idx="2">
-            <a:schemeClr val="accent1"/>
-          </a:effectRef>
-          <a:fontRef idx="minor">
-            <a:schemeClr val="lt1"/>
-          </a:fontRef>
-        </p:style>
-        <p:txBody>
-          <a:bodyPr rtlCol="0" anchor="ctr" lIns="0" rIns="0" tIns="0" bIns="0"/>
-          <a:lstStyle/>
-          <a:p>
-            <a:pPr algn="ctr"/>
-            <a:r>
-              <a:rPr sz="1400" b="1">
-                <a:solidFill>
-                  <a:srgbClr val="202122"/>
-                </a:solidFill>
-                <a:latin typeface="Calibri"/>
-              </a:rPr>
-              <a:t>3</a:t>
-            </a:r>
-          </a:p>
-        </p:txBody>
-      </p:sp>
-      <p:sp>
-        <p:nvSpPr>
-          <p:cNvPr id="11" name="TextBox 10"/>
+              <a:rPr sz="1300" b="1" i="0">
+                <a:solidFill>
+                  <a:srgbClr val="A9C8F0"/>
+                </a:solidFill>
+                <a:latin typeface="Calibri"/>
+              </a:rPr>
+              <a:t>EXAMPLE</a:t>
+            </a:r>
+          </a:p>
+        </p:txBody>
+      </p:sp>
+      <p:sp>
+        <p:nvSpPr>
+          <p:cNvPr id="10" name="TextBox 9"/>
           <p:cNvSpPr txBox="1"/>
           <p:nvPr/>
         </p:nvSpPr>
         <p:spPr>
           <a:xfrm>
-            <a:off x="1234440" y="4788408"/>
-            <a:ext cx="10408615" cy="1429512"/>
+            <a:off x="8046720" y="2971800"/>
+            <a:ext cx="3291840" cy="2971800"/>
           </a:xfrm>
           <a:prstGeom prst="rect">
             <a:avLst/>
@@ -7094,24 +8816,13 @@
           <a:p>
             <a:pPr algn="l"/>
             <a:r>
-              <a:rPr sz="1800" b="0" i="0">
-                <a:solidFill>
-                  <a:srgbClr val="54595D"/>
-                </a:solidFill>
-                <a:latin typeface="Calibri"/>
-              </a:rPr>
-              <a:t>Why do software licences matter?</a:t>
-            </a:r>
-          </a:p>
-          <a:p>
-            <a:r>
-              <a:rPr sz="1800" b="1">
-                <a:solidFill>
-                  <a:srgbClr val="03306E"/>
-                </a:solidFill>
-                <a:latin typeface="Calibri"/>
-              </a:rPr>
-              <a:t>They set what you may legally do with code you use or distribute.</a:t>
+              <a:rPr sz="1900" b="0" i="0">
+                <a:solidFill>
+                  <a:srgbClr val="FFFFFF"/>
+                </a:solidFill>
+                <a:latin typeface="Cambria"/>
+              </a:rPr>
+              <a:t>Using an open-source library means following its licence, which may require crediting the authors or sharing your changes.</a:t>
             </a:r>
           </a:p>
         </p:txBody>
@@ -7203,7 +8914,7 @@
                 </a:solidFill>
                 <a:latin typeface="Cambria"/>
               </a:rPr>
-              <a:t>Activity: Legal review</a:t>
+              <a:t>Standards and ethics</a:t>
             </a:r>
           </a:p>
         </p:txBody>
@@ -7282,16 +8993,16 @@
         </p:nvSpPr>
         <p:spPr>
           <a:xfrm>
-            <a:off x="548640" y="1508760"/>
-            <a:ext cx="2011680" cy="457200"/>
+            <a:off x="548640" y="1600200"/>
+            <a:ext cx="5364327" cy="640080"/>
           </a:xfrm>
           <a:prstGeom prst="roundRect">
             <a:avLst>
-              <a:gd name="adj" fmla="val 50000"/>
+              <a:gd name="adj" fmla="val 15000"/>
             </a:avLst>
           </a:prstGeom>
           <a:solidFill>
-            <a:srgbClr val="33C17A"/>
+            <a:srgbClr val="03306E"/>
           </a:solidFill>
           <a:ln>
             <a:noFill/>
@@ -7326,8 +9037,8 @@
         </p:nvSpPr>
         <p:spPr>
           <a:xfrm>
-            <a:off x="548640" y="1508760"/>
-            <a:ext cx="2011680" cy="457200"/>
+            <a:off x="777240" y="1600200"/>
+            <a:ext cx="4907127" cy="640080"/>
           </a:xfrm>
           <a:prstGeom prst="rect">
             <a:avLst/>
@@ -7338,65 +9049,161 @@
           <a:bodyPr wrap="square" anchor="ctr" lIns="0" rIns="0" tIns="0" bIns="0"/>
           <a:lstStyle/>
           <a:p>
-            <a:pPr algn="ctr"/>
-            <a:r>
-              <a:rPr sz="1400" b="1" i="0">
+            <a:pPr algn="l"/>
+            <a:r>
+              <a:rPr sz="2000" b="1" i="0">
+                <a:solidFill>
+                  <a:srgbClr val="FFFFFF"/>
+                </a:solidFill>
+                <a:latin typeface="Calibri"/>
+              </a:rPr>
+              <a:t>Development standards</a:t>
+            </a:r>
+          </a:p>
+        </p:txBody>
+      </p:sp>
+      <p:sp>
+        <p:nvSpPr>
+          <p:cNvPr id="8" name="Rounded Rectangle 7"/>
+          <p:cNvSpPr/>
+          <p:nvPr/>
+        </p:nvSpPr>
+        <p:spPr>
+          <a:xfrm>
+            <a:off x="548640" y="2377440"/>
+            <a:ext cx="5364327" cy="3794760"/>
+          </a:xfrm>
+          <a:prstGeom prst="roundRect">
+            <a:avLst>
+              <a:gd name="adj" fmla="val 4000"/>
+            </a:avLst>
+          </a:prstGeom>
+          <a:solidFill>
+            <a:srgbClr val="EAF3FF"/>
+          </a:solidFill>
+          <a:ln>
+            <a:noFill/>
+          </a:ln>
+          <a:effectLst/>
+        </p:spPr>
+        <p:style>
+          <a:lnRef idx="1">
+            <a:schemeClr val="accent1"/>
+          </a:lnRef>
+          <a:fillRef idx="3">
+            <a:schemeClr val="accent1"/>
+          </a:fillRef>
+          <a:effectRef idx="2">
+            <a:schemeClr val="accent1"/>
+          </a:effectRef>
+          <a:fontRef idx="minor">
+            <a:schemeClr val="lt1"/>
+          </a:fontRef>
+        </p:style>
+        <p:txBody>
+          <a:bodyPr rtlCol="0" anchor="ctr"/>
+          <a:lstStyle/>
+          <a:p/>
+        </p:txBody>
+      </p:sp>
+      <p:sp>
+        <p:nvSpPr>
+          <p:cNvPr id="9" name="TextBox 8"/>
+          <p:cNvSpPr txBox="1"/>
+          <p:nvPr/>
+        </p:nvSpPr>
+        <p:spPr>
+          <a:xfrm>
+            <a:off x="822959" y="2606040"/>
+            <a:ext cx="4815687" cy="3337560"/>
+          </a:xfrm>
+          <a:prstGeom prst="rect">
+            <a:avLst/>
+          </a:prstGeom>
+          <a:noFill/>
+        </p:spPr>
+        <p:txBody>
+          <a:bodyPr wrap="square" lIns="0" rIns="0" tIns="0" bIns="0">
+            <a:spAutoFit/>
+          </a:bodyPr>
+          <a:lstStyle/>
+          <a:p>
+            <a:pPr marL="274320" indent="-274320">
+              <a:spcAft>
+                <a:spcPts val="990"/>
+              </a:spcAft>
+              <a:buClr>
+                <a:srgbClr val="0645AD"/>
+              </a:buClr>
+              <a:buFont typeface="Arial"/>
+              <a:buChar char="•"/>
+            </a:pPr>
+            <a:r>
+              <a:rPr sz="2200" b="1">
                 <a:solidFill>
                   <a:srgbClr val="202122"/>
                 </a:solidFill>
                 <a:latin typeface="Calibri"/>
               </a:rPr>
-              <a:t>25 minutes</a:t>
-            </a:r>
-          </a:p>
-        </p:txBody>
-      </p:sp>
-      <p:sp>
-        <p:nvSpPr>
-          <p:cNvPr id="8" name="TextBox 7"/>
-          <p:cNvSpPr txBox="1"/>
-          <p:nvPr/>
-        </p:nvSpPr>
-        <p:spPr>
-          <a:xfrm>
-            <a:off x="2743200" y="1508760"/>
-            <a:ext cx="4754880" cy="457200"/>
-          </a:xfrm>
-          <a:prstGeom prst="rect">
-            <a:avLst/>
-          </a:prstGeom>
-          <a:noFill/>
-        </p:spPr>
-        <p:txBody>
-          <a:bodyPr wrap="square" anchor="ctr" lIns="0" rIns="0" tIns="0" bIns="0"/>
-          <a:lstStyle/>
-          <a:p>
-            <a:pPr algn="l"/>
-            <a:r>
-              <a:rPr sz="1400" b="0" i="1">
-                <a:solidFill>
-                  <a:srgbClr val="54595D"/>
-                </a:solidFill>
-                <a:latin typeface="Calibri"/>
-              </a:rPr>
-              <a:t>Small groups</a:t>
-            </a:r>
-          </a:p>
-        </p:txBody>
-      </p:sp>
-      <p:sp>
-        <p:nvSpPr>
-          <p:cNvPr id="9" name="Oval 8"/>
+              <a:t>ISO/IEC/IEEE 90003:2018:</a:t>
+            </a:r>
+            <a:r>
+              <a:rPr sz="2200" b="0">
+                <a:solidFill>
+                  <a:srgbClr val="202122"/>
+                </a:solidFill>
+                <a:latin typeface="Calibri"/>
+              </a:rPr>
+              <a:t> software engineering guidance</a:t>
+            </a:r>
+          </a:p>
+          <a:p>
+            <a:pPr marL="274320" indent="-274320">
+              <a:spcAft>
+                <a:spcPts val="990"/>
+              </a:spcAft>
+              <a:buClr>
+                <a:srgbClr val="0645AD"/>
+              </a:buClr>
+              <a:buFont typeface="Arial"/>
+              <a:buChar char="•"/>
+            </a:pPr>
+            <a:r>
+              <a:rPr sz="2200" b="1">
+                <a:solidFill>
+                  <a:srgbClr val="202122"/>
+                </a:solidFill>
+                <a:latin typeface="Calibri"/>
+              </a:rPr>
+              <a:t>W3C:</a:t>
+            </a:r>
+            <a:r>
+              <a:rPr sz="2200" b="0">
+                <a:solidFill>
+                  <a:srgbClr val="202122"/>
+                </a:solidFill>
+                <a:latin typeface="Calibri"/>
+              </a:rPr>
+              <a:t> web standards</a:t>
+            </a:r>
+          </a:p>
+        </p:txBody>
+      </p:sp>
+      <p:sp>
+        <p:nvSpPr>
+          <p:cNvPr id="10" name="Rounded Rectangle 9"/>
           <p:cNvSpPr/>
           <p:nvPr/>
         </p:nvSpPr>
         <p:spPr>
           <a:xfrm>
-            <a:off x="548640" y="2482596"/>
-            <a:ext cx="384048" cy="384048"/>
-          </a:xfrm>
-          <a:prstGeom prst="ellipse">
-            <a:avLst/>
+            <a:off x="6278727" y="1600200"/>
+            <a:ext cx="5364327" cy="640080"/>
+          </a:xfrm>
+          <a:prstGeom prst="roundRect">
+            <a:avLst>
+              <a:gd name="adj" fmla="val 15000"/>
+            </a:avLst>
           </a:prstGeom>
           <a:solidFill>
             <a:srgbClr val="0645AD"/>
@@ -7421,327 +9228,58 @@
           </a:fontRef>
         </p:style>
         <p:txBody>
-          <a:bodyPr rtlCol="0" anchor="ctr" lIns="0" rIns="0" tIns="0" bIns="0"/>
-          <a:lstStyle/>
-          <a:p>
-            <a:pPr algn="ctr"/>
-            <a:r>
-              <a:rPr sz="1300" b="1">
+          <a:bodyPr rtlCol="0" anchor="ctr"/>
+          <a:lstStyle/>
+          <a:p/>
+        </p:txBody>
+      </p:sp>
+      <p:sp>
+        <p:nvSpPr>
+          <p:cNvPr id="11" name="TextBox 10"/>
+          <p:cNvSpPr txBox="1"/>
+          <p:nvPr/>
+        </p:nvSpPr>
+        <p:spPr>
+          <a:xfrm>
+            <a:off x="6507327" y="1600200"/>
+            <a:ext cx="4907127" cy="640080"/>
+          </a:xfrm>
+          <a:prstGeom prst="rect">
+            <a:avLst/>
+          </a:prstGeom>
+          <a:noFill/>
+        </p:spPr>
+        <p:txBody>
+          <a:bodyPr wrap="square" anchor="ctr" lIns="0" rIns="0" tIns="0" bIns="0"/>
+          <a:lstStyle/>
+          <a:p>
+            <a:pPr algn="l"/>
+            <a:r>
+              <a:rPr sz="2000" b="1" i="0">
                 <a:solidFill>
                   <a:srgbClr val="FFFFFF"/>
                 </a:solidFill>
                 <a:latin typeface="Calibri"/>
               </a:rPr>
-              <a:t>1</a:t>
-            </a:r>
-          </a:p>
-        </p:txBody>
-      </p:sp>
-      <p:sp>
-        <p:nvSpPr>
-          <p:cNvPr id="10" name="TextBox 9"/>
-          <p:cNvSpPr txBox="1"/>
-          <p:nvPr/>
-        </p:nvSpPr>
-        <p:spPr>
-          <a:xfrm>
-            <a:off x="1143000" y="2240280"/>
-            <a:ext cx="5943600" cy="868680"/>
-          </a:xfrm>
-          <a:prstGeom prst="rect">
-            <a:avLst/>
-          </a:prstGeom>
-          <a:noFill/>
-        </p:spPr>
-        <p:txBody>
-          <a:bodyPr wrap="square" anchor="ctr" lIns="0" rIns="0" tIns="0" bIns="0"/>
-          <a:lstStyle/>
-          <a:p>
-            <a:pPr algn="l"/>
-            <a:r>
-              <a:rPr sz="1700" b="0" i="0">
-                <a:solidFill>
-                  <a:srgbClr val="202122"/>
-                </a:solidFill>
-                <a:latin typeface="Calibri"/>
-              </a:rPr>
-              <a:t>Take the starter's children's game.</a:t>
-            </a:r>
-          </a:p>
-        </p:txBody>
-      </p:sp>
-      <p:sp>
-        <p:nvSpPr>
-          <p:cNvPr id="11" name="Oval 10"/>
+              <a:t>Ethical considerations</a:t>
+            </a:r>
+          </a:p>
+        </p:txBody>
+      </p:sp>
+      <p:sp>
+        <p:nvSpPr>
+          <p:cNvPr id="12" name="Rounded Rectangle 11"/>
           <p:cNvSpPr/>
           <p:nvPr/>
         </p:nvSpPr>
         <p:spPr>
           <a:xfrm>
-            <a:off x="548640" y="3461004"/>
-            <a:ext cx="384048" cy="384048"/>
-          </a:xfrm>
-          <a:prstGeom prst="ellipse">
-            <a:avLst/>
-          </a:prstGeom>
-          <a:solidFill>
-            <a:srgbClr val="0645AD"/>
-          </a:solidFill>
-          <a:ln>
-            <a:noFill/>
-          </a:ln>
-          <a:effectLst/>
-        </p:spPr>
-        <p:style>
-          <a:lnRef idx="1">
-            <a:schemeClr val="accent1"/>
-          </a:lnRef>
-          <a:fillRef idx="3">
-            <a:schemeClr val="accent1"/>
-          </a:fillRef>
-          <a:effectRef idx="2">
-            <a:schemeClr val="accent1"/>
-          </a:effectRef>
-          <a:fontRef idx="minor">
-            <a:schemeClr val="lt1"/>
-          </a:fontRef>
-        </p:style>
-        <p:txBody>
-          <a:bodyPr rtlCol="0" anchor="ctr" lIns="0" rIns="0" tIns="0" bIns="0"/>
-          <a:lstStyle/>
-          <a:p>
-            <a:pPr algn="ctr"/>
-            <a:r>
-              <a:rPr sz="1300" b="1">
-                <a:solidFill>
-                  <a:srgbClr val="FFFFFF"/>
-                </a:solidFill>
-                <a:latin typeface="Calibri"/>
-              </a:rPr>
-              <a:t>2</a:t>
-            </a:r>
-          </a:p>
-        </p:txBody>
-      </p:sp>
-      <p:sp>
-        <p:nvSpPr>
-          <p:cNvPr id="12" name="TextBox 11"/>
-          <p:cNvSpPr txBox="1"/>
-          <p:nvPr/>
-        </p:nvSpPr>
-        <p:spPr>
-          <a:xfrm>
-            <a:off x="1143000" y="3218688"/>
-            <a:ext cx="5943600" cy="868680"/>
-          </a:xfrm>
-          <a:prstGeom prst="rect">
-            <a:avLst/>
-          </a:prstGeom>
-          <a:noFill/>
-        </p:spPr>
-        <p:txBody>
-          <a:bodyPr wrap="square" anchor="ctr" lIns="0" rIns="0" tIns="0" bIns="0"/>
-          <a:lstStyle/>
-          <a:p>
-            <a:pPr algn="l"/>
-            <a:r>
-              <a:rPr sz="1700" b="0" i="0">
-                <a:solidFill>
-                  <a:srgbClr val="202122"/>
-                </a:solidFill>
-                <a:latin typeface="Calibri"/>
-              </a:rPr>
-              <a:t>List every legal area that applies and why.</a:t>
-            </a:r>
-          </a:p>
-        </p:txBody>
-      </p:sp>
-      <p:sp>
-        <p:nvSpPr>
-          <p:cNvPr id="13" name="Oval 12"/>
-          <p:cNvSpPr/>
-          <p:nvPr/>
-        </p:nvSpPr>
-        <p:spPr>
-          <a:xfrm>
-            <a:off x="548640" y="4439412"/>
-            <a:ext cx="384048" cy="384048"/>
-          </a:xfrm>
-          <a:prstGeom prst="ellipse">
-            <a:avLst/>
-          </a:prstGeom>
-          <a:solidFill>
-            <a:srgbClr val="0645AD"/>
-          </a:solidFill>
-          <a:ln>
-            <a:noFill/>
-          </a:ln>
-          <a:effectLst/>
-        </p:spPr>
-        <p:style>
-          <a:lnRef idx="1">
-            <a:schemeClr val="accent1"/>
-          </a:lnRef>
-          <a:fillRef idx="3">
-            <a:schemeClr val="accent1"/>
-          </a:fillRef>
-          <a:effectRef idx="2">
-            <a:schemeClr val="accent1"/>
-          </a:effectRef>
-          <a:fontRef idx="minor">
-            <a:schemeClr val="lt1"/>
-          </a:fontRef>
-        </p:style>
-        <p:txBody>
-          <a:bodyPr rtlCol="0" anchor="ctr" lIns="0" rIns="0" tIns="0" bIns="0"/>
-          <a:lstStyle/>
-          <a:p>
-            <a:pPr algn="ctr"/>
-            <a:r>
-              <a:rPr sz="1300" b="1">
-                <a:solidFill>
-                  <a:srgbClr val="FFFFFF"/>
-                </a:solidFill>
-                <a:latin typeface="Calibri"/>
-              </a:rPr>
-              <a:t>3</a:t>
-            </a:r>
-          </a:p>
-        </p:txBody>
-      </p:sp>
-      <p:sp>
-        <p:nvSpPr>
-          <p:cNvPr id="14" name="TextBox 13"/>
-          <p:cNvSpPr txBox="1"/>
-          <p:nvPr/>
-        </p:nvSpPr>
-        <p:spPr>
-          <a:xfrm>
-            <a:off x="1143000" y="4197096"/>
-            <a:ext cx="5943600" cy="868680"/>
-          </a:xfrm>
-          <a:prstGeom prst="rect">
-            <a:avLst/>
-          </a:prstGeom>
-          <a:noFill/>
-        </p:spPr>
-        <p:txBody>
-          <a:bodyPr wrap="square" anchor="ctr" lIns="0" rIns="0" tIns="0" bIns="0"/>
-          <a:lstStyle/>
-          <a:p>
-            <a:pPr algn="l"/>
-            <a:r>
-              <a:rPr sz="1700" b="0" i="0">
-                <a:solidFill>
-                  <a:srgbClr val="202122"/>
-                </a:solidFill>
-                <a:latin typeface="Calibri"/>
-              </a:rPr>
-              <a:t>Identify two ethical concerns.</a:t>
-            </a:r>
-          </a:p>
-        </p:txBody>
-      </p:sp>
-      <p:sp>
-        <p:nvSpPr>
-          <p:cNvPr id="15" name="Oval 14"/>
-          <p:cNvSpPr/>
-          <p:nvPr/>
-        </p:nvSpPr>
-        <p:spPr>
-          <a:xfrm>
-            <a:off x="548640" y="5417820"/>
-            <a:ext cx="384048" cy="384048"/>
-          </a:xfrm>
-          <a:prstGeom prst="ellipse">
-            <a:avLst/>
-          </a:prstGeom>
-          <a:solidFill>
-            <a:srgbClr val="0645AD"/>
-          </a:solidFill>
-          <a:ln>
-            <a:noFill/>
-          </a:ln>
-          <a:effectLst/>
-        </p:spPr>
-        <p:style>
-          <a:lnRef idx="1">
-            <a:schemeClr val="accent1"/>
-          </a:lnRef>
-          <a:fillRef idx="3">
-            <a:schemeClr val="accent1"/>
-          </a:fillRef>
-          <a:effectRef idx="2">
-            <a:schemeClr val="accent1"/>
-          </a:effectRef>
-          <a:fontRef idx="minor">
-            <a:schemeClr val="lt1"/>
-          </a:fontRef>
-        </p:style>
-        <p:txBody>
-          <a:bodyPr rtlCol="0" anchor="ctr" lIns="0" rIns="0" tIns="0" bIns="0"/>
-          <a:lstStyle/>
-          <a:p>
-            <a:pPr algn="ctr"/>
-            <a:r>
-              <a:rPr sz="1300" b="1">
-                <a:solidFill>
-                  <a:srgbClr val="FFFFFF"/>
-                </a:solidFill>
-                <a:latin typeface="Calibri"/>
-              </a:rPr>
-              <a:t>4</a:t>
-            </a:r>
-          </a:p>
-        </p:txBody>
-      </p:sp>
-      <p:sp>
-        <p:nvSpPr>
-          <p:cNvPr id="16" name="TextBox 15"/>
-          <p:cNvSpPr txBox="1"/>
-          <p:nvPr/>
-        </p:nvSpPr>
-        <p:spPr>
-          <a:xfrm>
-            <a:off x="1143000" y="5175504"/>
-            <a:ext cx="5943600" cy="868680"/>
-          </a:xfrm>
-          <a:prstGeom prst="rect">
-            <a:avLst/>
-          </a:prstGeom>
-          <a:noFill/>
-        </p:spPr>
-        <p:txBody>
-          <a:bodyPr wrap="square" anchor="ctr" lIns="0" rIns="0" tIns="0" bIns="0"/>
-          <a:lstStyle/>
-          <a:p>
-            <a:pPr algn="l"/>
-            <a:r>
-              <a:rPr sz="1700" b="0" i="0">
-                <a:solidFill>
-                  <a:srgbClr val="202122"/>
-                </a:solidFill>
-                <a:latin typeface="Calibri"/>
-              </a:rPr>
-              <a:t>Recommend design changes to comply.</a:t>
-            </a:r>
-          </a:p>
-        </p:txBody>
-      </p:sp>
-      <p:sp>
-        <p:nvSpPr>
-          <p:cNvPr id="17" name="Rounded Rectangle 16"/>
-          <p:cNvSpPr/>
-          <p:nvPr/>
-        </p:nvSpPr>
-        <p:spPr>
-          <a:xfrm>
-            <a:off x="7772400" y="1508760"/>
-            <a:ext cx="3867912" cy="4572000"/>
+            <a:off x="6278727" y="2377440"/>
+            <a:ext cx="5364327" cy="3794760"/>
           </a:xfrm>
           <a:prstGeom prst="roundRect">
             <a:avLst>
-              <a:gd name="adj" fmla="val 8000"/>
+              <a:gd name="adj" fmla="val 4000"/>
             </a:avLst>
           </a:prstGeom>
           <a:solidFill>
@@ -7774,47 +9312,14 @@
       </p:sp>
       <p:sp>
         <p:nvSpPr>
-          <p:cNvPr id="18" name="TextBox 17"/>
+          <p:cNvPr id="13" name="TextBox 12"/>
           <p:cNvSpPr txBox="1"/>
           <p:nvPr/>
         </p:nvSpPr>
         <p:spPr>
           <a:xfrm>
-            <a:off x="8046720" y="1737360"/>
-            <a:ext cx="3291840" cy="365760"/>
-          </a:xfrm>
-          <a:prstGeom prst="rect">
-            <a:avLst/>
-          </a:prstGeom>
-          <a:noFill/>
-        </p:spPr>
-        <p:txBody>
-          <a:bodyPr wrap="square" anchor="t" lIns="0" rIns="0" tIns="0" bIns="0"/>
-          <a:lstStyle/>
-          <a:p>
-            <a:pPr algn="l"/>
-            <a:r>
-              <a:rPr sz="1300" b="1" i="0">
-                <a:solidFill>
-                  <a:srgbClr val="0645AD"/>
-                </a:solidFill>
-                <a:latin typeface="Calibri"/>
-              </a:rPr>
-              <a:t>SUCCESS CRITERIA</a:t>
-            </a:r>
-          </a:p>
-        </p:txBody>
-      </p:sp>
-      <p:sp>
-        <p:nvSpPr>
-          <p:cNvPr id="19" name="TextBox 18"/>
-          <p:cNvSpPr txBox="1"/>
-          <p:nvPr/>
-        </p:nvSpPr>
-        <p:spPr>
-          <a:xfrm>
-            <a:off x="8046720" y="2240280"/>
-            <a:ext cx="3337560" cy="3657600"/>
+            <a:off x="6553047" y="2606040"/>
+            <a:ext cx="4815687" cy="3337560"/>
           </a:xfrm>
           <a:prstGeom prst="rect">
             <a:avLst/>
@@ -7829,7 +9334,7 @@
           <a:p>
             <a:pPr marL="274320" indent="-274320">
               <a:spcAft>
-                <a:spcPts val="810"/>
+                <a:spcPts val="990"/>
               </a:spcAft>
               <a:buClr>
                 <a:srgbClr val="0645AD"/>
@@ -7838,19 +9343,19 @@
               <a:buChar char="•"/>
             </a:pPr>
             <a:r>
-              <a:rPr sz="1800" b="0">
+              <a:rPr sz="2200" b="0">
                 <a:solidFill>
                   <a:srgbClr val="202122"/>
                 </a:solidFill>
                 <a:latin typeface="Calibri"/>
               </a:rPr>
-              <a:t>Age, data and gambling rules considered</a:t>
+              <a:t>Code of conduct</a:t>
             </a:r>
           </a:p>
           <a:p>
             <a:pPr marL="274320" indent="-274320">
               <a:spcAft>
-                <a:spcPts val="810"/>
+                <a:spcPts val="990"/>
               </a:spcAft>
               <a:buClr>
                 <a:srgbClr val="0645AD"/>
@@ -7859,19 +9364,19 @@
               <a:buChar char="•"/>
             </a:pPr>
             <a:r>
-              <a:rPr sz="1800" b="0">
+              <a:rPr sz="2200" b="0">
                 <a:solidFill>
                   <a:srgbClr val="202122"/>
                 </a:solidFill>
                 <a:latin typeface="Calibri"/>
               </a:rPr>
-              <a:t>Ethics goes beyond the law</a:t>
+              <a:t>Professional practice</a:t>
             </a:r>
           </a:p>
           <a:p>
             <a:pPr marL="274320" indent="-274320">
               <a:spcAft>
-                <a:spcPts val="810"/>
+                <a:spcPts val="990"/>
               </a:spcAft>
               <a:buClr>
                 <a:srgbClr val="0645AD"/>
@@ -7880,13 +9385,34 @@
               <a:buChar char="•"/>
             </a:pPr>
             <a:r>
-              <a:rPr sz="1800" b="0">
+              <a:rPr sz="2200" b="0">
                 <a:solidFill>
                   <a:srgbClr val="202122"/>
                 </a:solidFill>
                 <a:latin typeface="Calibri"/>
               </a:rPr>
-              <a:t>Changes are practical</a:t>
+              <a:t>Software licensing</a:t>
+            </a:r>
+          </a:p>
+          <a:p>
+            <a:pPr marL="274320" indent="-274320">
+              <a:spcAft>
+                <a:spcPts val="990"/>
+              </a:spcAft>
+              <a:buClr>
+                <a:srgbClr val="0645AD"/>
+              </a:buClr>
+              <a:buFont typeface="Arial"/>
+              <a:buChar char="•"/>
+            </a:pPr>
+            <a:r>
+              <a:rPr sz="2200" b="0">
+                <a:solidFill>
+                  <a:srgbClr val="202122"/>
+                </a:solidFill>
+                <a:latin typeface="Calibri"/>
+              </a:rPr>
+              <a:t>Inclusion and diversity</a:t>
             </a:r>
           </a:p>
         </p:txBody>
@@ -7905,7 +9431,7 @@
     <p:bg>
       <p:bgPr>
         <a:solidFill>
-          <a:srgbClr val="03306E"/>
+          <a:srgbClr val="FFFFFF"/>
         </a:solidFill>
         <a:effectLst/>
       </p:bgPr>
@@ -7941,7 +9467,7 @@
             <a:r>
               <a:rPr sz="1100" b="1" i="0">
                 <a:solidFill>
-                  <a:srgbClr val="A9C8F0"/>
+                  <a:srgbClr val="54595D"/>
                 </a:solidFill>
                 <a:latin typeface="Calibri"/>
               </a:rPr>
@@ -7974,24 +9500,90 @@
             <a:r>
               <a:rPr sz="3200" b="1" i="0">
                 <a:solidFill>
-                  <a:srgbClr val="FFFFFF"/>
+                  <a:srgbClr val="03306E"/>
                 </a:solidFill>
                 <a:latin typeface="Cambria"/>
               </a:rPr>
-              <a:t>Exit ticket</a:t>
-            </a:r>
-          </a:p>
-        </p:txBody>
-      </p:sp>
-      <p:sp>
-        <p:nvSpPr>
-          <p:cNvPr id="4" name="Oval 3"/>
+              <a:t>Quick check: Standards and ethics</a:t>
+            </a:r>
+          </a:p>
+        </p:txBody>
+      </p:sp>
+      <p:sp>
+        <p:nvSpPr>
+          <p:cNvPr id="4" name="TextBox 3"/>
+          <p:cNvSpPr txBox="1"/>
+          <p:nvPr/>
+        </p:nvSpPr>
+        <p:spPr>
+          <a:xfrm>
+            <a:off x="548640" y="6446520"/>
+            <a:ext cx="8229600" cy="274320"/>
+          </a:xfrm>
+          <a:prstGeom prst="rect">
+            <a:avLst/>
+          </a:prstGeom>
+          <a:noFill/>
+        </p:spPr>
+        <p:txBody>
+          <a:bodyPr wrap="square" anchor="t" lIns="0" rIns="0" tIns="0" bIns="0"/>
+          <a:lstStyle/>
+          <a:p>
+            <a:pPr algn="l"/>
+            <a:r>
+              <a:rPr sz="1000" b="0" i="0">
+                <a:solidFill>
+                  <a:srgbClr val="54595D"/>
+                </a:solidFill>
+                <a:latin typeface="Calibri"/>
+              </a:rPr>
+              <a:t>Digital Software Development T Level  ·  Legal and Ethical Software Development</a:t>
+            </a:r>
+          </a:p>
+        </p:txBody>
+      </p:sp>
+      <p:sp>
+        <p:nvSpPr>
+          <p:cNvPr id="5" name="TextBox 4"/>
+          <p:cNvSpPr txBox="1"/>
+          <p:nvPr/>
+        </p:nvSpPr>
+        <p:spPr>
+          <a:xfrm>
+            <a:off x="10728655" y="6446520"/>
+            <a:ext cx="914400" cy="274320"/>
+          </a:xfrm>
+          <a:prstGeom prst="rect">
+            <a:avLst/>
+          </a:prstGeom>
+          <a:noFill/>
+        </p:spPr>
+        <p:txBody>
+          <a:bodyPr wrap="square" anchor="t" lIns="0" rIns="0" tIns="0" bIns="0"/>
+          <a:lstStyle/>
+          <a:p>
+            <a:pPr algn="r"/>
+            <a:r>
+              <a:rPr sz="1000" b="0" i="0">
+                <a:solidFill>
+                  <a:srgbClr val="54595D"/>
+                </a:solidFill>
+                <a:latin typeface="Calibri"/>
+              </a:rPr>
+              <a:t>8</a:t>
+            </a:r>
+          </a:p>
+        </p:txBody>
+      </p:sp>
+      <p:sp>
+        <p:nvSpPr>
+          <p:cNvPr id="6" name="Oval 5"/>
           <p:cNvSpPr/>
           <p:nvPr/>
         </p:nvSpPr>
         <p:spPr>
           <a:xfrm>
-            <a:off x="548640" y="1737360"/>
+            <a:off x="548640" y="1691640"/>
             <a:ext cx="502920" cy="502920"/>
           </a:xfrm>
           <a:prstGeom prst="ellipse">
@@ -8025,7 +9617,7 @@
           <a:p>
             <a:pPr algn="ctr"/>
             <a:r>
-              <a:rPr sz="1700" b="1">
+              <a:rPr sz="1600" b="1">
                 <a:solidFill>
                   <a:srgbClr val="202122"/>
                 </a:solidFill>
@@ -8038,14 +9630,14 @@
       </p:sp>
       <p:sp>
         <p:nvSpPr>
-          <p:cNvPr id="5" name="TextBox 4"/>
+          <p:cNvPr id="7" name="TextBox 6"/>
           <p:cNvSpPr txBox="1"/>
           <p:nvPr/>
         </p:nvSpPr>
         <p:spPr>
           <a:xfrm>
-            <a:off x="1325880" y="1645920"/>
-            <a:ext cx="6583680" cy="822960"/>
+            <a:off x="1371600" y="1645920"/>
+            <a:ext cx="10271455" cy="1188720"/>
           </a:xfrm>
           <a:prstGeom prst="rect">
             <a:avLst/>
@@ -8053,31 +9645,31 @@
           <a:noFill/>
         </p:spPr>
         <p:txBody>
-          <a:bodyPr wrap="square" anchor="ctr" lIns="0" rIns="0" tIns="0" bIns="0"/>
+          <a:bodyPr wrap="square" anchor="t" lIns="0" rIns="0" tIns="0" bIns="0"/>
           <a:lstStyle/>
           <a:p>
             <a:pPr algn="l"/>
             <a:r>
-              <a:rPr sz="2000" b="0" i="0">
-                <a:solidFill>
-                  <a:srgbClr val="FFFFFF"/>
-                </a:solidFill>
-                <a:latin typeface="Calibri"/>
-              </a:rPr>
-              <a:t>Why can't you use any image you find online?</a:t>
-            </a:r>
-          </a:p>
-        </p:txBody>
-      </p:sp>
-      <p:sp>
-        <p:nvSpPr>
-          <p:cNvPr id="6" name="Oval 5"/>
+              <a:rPr sz="2400" b="0" i="0">
+                <a:solidFill>
+                  <a:srgbClr val="202122"/>
+                </a:solidFill>
+                <a:latin typeface="Calibri"/>
+              </a:rPr>
+              <a:t>What does W3C set standards for?</a:t>
+            </a:r>
+          </a:p>
+        </p:txBody>
+      </p:sp>
+      <p:sp>
+        <p:nvSpPr>
+          <p:cNvPr id="8" name="Oval 7"/>
           <p:cNvSpPr/>
           <p:nvPr/>
         </p:nvSpPr>
         <p:spPr>
           <a:xfrm>
-            <a:off x="548640" y="2697480"/>
+            <a:off x="548640" y="3108960"/>
             <a:ext cx="502920" cy="502920"/>
           </a:xfrm>
           <a:prstGeom prst="ellipse">
@@ -8111,7 +9703,7 @@
           <a:p>
             <a:pPr algn="ctr"/>
             <a:r>
-              <a:rPr sz="1700" b="1">
+              <a:rPr sz="1600" b="1">
                 <a:solidFill>
                   <a:srgbClr val="202122"/>
                 </a:solidFill>
@@ -8124,14 +9716,14 @@
       </p:sp>
       <p:sp>
         <p:nvSpPr>
-          <p:cNvPr id="7" name="TextBox 6"/>
+          <p:cNvPr id="9" name="TextBox 8"/>
           <p:cNvSpPr txBox="1"/>
           <p:nvPr/>
         </p:nvSpPr>
         <p:spPr>
           <a:xfrm>
-            <a:off x="1325880" y="2606040"/>
-            <a:ext cx="6583680" cy="822960"/>
+            <a:off x="1371600" y="3063240"/>
+            <a:ext cx="10271455" cy="1188720"/>
           </a:xfrm>
           <a:prstGeom prst="rect">
             <a:avLst/>
@@ -8139,31 +9731,31 @@
           <a:noFill/>
         </p:spPr>
         <p:txBody>
-          <a:bodyPr wrap="square" anchor="ctr" lIns="0" rIns="0" tIns="0" bIns="0"/>
+          <a:bodyPr wrap="square" anchor="t" lIns="0" rIns="0" tIns="0" bIns="0"/>
           <a:lstStyle/>
           <a:p>
             <a:pPr algn="l"/>
             <a:r>
-              <a:rPr sz="2000" b="0" i="0">
-                <a:solidFill>
-                  <a:srgbClr val="FFFFFF"/>
-                </a:solidFill>
-                <a:latin typeface="Calibri"/>
-              </a:rPr>
-              <a:t>What is one ethical issue in software?</a:t>
-            </a:r>
-          </a:p>
-        </p:txBody>
-      </p:sp>
-      <p:sp>
-        <p:nvSpPr>
-          <p:cNvPr id="8" name="Oval 7"/>
+              <a:rPr sz="2400" b="0" i="0">
+                <a:solidFill>
+                  <a:srgbClr val="202122"/>
+                </a:solidFill>
+                <a:latin typeface="Calibri"/>
+              </a:rPr>
+              <a:t>Give an example of something legal but unethical.</a:t>
+            </a:r>
+          </a:p>
+        </p:txBody>
+      </p:sp>
+      <p:sp>
+        <p:nvSpPr>
+          <p:cNvPr id="10" name="Oval 9"/>
           <p:cNvSpPr/>
           <p:nvPr/>
         </p:nvSpPr>
         <p:spPr>
           <a:xfrm>
-            <a:off x="548640" y="3657600"/>
+            <a:off x="548640" y="4526280"/>
             <a:ext cx="502920" cy="502920"/>
           </a:xfrm>
           <a:prstGeom prst="ellipse">
@@ -8197,7 +9789,7 @@
           <a:p>
             <a:pPr algn="ctr"/>
             <a:r>
-              <a:rPr sz="1700" b="1">
+              <a:rPr sz="1600" b="1">
                 <a:solidFill>
                   <a:srgbClr val="202122"/>
                 </a:solidFill>
@@ -8210,14 +9802,14 @@
       </p:sp>
       <p:sp>
         <p:nvSpPr>
-          <p:cNvPr id="9" name="TextBox 8"/>
+          <p:cNvPr id="11" name="TextBox 10"/>
           <p:cNvSpPr txBox="1"/>
           <p:nvPr/>
         </p:nvSpPr>
         <p:spPr>
           <a:xfrm>
-            <a:off x="1325880" y="3566160"/>
-            <a:ext cx="6583680" cy="822960"/>
+            <a:off x="1371600" y="4480560"/>
+            <a:ext cx="10271455" cy="1188720"/>
           </a:xfrm>
           <a:prstGeom prst="rect">
             <a:avLst/>
@@ -8225,40 +9817,229 @@
           <a:noFill/>
         </p:spPr>
         <p:txBody>
+          <a:bodyPr wrap="square" anchor="t" lIns="0" rIns="0" tIns="0" bIns="0"/>
+          <a:lstStyle/>
+          <a:p>
+            <a:pPr algn="l"/>
+            <a:r>
+              <a:rPr sz="2400" b="0" i="0">
+                <a:solidFill>
+                  <a:srgbClr val="202122"/>
+                </a:solidFill>
+                <a:latin typeface="Calibri"/>
+              </a:rPr>
+              <a:t>Why follow software licences?</a:t>
+            </a:r>
+          </a:p>
+        </p:txBody>
+      </p:sp>
+      <p:sp>
+        <p:nvSpPr>
+          <p:cNvPr id="12" name="TextBox 11"/>
+          <p:cNvSpPr txBox="1"/>
+          <p:nvPr/>
+        </p:nvSpPr>
+        <p:spPr>
+          <a:xfrm>
+            <a:off x="548640" y="5852160"/>
+            <a:ext cx="11094415" cy="365760"/>
+          </a:xfrm>
+          <a:prstGeom prst="rect">
+            <a:avLst/>
+          </a:prstGeom>
+          <a:noFill/>
+        </p:spPr>
+        <p:txBody>
+          <a:bodyPr wrap="square" anchor="t" lIns="0" rIns="0" tIns="0" bIns="0"/>
+          <a:lstStyle/>
+          <a:p>
+            <a:pPr algn="l"/>
+            <a:r>
+              <a:rPr sz="1300" b="0" i="1">
+                <a:solidFill>
+                  <a:srgbClr val="54595D"/>
+                </a:solidFill>
+                <a:latin typeface="Calibri"/>
+              </a:rPr>
+              <a:t>Answer on mini whiteboards or in your book. Answers are in the speaker notes.</a:t>
+            </a:r>
+          </a:p>
+        </p:txBody>
+      </p:sp>
+    </p:spTree>
+  </p:cSld>
+  <p:clrMapOvr>
+    <a:masterClrMapping/>
+  </p:clrMapOvr>
+</p:sld>
+</file>
+
+<file path=ppt/slides/slide9.xml><?xml version="1.0" encoding="utf-8"?>
+<p:sld xmlns:a="http://schemas.openxmlformats.org/drawingml/2006/main" xmlns:p="http://schemas.openxmlformats.org/presentationml/2006/main" xmlns:r="http://schemas.openxmlformats.org/officeDocument/2006/relationships">
+  <p:cSld>
+    <p:bg>
+      <p:bgPr>
+        <a:solidFill>
+          <a:srgbClr val="FFFFFF"/>
+        </a:solidFill>
+        <a:effectLst/>
+      </p:bgPr>
+    </p:bg>
+    <p:spTree>
+      <p:nvGrpSpPr>
+        <p:cNvPr id="1" name=""/>
+        <p:cNvGrpSpPr/>
+        <p:nvPr/>
+      </p:nvGrpSpPr>
+      <p:grpSpPr/>
+      <p:sp>
+        <p:nvSpPr>
+          <p:cNvPr id="2" name="TextBox 1"/>
+          <p:cNvSpPr txBox="1"/>
+          <p:nvPr/>
+        </p:nvSpPr>
+        <p:spPr>
+          <a:xfrm>
+            <a:off x="548640" y="320040"/>
+            <a:ext cx="11094415" cy="274320"/>
+          </a:xfrm>
+          <a:prstGeom prst="rect">
+            <a:avLst/>
+          </a:prstGeom>
+          <a:noFill/>
+        </p:spPr>
+        <p:txBody>
+          <a:bodyPr wrap="square" anchor="t" lIns="0" rIns="0" tIns="0" bIns="0"/>
+          <a:lstStyle/>
+          <a:p>
+            <a:pPr algn="l"/>
+            <a:r>
+              <a:rPr sz="1100" b="1" i="0">
+                <a:solidFill>
+                  <a:srgbClr val="54595D"/>
+                </a:solidFill>
+                <a:latin typeface="Calibri"/>
+              </a:rPr>
+              <a:t>OCCUPATIONAL SPECIALISM  ·  Specialism Content Area 2</a:t>
+            </a:r>
+          </a:p>
+        </p:txBody>
+      </p:sp>
+      <p:sp>
+        <p:nvSpPr>
+          <p:cNvPr id="3" name="TextBox 2"/>
+          <p:cNvSpPr txBox="1"/>
+          <p:nvPr/>
+        </p:nvSpPr>
+        <p:spPr>
+          <a:xfrm>
+            <a:off x="548640" y="566928"/>
+            <a:ext cx="11094415" cy="822960"/>
+          </a:xfrm>
+          <a:prstGeom prst="rect">
+            <a:avLst/>
+          </a:prstGeom>
+          <a:noFill/>
+        </p:spPr>
+        <p:txBody>
           <a:bodyPr wrap="square" anchor="ctr" lIns="0" rIns="0" tIns="0" bIns="0"/>
           <a:lstStyle/>
           <a:p>
             <a:pPr algn="l"/>
             <a:r>
-              <a:rPr sz="2000" b="0" i="0">
-                <a:solidFill>
-                  <a:srgbClr val="FFFFFF"/>
-                </a:solidFill>
-                <a:latin typeface="Calibri"/>
-              </a:rPr>
-              <a:t>Why do territorial restrictions exist?</a:t>
-            </a:r>
-          </a:p>
-        </p:txBody>
-      </p:sp>
-      <p:sp>
-        <p:nvSpPr>
-          <p:cNvPr id="10" name="Rounded Rectangle 9"/>
+              <a:rPr sz="3200" b="1" i="0">
+                <a:solidFill>
+                  <a:srgbClr val="03306E"/>
+                </a:solidFill>
+                <a:latin typeface="Cambria"/>
+              </a:rPr>
+              <a:t>Check your understanding</a:t>
+            </a:r>
+          </a:p>
+        </p:txBody>
+      </p:sp>
+      <p:sp>
+        <p:nvSpPr>
+          <p:cNvPr id="4" name="TextBox 3"/>
+          <p:cNvSpPr txBox="1"/>
+          <p:nvPr/>
+        </p:nvSpPr>
+        <p:spPr>
+          <a:xfrm>
+            <a:off x="548640" y="6446520"/>
+            <a:ext cx="8229600" cy="274320"/>
+          </a:xfrm>
+          <a:prstGeom prst="rect">
+            <a:avLst/>
+          </a:prstGeom>
+          <a:noFill/>
+        </p:spPr>
+        <p:txBody>
+          <a:bodyPr wrap="square" anchor="t" lIns="0" rIns="0" tIns="0" bIns="0"/>
+          <a:lstStyle/>
+          <a:p>
+            <a:pPr algn="l"/>
+            <a:r>
+              <a:rPr sz="1000" b="0" i="0">
+                <a:solidFill>
+                  <a:srgbClr val="54595D"/>
+                </a:solidFill>
+                <a:latin typeface="Calibri"/>
+              </a:rPr>
+              <a:t>Digital Software Development T Level  ·  Legal and Ethical Software Development</a:t>
+            </a:r>
+          </a:p>
+        </p:txBody>
+      </p:sp>
+      <p:sp>
+        <p:nvSpPr>
+          <p:cNvPr id="5" name="TextBox 4"/>
+          <p:cNvSpPr txBox="1"/>
+          <p:nvPr/>
+        </p:nvSpPr>
+        <p:spPr>
+          <a:xfrm>
+            <a:off x="10728655" y="6446520"/>
+            <a:ext cx="914400" cy="274320"/>
+          </a:xfrm>
+          <a:prstGeom prst="rect">
+            <a:avLst/>
+          </a:prstGeom>
+          <a:noFill/>
+        </p:spPr>
+        <p:txBody>
+          <a:bodyPr wrap="square" anchor="t" lIns="0" rIns="0" tIns="0" bIns="0"/>
+          <a:lstStyle/>
+          <a:p>
+            <a:pPr algn="r"/>
+            <a:r>
+              <a:rPr sz="1000" b="0" i="0">
+                <a:solidFill>
+                  <a:srgbClr val="54595D"/>
+                </a:solidFill>
+                <a:latin typeface="Calibri"/>
+              </a:rPr>
+              <a:t>9</a:t>
+            </a:r>
+          </a:p>
+        </p:txBody>
+      </p:sp>
+      <p:sp>
+        <p:nvSpPr>
+          <p:cNvPr id="6" name="Oval 5"/>
           <p:cNvSpPr/>
           <p:nvPr/>
         </p:nvSpPr>
         <p:spPr>
           <a:xfrm>
-            <a:off x="8229600" y="1645920"/>
-            <a:ext cx="3410712" cy="2926080"/>
-          </a:xfrm>
-          <a:prstGeom prst="roundRect">
-            <a:avLst>
-              <a:gd name="adj" fmla="val 8000"/>
-            </a:avLst>
+            <a:off x="548640" y="1618488"/>
+            <a:ext cx="411480" cy="411480"/>
+          </a:xfrm>
+          <a:prstGeom prst="ellipse">
+            <a:avLst/>
           </a:prstGeom>
           <a:solidFill>
-            <a:srgbClr val="0645AD"/>
+            <a:srgbClr val="33C17A"/>
           </a:solidFill>
           <a:ln>
             <a:noFill/>
@@ -8280,9 +10061,192 @@
           </a:fontRef>
         </p:style>
         <p:txBody>
-          <a:bodyPr rtlCol="0" anchor="ctr"/>
-          <a:lstStyle/>
-          <a:p/>
+          <a:bodyPr rtlCol="0" anchor="ctr" lIns="0" rIns="0" tIns="0" bIns="0"/>
+          <a:lstStyle/>
+          <a:p>
+            <a:pPr algn="ctr"/>
+            <a:r>
+              <a:rPr sz="1400" b="1">
+                <a:solidFill>
+                  <a:srgbClr val="202122"/>
+                </a:solidFill>
+                <a:latin typeface="Calibri"/>
+              </a:rPr>
+              <a:t>1</a:t>
+            </a:r>
+          </a:p>
+        </p:txBody>
+      </p:sp>
+      <p:sp>
+        <p:nvSpPr>
+          <p:cNvPr id="7" name="TextBox 6"/>
+          <p:cNvSpPr txBox="1"/>
+          <p:nvPr/>
+        </p:nvSpPr>
+        <p:spPr>
+          <a:xfrm>
+            <a:off x="1234440" y="1600200"/>
+            <a:ext cx="10408615" cy="1429512"/>
+          </a:xfrm>
+          <a:prstGeom prst="rect">
+            <a:avLst/>
+          </a:prstGeom>
+          <a:noFill/>
+        </p:spPr>
+        <p:txBody>
+          <a:bodyPr wrap="square" anchor="t" lIns="0" rIns="0" tIns="0" bIns="0"/>
+          <a:lstStyle/>
+          <a:p>
+            <a:pPr algn="l"/>
+            <a:r>
+              <a:rPr sz="2200" b="0" i="0">
+                <a:solidFill>
+                  <a:srgbClr val="202122"/>
+                </a:solidFill>
+                <a:latin typeface="Calibri"/>
+              </a:rPr>
+              <a:t>Which laws might apply to loot boxes in games?</a:t>
+            </a:r>
+          </a:p>
+        </p:txBody>
+      </p:sp>
+      <p:sp>
+        <p:nvSpPr>
+          <p:cNvPr id="8" name="Oval 7"/>
+          <p:cNvSpPr/>
+          <p:nvPr/>
+        </p:nvSpPr>
+        <p:spPr>
+          <a:xfrm>
+            <a:off x="548640" y="3212592"/>
+            <a:ext cx="411480" cy="411480"/>
+          </a:xfrm>
+          <a:prstGeom prst="ellipse">
+            <a:avLst/>
+          </a:prstGeom>
+          <a:solidFill>
+            <a:srgbClr val="33C17A"/>
+          </a:solidFill>
+          <a:ln>
+            <a:noFill/>
+          </a:ln>
+          <a:effectLst/>
+        </p:spPr>
+        <p:style>
+          <a:lnRef idx="1">
+            <a:schemeClr val="accent1"/>
+          </a:lnRef>
+          <a:fillRef idx="3">
+            <a:schemeClr val="accent1"/>
+          </a:fillRef>
+          <a:effectRef idx="2">
+            <a:schemeClr val="accent1"/>
+          </a:effectRef>
+          <a:fontRef idx="minor">
+            <a:schemeClr val="lt1"/>
+          </a:fontRef>
+        </p:style>
+        <p:txBody>
+          <a:bodyPr rtlCol="0" anchor="ctr" lIns="0" rIns="0" tIns="0" bIns="0"/>
+          <a:lstStyle/>
+          <a:p>
+            <a:pPr algn="ctr"/>
+            <a:r>
+              <a:rPr sz="1400" b="1">
+                <a:solidFill>
+                  <a:srgbClr val="202122"/>
+                </a:solidFill>
+                <a:latin typeface="Calibri"/>
+              </a:rPr>
+              <a:t>2</a:t>
+            </a:r>
+          </a:p>
+        </p:txBody>
+      </p:sp>
+      <p:sp>
+        <p:nvSpPr>
+          <p:cNvPr id="9" name="TextBox 8"/>
+          <p:cNvSpPr txBox="1"/>
+          <p:nvPr/>
+        </p:nvSpPr>
+        <p:spPr>
+          <a:xfrm>
+            <a:off x="1234440" y="3194304"/>
+            <a:ext cx="10408615" cy="1429512"/>
+          </a:xfrm>
+          <a:prstGeom prst="rect">
+            <a:avLst/>
+          </a:prstGeom>
+          <a:noFill/>
+        </p:spPr>
+        <p:txBody>
+          <a:bodyPr wrap="square" anchor="t" lIns="0" rIns="0" tIns="0" bIns="0"/>
+          <a:lstStyle/>
+          <a:p>
+            <a:pPr algn="l"/>
+            <a:r>
+              <a:rPr sz="2200" b="0" i="0">
+                <a:solidFill>
+                  <a:srgbClr val="202122"/>
+                </a:solidFill>
+                <a:latin typeface="Calibri"/>
+              </a:rPr>
+              <a:t>What does W3C set standards for?</a:t>
+            </a:r>
+          </a:p>
+        </p:txBody>
+      </p:sp>
+      <p:sp>
+        <p:nvSpPr>
+          <p:cNvPr id="10" name="Oval 9"/>
+          <p:cNvSpPr/>
+          <p:nvPr/>
+        </p:nvSpPr>
+        <p:spPr>
+          <a:xfrm>
+            <a:off x="548640" y="4806695"/>
+            <a:ext cx="411480" cy="411480"/>
+          </a:xfrm>
+          <a:prstGeom prst="ellipse">
+            <a:avLst/>
+          </a:prstGeom>
+          <a:solidFill>
+            <a:srgbClr val="33C17A"/>
+          </a:solidFill>
+          <a:ln>
+            <a:noFill/>
+          </a:ln>
+          <a:effectLst/>
+        </p:spPr>
+        <p:style>
+          <a:lnRef idx="1">
+            <a:schemeClr val="accent1"/>
+          </a:lnRef>
+          <a:fillRef idx="3">
+            <a:schemeClr val="accent1"/>
+          </a:fillRef>
+          <a:effectRef idx="2">
+            <a:schemeClr val="accent1"/>
+          </a:effectRef>
+          <a:fontRef idx="minor">
+            <a:schemeClr val="lt1"/>
+          </a:fontRef>
+        </p:style>
+        <p:txBody>
+          <a:bodyPr rtlCol="0" anchor="ctr" lIns="0" rIns="0" tIns="0" bIns="0"/>
+          <a:lstStyle/>
+          <a:p>
+            <a:pPr algn="ctr"/>
+            <a:r>
+              <a:rPr sz="1400" b="1">
+                <a:solidFill>
+                  <a:srgbClr val="202122"/>
+                </a:solidFill>
+                <a:latin typeface="Calibri"/>
+              </a:rPr>
+              <a:t>3</a:t>
+            </a:r>
+          </a:p>
         </p:txBody>
       </p:sp>
       <p:sp>
@@ -8293,8 +10257,8 @@
         </p:nvSpPr>
         <p:spPr>
           <a:xfrm>
-            <a:off x="8503920" y="1874519"/>
-            <a:ext cx="2926080" cy="365760"/>
+            <a:off x="1234440" y="4788408"/>
+            <a:ext cx="10408615" cy="1429512"/>
           </a:xfrm>
           <a:prstGeom prst="rect">
             <a:avLst/>
@@ -8307,112 +10271,13 @@
           <a:p>
             <a:pPr algn="l"/>
             <a:r>
-              <a:rPr sz="1300" b="1" i="0">
-                <a:solidFill>
-                  <a:srgbClr val="A9C8F0"/>
-                </a:solidFill>
-                <a:latin typeface="Calibri"/>
-              </a:rPr>
-              <a:t>REVISE THIS TOPIC</a:t>
-            </a:r>
-          </a:p>
-        </p:txBody>
-      </p:sp>
-      <p:sp>
-        <p:nvSpPr>
-          <p:cNvPr id="12" name="TextBox 11"/>
-          <p:cNvSpPr txBox="1"/>
-          <p:nvPr/>
-        </p:nvSpPr>
-        <p:spPr>
-          <a:xfrm>
-            <a:off x="8503920" y="2286000"/>
-            <a:ext cx="2926080" cy="548640"/>
-          </a:xfrm>
-          <a:prstGeom prst="rect">
-            <a:avLst/>
-          </a:prstGeom>
-          <a:noFill/>
-        </p:spPr>
-        <p:txBody>
-          <a:bodyPr wrap="square" anchor="t" lIns="0" rIns="0" tIns="0" bIns="0"/>
-          <a:lstStyle/>
-          <a:p>
-            <a:pPr algn="l"/>
-            <a:r>
-              <a:rPr sz="1400" b="0" i="0">
-                <a:solidFill>
-                  <a:srgbClr val="FFFFFF"/>
-                </a:solidFill>
-                <a:latin typeface="Calibri"/>
-              </a:rPr>
-              <a:t>Revision notes for this lesson are on the study wiki:</a:t>
-            </a:r>
-          </a:p>
-        </p:txBody>
-      </p:sp>
-      <p:sp>
-        <p:nvSpPr>
-          <p:cNvPr id="13" name="TextBox 12"/>
-          <p:cNvSpPr txBox="1"/>
-          <p:nvPr/>
-        </p:nvSpPr>
-        <p:spPr>
-          <a:xfrm>
-            <a:off x="8503920" y="2926080"/>
-            <a:ext cx="2926080" cy="1463040"/>
-          </a:xfrm>
-          <a:prstGeom prst="rect">
-            <a:avLst/>
-          </a:prstGeom>
-          <a:noFill/>
-        </p:spPr>
-        <p:txBody>
-          <a:bodyPr wrap="square" anchor="t" lIns="0" rIns="0" tIns="0" bIns="0"/>
-          <a:lstStyle/>
-          <a:p>
-            <a:pPr algn="l"/>
-            <a:r>
-              <a:rPr sz="2000" b="1" i="0">
-                <a:solidFill>
-                  <a:srgbClr val="FFFFFF"/>
-                </a:solidFill>
-                <a:latin typeface="Cambria"/>
-              </a:rPr>
-              <a:t>Ethics and Risk</a:t>
-            </a:r>
-          </a:p>
-        </p:txBody>
-      </p:sp>
-      <p:sp>
-        <p:nvSpPr>
-          <p:cNvPr id="14" name="TextBox 13"/>
-          <p:cNvSpPr txBox="1"/>
-          <p:nvPr/>
-        </p:nvSpPr>
-        <p:spPr>
-          <a:xfrm>
-            <a:off x="548640" y="5669280"/>
-            <a:ext cx="11094415" cy="548640"/>
-          </a:xfrm>
-          <a:prstGeom prst="rect">
-            <a:avLst/>
-          </a:prstGeom>
-          <a:noFill/>
-        </p:spPr>
-        <p:txBody>
-          <a:bodyPr wrap="square" anchor="t" lIns="0" rIns="0" tIns="0" bIns="0"/>
-          <a:lstStyle/>
-          <a:p>
-            <a:pPr algn="l"/>
-            <a:r>
-              <a:rPr sz="1200" b="0" i="0">
-                <a:solidFill>
-                  <a:srgbClr val="A9C8F0"/>
-                </a:solidFill>
-                <a:latin typeface="Calibri"/>
-              </a:rPr>
-              <a:t>https://lana6478.github.io/T-level-Digital-Software-Development/#/02-occupational-specialism/02-ethics-and-risk.md</a:t>
+              <a:rPr sz="2200" b="0" i="0">
+                <a:solidFill>
+                  <a:srgbClr val="202122"/>
+                </a:solidFill>
+                <a:latin typeface="Calibri"/>
+              </a:rPr>
+              <a:t>Why do software licences matter?</a:t>
             </a:r>
           </a:p>
         </p:txBody>
